--- a/assets/SE2026-G22-校园互助平台-项目方案PPT.pptx
+++ b/assets/SE2026-G22-校园互助平台-项目方案PPT.pptx
@@ -3794,6 +3794,10 @@
             <a:prstDash val="solid"/>
           </a:ln>
         </p:spPr>
+        <p:txBody>
+          <a:bodyPr/>
+          <a:p/>
+        </p:txBody>
       </p:sp>
       <p:sp>
         <p:nvSpPr>
@@ -3892,6 +3896,10 @@
             </a:outerShdw>
           </a:effectLst>
         </p:spPr>
+        <p:txBody>
+          <a:bodyPr/>
+          <a:p/>
+        </p:txBody>
       </p:sp>
       <p:sp>
         <p:nvSpPr>
@@ -4104,6 +4112,10 @@
             <a:prstDash val="solid"/>
           </a:ln>
         </p:spPr>
+        <p:txBody>
+          <a:bodyPr/>
+          <a:p/>
+        </p:txBody>
       </p:sp>
       <p:sp>
         <p:nvSpPr>
@@ -4178,6 +4190,10 @@
             </a:outerShdw>
           </a:effectLst>
         </p:spPr>
+        <p:txBody>
+          <a:bodyPr/>
+          <a:p/>
+        </p:txBody>
       </p:sp>
       <p:sp>
         <p:nvSpPr>
@@ -4241,6 +4257,10 @@
             <a:prstDash val="solid"/>
           </a:ln>
         </p:spPr>
+        <p:txBody>
+          <a:bodyPr/>
+          <a:p/>
+        </p:txBody>
       </p:sp>
       <p:sp>
         <p:nvSpPr>
@@ -4362,6 +4382,10 @@
             </a:outerShdw>
           </a:effectLst>
         </p:spPr>
+        <p:txBody>
+          <a:bodyPr/>
+          <a:p/>
+        </p:txBody>
       </p:sp>
       <p:sp>
         <p:nvSpPr>
@@ -4425,6 +4449,10 @@
             <a:prstDash val="solid"/>
           </a:ln>
         </p:spPr>
+        <p:txBody>
+          <a:bodyPr/>
+          <a:p/>
+        </p:txBody>
       </p:sp>
       <p:sp>
         <p:nvSpPr>
@@ -4546,6 +4574,10 @@
             </a:outerShdw>
           </a:effectLst>
         </p:spPr>
+        <p:txBody>
+          <a:bodyPr/>
+          <a:p/>
+        </p:txBody>
       </p:sp>
       <p:sp>
         <p:nvSpPr>
@@ -4609,6 +4641,10 @@
             <a:prstDash val="solid"/>
           </a:ln>
         </p:spPr>
+        <p:txBody>
+          <a:bodyPr/>
+          <a:p/>
+        </p:txBody>
       </p:sp>
       <p:sp>
         <p:nvSpPr>
@@ -4730,6 +4766,10 @@
             </a:outerShdw>
           </a:effectLst>
         </p:spPr>
+        <p:txBody>
+          <a:bodyPr/>
+          <a:p/>
+        </p:txBody>
       </p:sp>
       <p:sp>
         <p:nvSpPr>
@@ -4793,6 +4833,10 @@
             <a:prstDash val="solid"/>
           </a:ln>
         </p:spPr>
+        <p:txBody>
+          <a:bodyPr/>
+          <a:p/>
+        </p:txBody>
       </p:sp>
       <p:sp>
         <p:nvSpPr>
@@ -4914,6 +4958,10 @@
             </a:outerShdw>
           </a:effectLst>
         </p:spPr>
+        <p:txBody>
+          <a:bodyPr/>
+          <a:p/>
+        </p:txBody>
       </p:sp>
       <p:sp>
         <p:nvSpPr>
@@ -5783,6 +5831,10 @@
             <a:prstDash val="solid"/>
           </a:ln>
         </p:spPr>
+        <p:txBody>
+          <a:bodyPr/>
+          <a:p/>
+        </p:txBody>
       </p:sp>
       <p:sp>
         <p:nvSpPr>
@@ -5802,6 +5854,10 @@
             <a:srgbClr val="EEF2FF"/>
           </a:solidFill>
         </p:spPr>
+        <p:txBody>
+          <a:bodyPr/>
+          <a:p/>
+        </p:txBody>
       </p:sp>
       <p:sp>
         <p:nvSpPr>
@@ -5901,6 +5957,10 @@
             <a:prstDash val="solid"/>
           </a:ln>
         </p:spPr>
+        <p:txBody>
+          <a:bodyPr/>
+          <a:p/>
+        </p:txBody>
       </p:sp>
       <p:sp>
         <p:nvSpPr>
@@ -6111,6 +6171,10 @@
             <a:prstDash val="solid"/>
           </a:ln>
         </p:spPr>
+        <p:txBody>
+          <a:bodyPr/>
+          <a:p/>
+        </p:txBody>
       </p:sp>
       <p:sp>
         <p:nvSpPr>
@@ -6578,6 +6642,10 @@
             </a:outerShdw>
           </a:effectLst>
         </p:spPr>
+        <p:txBody>
+          <a:bodyPr/>
+          <a:p/>
+        </p:txBody>
       </p:sp>
       <p:sp>
         <p:nvSpPr>
@@ -6639,6 +6707,10 @@
             <a:prstDash val="solid"/>
           </a:ln>
         </p:spPr>
+        <p:txBody>
+          <a:bodyPr/>
+          <a:p/>
+        </p:txBody>
       </p:sp>
       <p:sp>
         <p:nvSpPr>
@@ -6752,6 +6824,10 @@
             </a:outerShdw>
           </a:effectLst>
         </p:spPr>
+        <p:txBody>
+          <a:bodyPr/>
+          <a:p/>
+        </p:txBody>
       </p:sp>
       <p:sp>
         <p:nvSpPr>
@@ -6813,6 +6889,10 @@
             <a:prstDash val="solid"/>
           </a:ln>
         </p:spPr>
+        <p:txBody>
+          <a:bodyPr/>
+          <a:p/>
+        </p:txBody>
       </p:sp>
       <p:sp>
         <p:nvSpPr>
@@ -7061,6 +7141,10 @@
             <a:prstDash val="solid"/>
           </a:ln>
         </p:spPr>
+        <p:txBody>
+          <a:bodyPr/>
+          <a:p/>
+        </p:txBody>
       </p:sp>
       <p:sp>
         <p:nvSpPr>
@@ -7294,6 +7378,10 @@
             <a:prstDash val="solid"/>
           </a:ln>
         </p:spPr>
+        <p:txBody>
+          <a:bodyPr/>
+          <a:p/>
+        </p:txBody>
       </p:sp>
       <p:sp>
         <p:nvSpPr>
@@ -7368,6 +7456,10 @@
             </a:outerShdw>
           </a:effectLst>
         </p:spPr>
+        <p:txBody>
+          <a:bodyPr/>
+          <a:p/>
+        </p:txBody>
       </p:sp>
       <p:sp>
         <p:nvSpPr>
@@ -7435,6 +7527,10 @@
             <a:prstDash val="solid"/>
           </a:ln>
         </p:spPr>
+        <p:txBody>
+          <a:bodyPr/>
+          <a:p/>
+        </p:txBody>
       </p:sp>
       <p:sp>
         <p:nvSpPr>
@@ -7552,6 +7648,10 @@
             </a:outerShdw>
           </a:effectLst>
         </p:spPr>
+        <p:txBody>
+          <a:bodyPr/>
+          <a:p/>
+        </p:txBody>
       </p:sp>
       <p:sp>
         <p:nvSpPr>
@@ -7619,6 +7719,10 @@
             <a:prstDash val="solid"/>
           </a:ln>
         </p:spPr>
+        <p:txBody>
+          <a:bodyPr/>
+          <a:p/>
+        </p:txBody>
       </p:sp>
       <p:sp>
         <p:nvSpPr>
@@ -7736,6 +7840,10 @@
             </a:outerShdw>
           </a:effectLst>
         </p:spPr>
+        <p:txBody>
+          <a:bodyPr/>
+          <a:p/>
+        </p:txBody>
       </p:sp>
       <p:sp>
         <p:nvSpPr>
@@ -7803,6 +7911,10 @@
             <a:prstDash val="solid"/>
           </a:ln>
         </p:spPr>
+        <p:txBody>
+          <a:bodyPr/>
+          <a:p/>
+        </p:txBody>
       </p:sp>
       <p:sp>
         <p:nvSpPr>
@@ -7920,6 +8032,10 @@
             </a:outerShdw>
           </a:effectLst>
         </p:spPr>
+        <p:txBody>
+          <a:bodyPr/>
+          <a:p/>
+        </p:txBody>
       </p:sp>
       <p:sp>
         <p:nvSpPr>
@@ -7987,6 +8103,10 @@
             <a:prstDash val="solid"/>
           </a:ln>
         </p:spPr>
+        <p:txBody>
+          <a:bodyPr/>
+          <a:p/>
+        </p:txBody>
       </p:sp>
       <p:sp>
         <p:nvSpPr>
@@ -8104,6 +8224,10 @@
             </a:outerShdw>
           </a:effectLst>
         </p:spPr>
+        <p:txBody>
+          <a:bodyPr/>
+          <a:p/>
+        </p:txBody>
       </p:sp>
       <p:sp>
         <p:nvSpPr>
@@ -8171,6 +8295,10 @@
             <a:prstDash val="solid"/>
           </a:ln>
         </p:spPr>
+        <p:txBody>
+          <a:bodyPr/>
+          <a:p/>
+        </p:txBody>
       </p:sp>
       <p:sp>
         <p:nvSpPr>
@@ -8288,6 +8416,10 @@
             </a:outerShdw>
           </a:effectLst>
         </p:spPr>
+        <p:txBody>
+          <a:bodyPr/>
+          <a:p/>
+        </p:txBody>
       </p:sp>
       <p:sp>
         <p:nvSpPr>
@@ -9369,6 +9501,10 @@
             <a:prstDash val="solid"/>
           </a:ln>
         </p:spPr>
+        <p:txBody>
+          <a:bodyPr/>
+          <a:p/>
+        </p:txBody>
       </p:sp>
       <p:sp>
         <p:nvSpPr>
@@ -9467,6 +9603,10 @@
             </a:outerShdw>
           </a:effectLst>
         </p:spPr>
+        <p:txBody>
+          <a:bodyPr/>
+          <a:p/>
+        </p:txBody>
       </p:sp>
       <p:sp>
         <p:nvSpPr>
@@ -9690,6 +9830,10 @@
             <a:prstDash val="solid"/>
           </a:ln>
         </p:spPr>
+        <p:txBody>
+          <a:bodyPr/>
+          <a:p/>
+        </p:txBody>
       </p:sp>
       <p:sp>
         <p:nvSpPr>
@@ -9788,6 +9932,10 @@
             </a:outerShdw>
           </a:effectLst>
         </p:spPr>
+        <p:txBody>
+          <a:bodyPr/>
+          <a:p/>
+        </p:txBody>
       </p:sp>
       <p:sp>
         <p:nvSpPr>
@@ -9876,6 +10024,10 @@
             </a:outerShdw>
           </a:effectLst>
         </p:spPr>
+        <p:txBody>
+          <a:bodyPr/>
+          <a:p/>
+        </p:txBody>
       </p:sp>
       <p:sp>
         <p:nvSpPr>
@@ -9926,7 +10078,7 @@
                 <a:ea typeface="微软雅黑" panose="020B0503020204020204" pitchFamily="34" charset="-122"/>
                 <a:cs typeface="微软雅黑" panose="020B0503020204020204" pitchFamily="34" charset="-120"/>
               </a:rPr>
-              <a:t>范围锁定 MVP，W10–W11 峰值周例会加密为两次</a:t>
+              <a:t>范围锁定 MVP，2026/11/23–12/04 峰值周例会加密</a:t>
             </a:r>
           </a:p>
         </p:txBody>
@@ -9964,6 +10116,10 @@
             </a:outerShdw>
           </a:effectLst>
         </p:spPr>
+        <p:txBody>
+          <a:bodyPr/>
+          <a:p/>
+        </p:txBody>
       </p:sp>
       <p:sp>
         <p:nvSpPr>
@@ -11160,6 +11316,10 @@
             </a:outerShdw>
           </a:effectLst>
         </p:spPr>
+        <p:txBody>
+          <a:bodyPr/>
+          <a:p/>
+        </p:txBody>
       </p:sp>
       <p:sp>
         <p:nvSpPr>
@@ -11182,6 +11342,10 @@
             <a:noFill/>
           </a:ln>
         </p:spPr>
+        <p:txBody>
+          <a:bodyPr/>
+          <a:p/>
+        </p:txBody>
       </p:sp>
       <p:sp>
         <p:nvSpPr>
@@ -11474,6 +11638,10 @@
             <a:prstDash val="solid"/>
           </a:ln>
         </p:spPr>
+        <p:txBody>
+          <a:bodyPr/>
+          <a:p/>
+        </p:txBody>
       </p:sp>
       <p:sp>
         <p:nvSpPr>
@@ -11548,6 +11716,10 @@
             </a:outerShdw>
           </a:effectLst>
         </p:spPr>
+        <p:txBody>
+          <a:bodyPr/>
+          <a:p/>
+        </p:txBody>
       </p:sp>
       <p:sp>
         <p:nvSpPr>
@@ -11611,6 +11783,10 @@
             <a:prstDash val="solid"/>
           </a:ln>
         </p:spPr>
+        <p:txBody>
+          <a:bodyPr/>
+          <a:p/>
+        </p:txBody>
       </p:sp>
       <p:sp>
         <p:nvSpPr>
@@ -11867,6 +12043,10 @@
             </a:outerShdw>
           </a:effectLst>
         </p:spPr>
+        <p:txBody>
+          <a:bodyPr/>
+          <a:p/>
+        </p:txBody>
       </p:sp>
       <p:sp>
         <p:nvSpPr>
@@ -11930,6 +12110,10 @@
             <a:prstDash val="solid"/>
           </a:ln>
         </p:spPr>
+        <p:txBody>
+          <a:bodyPr/>
+          <a:p/>
+        </p:txBody>
       </p:sp>
       <p:sp>
         <p:nvSpPr>
@@ -12186,6 +12370,10 @@
             </a:outerShdw>
           </a:effectLst>
         </p:spPr>
+        <p:txBody>
+          <a:bodyPr/>
+          <a:p/>
+        </p:txBody>
       </p:sp>
       <p:sp>
         <p:nvSpPr>
@@ -12398,6 +12586,10 @@
             <a:prstDash val="solid"/>
           </a:ln>
         </p:spPr>
+        <p:txBody>
+          <a:bodyPr/>
+          <a:p/>
+        </p:txBody>
       </p:sp>
       <p:sp>
         <p:nvSpPr>
@@ -12472,6 +12664,10 @@
             </a:outerShdw>
           </a:effectLst>
         </p:spPr>
+        <p:txBody>
+          <a:bodyPr/>
+          <a:p/>
+        </p:txBody>
       </p:sp>
       <p:sp>
         <p:nvSpPr>
@@ -12559,7 +12755,7 @@
                 <a:ea typeface="微软雅黑" panose="020B0503020204020204" pitchFamily="34" charset="-122"/>
                 <a:cs typeface="微软雅黑" panose="020B0503020204020204" pitchFamily="34" charset="-120"/>
               </a:rPr>
-              <a:t>W1–W2（9/16–9/23）· 分组信息、预备作业、项目介绍PPT</a:t>
+              <a:t>9/16–9/23· 分组信息、预备作业、项目介绍PPT</a:t>
             </a:r>
           </a:p>
         </p:txBody>
@@ -12597,6 +12793,10 @@
             </a:outerShdw>
           </a:effectLst>
         </p:spPr>
+        <p:txBody>
+          <a:bodyPr/>
+          <a:p/>
+        </p:txBody>
       </p:sp>
       <p:sp>
         <p:nvSpPr>
@@ -12684,7 +12884,7 @@
                 <a:ea typeface="微软雅黑" panose="020B0503020204020204" pitchFamily="34" charset="-122"/>
                 <a:cs typeface="微软雅黑" panose="020B0503020204020204" pitchFamily="34" charset="-120"/>
               </a:rPr>
-              <a:t>W3–W4（9/30–10/14）· 项目计划书、计划PPT、修订版</a:t>
+              <a:t>9/30–10/14· 项目计划书、计划PPT、修订版</a:t>
             </a:r>
           </a:p>
         </p:txBody>
@@ -12722,6 +12922,10 @@
             </a:outerShdw>
           </a:effectLst>
         </p:spPr>
+        <p:txBody>
+          <a:bodyPr/>
+          <a:p/>
+        </p:txBody>
       </p:sp>
       <p:sp>
         <p:nvSpPr>
@@ -12809,7 +13013,7 @@
                 <a:ea typeface="微软雅黑" panose="020B0503020204020204" pitchFamily="34" charset="-122"/>
                 <a:cs typeface="微软雅黑" panose="020B0503020204020204" pitchFamily="34" charset="-120"/>
               </a:rPr>
-              <a:t>W4–W5（10/14–10/21）· 可行性分析报告</a:t>
+              <a:t>10/14–10/21· 可行性分析报告</a:t>
             </a:r>
           </a:p>
         </p:txBody>
@@ -12847,6 +13051,10 @@
             </a:outerShdw>
           </a:effectLst>
         </p:spPr>
+        <p:txBody>
+          <a:bodyPr/>
+          <a:p/>
+        </p:txBody>
       </p:sp>
       <p:sp>
         <p:nvSpPr>
@@ -12934,7 +13142,7 @@
                 <a:ea typeface="微软雅黑" panose="020B0503020204020204" pitchFamily="34" charset="-122"/>
                 <a:cs typeface="微软雅黑" panose="020B0503020204020204" pitchFamily="34" charset="-120"/>
               </a:rPr>
-              <a:t>W6–W8（10/28–11/11）· SRS、需求评审PPT、SRS修订版</a:t>
+              <a:t>10/28–11/11· SRS、需求评审PPT、SRS修订版</a:t>
             </a:r>
           </a:p>
         </p:txBody>
@@ -12972,6 +13180,10 @@
             </a:outerShdw>
           </a:effectLst>
         </p:spPr>
+        <p:txBody>
+          <a:bodyPr/>
+          <a:p/>
+        </p:txBody>
       </p:sp>
       <p:sp>
         <p:nvSpPr>
@@ -13059,7 +13271,7 @@
                 <a:ea typeface="微软雅黑" panose="020B0503020204020204" pitchFamily="34" charset="-122"/>
                 <a:cs typeface="微软雅黑" panose="020B0503020204020204" pitchFamily="34" charset="-120"/>
               </a:rPr>
-              <a:t>W8–W9（11/11–11/18）· 总体设计报告、原型与视觉稿</a:t>
+              <a:t>11/11–11/18· 总体设计报告、原型与视觉稿</a:t>
             </a:r>
           </a:p>
         </p:txBody>
@@ -13097,6 +13309,10 @@
             </a:outerShdw>
           </a:effectLst>
         </p:spPr>
+        <p:txBody>
+          <a:bodyPr/>
+          <a:p/>
+        </p:txBody>
       </p:sp>
       <p:sp>
         <p:nvSpPr>
@@ -13184,7 +13400,7 @@
                 <a:ea typeface="微软雅黑" panose="020B0503020204020204" pitchFamily="34" charset="-122"/>
                 <a:cs typeface="微软雅黑" panose="020B0503020204020204" pitchFamily="34" charset="-120"/>
               </a:rPr>
-              <a:t>W9–W11（11/18–12/2）· 详细设计报告、设计评审PPT、修订说明</a:t>
+              <a:t>11/18–12/2· 详细设计报告、设计评审PPT、修订说明</a:t>
             </a:r>
           </a:p>
         </p:txBody>
@@ -13222,6 +13438,10 @@
             </a:outerShdw>
           </a:effectLst>
         </p:spPr>
+        <p:txBody>
+          <a:bodyPr/>
+          <a:p/>
+        </p:txBody>
       </p:sp>
       <p:sp>
         <p:nvSpPr>
@@ -13309,7 +13529,7 @@
                 <a:ea typeface="微软雅黑" panose="020B0503020204020204" pitchFamily="34" charset="-122"/>
                 <a:cs typeface="微软雅黑" panose="020B0503020204020204" pitchFamily="34" charset="-120"/>
               </a:rPr>
-              <a:t>W10–W12（11/25–12/9）· 源码、代码清单、测试用例</a:t>
+              <a:t>11/25–12/9· 源码、代码清单、测试用例</a:t>
             </a:r>
           </a:p>
         </p:txBody>
@@ -13347,6 +13567,10 @@
             </a:outerShdw>
           </a:effectLst>
         </p:spPr>
+        <p:txBody>
+          <a:bodyPr/>
+          <a:p/>
+        </p:txBody>
       </p:sp>
       <p:sp>
         <p:nvSpPr>
@@ -13434,7 +13658,7 @@
                 <a:ea typeface="微软雅黑" panose="020B0503020204020204" pitchFamily="34" charset="-122"/>
                 <a:cs typeface="微软雅黑" panose="020B0503020204020204" pitchFamily="34" charset="-120"/>
               </a:rPr>
-              <a:t>W11–W13（12/2–12/16）· 系统测试报告、测试报告修订版</a:t>
+              <a:t>12/2–12/16· 系统测试报告、测试报告修订版</a:t>
             </a:r>
           </a:p>
         </p:txBody>
@@ -13472,6 +13696,10 @@
             </a:outerShdw>
           </a:effectLst>
         </p:spPr>
+        <p:txBody>
+          <a:bodyPr/>
+          <a:p/>
+        </p:txBody>
       </p:sp>
       <p:sp>
         <p:nvSpPr>
@@ -13559,7 +13787,7 @@
                 <a:ea typeface="微软雅黑" panose="020B0503020204020204" pitchFamily="34" charset="-122"/>
                 <a:cs typeface="微软雅黑" panose="020B0503020204020204" pitchFamily="34" charset="-120"/>
               </a:rPr>
-              <a:t>W14（12/23）· 优化记录、试运行反馈、使用手册</a:t>
+              <a:t>12/23· 优化记录、试运行反馈、使用手册</a:t>
             </a:r>
           </a:p>
         </p:txBody>
@@ -13597,6 +13825,10 @@
             </a:outerShdw>
           </a:effectLst>
         </p:spPr>
+        <p:txBody>
+          <a:bodyPr/>
+          <a:p/>
+        </p:txBody>
       </p:sp>
       <p:sp>
         <p:nvSpPr>
@@ -13684,7 +13916,7 @@
                 <a:ea typeface="微软雅黑" panose="020B0503020204020204" pitchFamily="34" charset="-122"/>
                 <a:cs typeface="微软雅黑" panose="020B0503020204020204" pitchFamily="34" charset="-120"/>
               </a:rPr>
-              <a:t>W15–W16（12/30–1/6）· 项目总结报告、总评审PPT、归档材料</a:t>
+              <a:t>12/30–1/6· 项目总结报告、总评审PPT、归档材料</a:t>
             </a:r>
           </a:p>
         </p:txBody>
@@ -13857,6 +14089,10 @@
             <a:prstDash val="solid"/>
           </a:ln>
         </p:spPr>
+        <p:txBody>
+          <a:bodyPr/>
+          <a:p/>
+        </p:txBody>
       </p:sp>
       <p:sp>
         <p:nvSpPr>
@@ -13955,6 +14191,10 @@
             </a:outerShdw>
           </a:effectLst>
         </p:spPr>
+        <p:txBody>
+          <a:bodyPr/>
+          <a:p/>
+        </p:txBody>
       </p:sp>
       <p:sp>
         <p:nvSpPr>
@@ -14167,6 +14407,10 @@
             <a:prstDash val="solid"/>
           </a:ln>
         </p:spPr>
+        <p:txBody>
+          <a:bodyPr/>
+          <a:p/>
+        </p:txBody>
       </p:sp>
       <p:sp>
         <p:nvSpPr>
@@ -14201,6 +14445,10 @@
             </a:outerShdw>
           </a:effectLst>
         </p:spPr>
+        <p:txBody>
+          <a:bodyPr/>
+          <a:p/>
+        </p:txBody>
       </p:sp>
       <p:sp>
         <p:nvSpPr>
@@ -14237,7 +14485,7 @@
                 <a:ea typeface="微软雅黑" panose="020B0503020204020204" pitchFamily="34" charset="-122"/>
                 <a:cs typeface="微软雅黑" panose="020B0503020204020204" pitchFamily="34" charset="-120"/>
               </a:rPr>
-              <a:t>团队分工（W1–W16 全程）</a:t>
+              <a:t>团队分工 · 全程</a:t>
             </a:r>
           </a:p>
         </p:txBody>
@@ -14264,6 +14512,10 @@
             <a:prstDash val="solid"/>
           </a:ln>
         </p:spPr>
+        <p:txBody>
+          <a:bodyPr/>
+          <a:p/>
+        </p:txBody>
       </p:sp>
       <p:sp>
         <p:nvSpPr>
@@ -14416,7 +14668,7 @@
                 <a:ea typeface="微软雅黑" panose="020B0503020204020204" pitchFamily="34" charset="-122"/>
                 <a:cs typeface="微软雅黑" panose="020B0503020204020204" pitchFamily="34" charset="-120"/>
               </a:rPr>
-              <a:t>两人均覆盖 W1–W16 全部 16 个教学周，无空档周</a:t>
+              <a:t>两人均覆盖 2026/09/14–2027/01/08 全部 16 个教学周，无空档周</a:t>
             </a:r>
           </a:p>
           <a:p>
@@ -14487,6 +14739,10 @@
             </a:outerShdw>
           </a:effectLst>
         </p:spPr>
+        <p:txBody>
+          <a:bodyPr/>
+          <a:p/>
+        </p:txBody>
       </p:sp>
       <p:sp>
         <p:nvSpPr>
@@ -14550,6 +14806,10 @@
             <a:prstDash val="solid"/>
           </a:ln>
         </p:spPr>
+        <p:txBody>
+          <a:bodyPr/>
+          <a:p/>
+        </p:txBody>
       </p:sp>
       <p:sp>
         <p:nvSpPr>
@@ -14948,7 +15208,7 @@
                 <a:ea typeface="微软雅黑" panose="020B0503020204020204" pitchFamily="34" charset="-122"/>
                 <a:cs typeface="微软雅黑" panose="020B0503020204020204" pitchFamily="34" charset="-120"/>
               </a:rPr>
-              <a:t>15 项阶段交付物逐项落实到人；两人工作量占比 55.0% : 45.0%，均覆盖 W1–W16 全程。</a:t>
+              <a:t>15 项阶段交付物逐项落实到人；两人工作量占比 55.0% : 45.0%，均覆盖全程。</a:t>
             </a:r>
           </a:p>
         </p:txBody>
@@ -17215,7 +17475,7 @@
                 <a:ea typeface="微软雅黑" panose="020B0503020204020204" pitchFamily="34" charset="-122"/>
                 <a:cs typeface="微软雅黑" panose="020B0503020204020204" pitchFamily="34" charset="-120"/>
               </a:rPr>
-              <a:t>两人均覆盖 W1–W16 全部 16 个教学周，无空档周；6 项评审与汇报型交付物（评审 PPT、代码清单、总评审 PPT 等）由两人共同承担</a:t>
+              <a:t>覆盖 2026/09/14–2027/01/08 全部 16 个教学周，无空档周；6 项评审与汇报型交付物由两人共同承担</a:t>
             </a:r>
           </a:p>
         </p:txBody>
@@ -17388,6 +17648,10 @@
             <a:prstDash val="solid"/>
           </a:ln>
         </p:spPr>
+        <p:txBody>
+          <a:bodyPr/>
+          <a:p/>
+        </p:txBody>
       </p:sp>
       <p:sp>
         <p:nvSpPr>
@@ -17486,6 +17750,10 @@
             </a:outerShdw>
           </a:effectLst>
         </p:spPr>
+        <p:txBody>
+          <a:bodyPr/>
+          <a:p/>
+        </p:txBody>
       </p:sp>
       <p:sp>
         <p:nvSpPr>
@@ -17549,6 +17817,10 @@
             <a:prstDash val="solid"/>
           </a:ln>
         </p:spPr>
+        <p:txBody>
+          <a:bodyPr/>
+          <a:p/>
+        </p:txBody>
       </p:sp>
       <p:sp>
         <p:nvSpPr>
@@ -17734,7 +18006,7 @@
                 <a:ea typeface="微软雅黑" panose="020B0503020204020204" pitchFamily="34" charset="-122"/>
                 <a:cs typeface="微软雅黑" panose="020B0503020204020204" pitchFamily="34" charset="-120"/>
               </a:rPr>
-              <a:t>2026/09/14 – 2027/01/08（W1–W16）</a:t>
+              <a:t>2026/09/14 – 2027/01/08（2026/09/14–2027/01/08）</a:t>
             </a:r>
           </a:p>
           <a:p>
@@ -17986,7 +18258,7 @@
                 <a:ea typeface="微软雅黑" panose="020B0503020204020204" pitchFamily="34" charset="-122"/>
                 <a:cs typeface="微软雅黑" panose="020B0503020204020204" pitchFamily="34" charset="-120"/>
               </a:rPr>
-              <a:t>质量保证与配置管理</a:t>
+              <a:t>团队绩效评价（量化）</a:t>
             </a:r>
           </a:p>
         </p:txBody>
@@ -18013,6 +18285,10 @@
             <a:prstDash val="solid"/>
           </a:ln>
         </p:spPr>
+        <p:txBody>
+          <a:bodyPr/>
+          <a:p/>
+        </p:txBody>
       </p:sp>
       <p:sp>
         <p:nvSpPr>
@@ -18049,7 +18325,7 @@
                 <a:ea typeface="微软雅黑" panose="020B0503020204020204" pitchFamily="34" charset="-122"/>
                 <a:cs typeface="微软雅黑" panose="020B0503020204020204" pitchFamily="34" charset="-120"/>
               </a:rPr>
-              <a:t>用流程约束保证两人小组的交付质量与文档可追溯。</a:t>
+              <a:t>每个里程碑按 4 个维度打分：自评 20% + 互评 40% + 指导教师 40% 加权，满分 100。</a:t>
             </a:r>
           </a:p>
         </p:txBody>
@@ -18063,11 +18339,11 @@
         <p:spPr>
           <a:xfrm>
             <a:off x="548640" y="1572768"/>
-            <a:ext cx="5349240" cy="3931920"/>
+            <a:ext cx="7406640" cy="3255264"/>
           </a:xfrm>
           <a:prstGeom prst="roundRect">
             <a:avLst>
-              <a:gd name="adj" fmla="val 3255"/>
+              <a:gd name="adj" fmla="val 2808"/>
             </a:avLst>
           </a:prstGeom>
           <a:solidFill>
@@ -18087,17 +18363,207 @@
             </a:outerShdw>
           </a:effectLst>
         </p:spPr>
-      </p:sp>
-      <p:sp>
-        <p:nvSpPr>
-          <p:cNvPr id="6" name="Text 5"/>
-          <p:cNvSpPr/>
-          <p:nvPr/>
-        </p:nvSpPr>
-        <p:spPr>
-          <a:xfrm>
-            <a:off x="822960" y="1700784"/>
-            <a:ext cx="4800600" cy="420624"/>
+        <p:txBody>
+          <a:bodyPr/>
+          <a:p/>
+        </p:txBody>
+      </p:sp>
+      <p:sp>
+        <p:nvSpPr>
+          <p:cNvPr id="6" name="HeadBg 5"/>
+          <p:cNvSpPr/>
+          <p:nvPr/>
+        </p:nvSpPr>
+        <p:spPr>
+          <a:xfrm>
+            <a:off x="548640" y="1572768"/>
+            <a:ext cx="7406640" cy="384048"/>
+          </a:xfrm>
+          <a:prstGeom prst="rect">
+            <a:avLst/>
+          </a:prstGeom>
+          <a:solidFill>
+            <a:srgbClr val="4F46E5"/>
+          </a:solidFill>
+          <a:ln>
+            <a:noFill/>
+          </a:ln>
+        </p:spPr>
+        <p:txBody>
+          <a:bodyPr/>
+          <a:p/>
+        </p:txBody>
+      </p:sp>
+      <p:sp>
+        <p:nvSpPr>
+          <p:cNvPr id="7" name="Text 6"/>
+          <p:cNvSpPr/>
+          <p:nvPr/>
+        </p:nvSpPr>
+        <p:spPr>
+          <a:xfrm>
+            <a:off x="658368" y="1591056"/>
+            <a:ext cx="3017520" cy="347472"/>
+          </a:xfrm>
+          <a:prstGeom prst="rect">
+            <a:avLst/>
+          </a:prstGeom>
+          <a:noFill/>
+          <a:ln>
+            <a:noFill/>
+          </a:ln>
+        </p:spPr>
+        <p:txBody>
+          <a:bodyPr wrap="square" lIns="0" tIns="0" rIns="0" bIns="0" rtlCol="0" anchor="ctr"/>
+          <a:lstStyle/>
+          <a:p>
+            <a:pPr algn="l">
+              <a:buNone/>
+            </a:pPr>
+            <a:r>
+              <a:rPr lang="zh-CN" sz="1200" b="1" dirty="0">
+                <a:solidFill>
+                  <a:srgbClr val="FFFFFF"/>
+                </a:solidFill>
+                <a:latin typeface="微软雅黑" panose="020B0503020204020204" pitchFamily="34" charset="-122"/>
+                <a:ea typeface="微软雅黑" panose="020B0503020204020204" pitchFamily="34" charset="-122"/>
+                <a:cs typeface="微软雅黑" panose="020B0503020204020204" pitchFamily="34" charset="-120"/>
+              </a:rPr>
+              <a:t>评价维度</a:t>
+            </a:r>
+          </a:p>
+        </p:txBody>
+      </p:sp>
+      <p:sp>
+        <p:nvSpPr>
+          <p:cNvPr id="8" name="Text 7"/>
+          <p:cNvSpPr/>
+          <p:nvPr/>
+        </p:nvSpPr>
+        <p:spPr>
+          <a:xfrm>
+            <a:off x="3749040" y="1591056"/>
+            <a:ext cx="1188720" cy="347472"/>
+          </a:xfrm>
+          <a:prstGeom prst="rect">
+            <a:avLst/>
+          </a:prstGeom>
+          <a:noFill/>
+          <a:ln>
+            <a:noFill/>
+          </a:ln>
+        </p:spPr>
+        <p:txBody>
+          <a:bodyPr wrap="square" lIns="0" tIns="0" rIns="0" bIns="0" rtlCol="0" anchor="ctr"/>
+          <a:lstStyle/>
+          <a:p>
+            <a:pPr algn="ctr">
+              <a:buNone/>
+            </a:pPr>
+            <a:r>
+              <a:rPr lang="zh-CN" sz="1200" b="1" dirty="0">
+                <a:solidFill>
+                  <a:srgbClr val="FFFFFF"/>
+                </a:solidFill>
+                <a:latin typeface="微软雅黑" panose="020B0503020204020204" pitchFamily="34" charset="-122"/>
+                <a:ea typeface="微软雅黑" panose="020B0503020204020204" pitchFamily="34" charset="-122"/>
+                <a:cs typeface="微软雅黑" panose="020B0503020204020204" pitchFamily="34" charset="-120"/>
+              </a:rPr>
+              <a:t>权重</a:t>
+            </a:r>
+          </a:p>
+        </p:txBody>
+      </p:sp>
+      <p:sp>
+        <p:nvSpPr>
+          <p:cNvPr id="9" name="Text 8"/>
+          <p:cNvSpPr/>
+          <p:nvPr/>
+        </p:nvSpPr>
+        <p:spPr>
+          <a:xfrm>
+            <a:off x="5029200" y="1591056"/>
+            <a:ext cx="1417320" cy="347472"/>
+          </a:xfrm>
+          <a:prstGeom prst="rect">
+            <a:avLst/>
+          </a:prstGeom>
+          <a:noFill/>
+          <a:ln>
+            <a:noFill/>
+          </a:ln>
+        </p:spPr>
+        <p:txBody>
+          <a:bodyPr wrap="square" lIns="0" tIns="0" rIns="0" bIns="0" rtlCol="0" anchor="ctr"/>
+          <a:lstStyle/>
+          <a:p>
+            <a:pPr algn="ctr">
+              <a:buNone/>
+            </a:pPr>
+            <a:r>
+              <a:rPr lang="zh-CN" sz="1200" b="1" dirty="0">
+                <a:solidFill>
+                  <a:srgbClr val="FFFFFF"/>
+                </a:solidFill>
+                <a:latin typeface="微软雅黑" panose="020B0503020204020204" pitchFamily="34" charset="-122"/>
+                <a:ea typeface="微软雅黑" panose="020B0503020204020204" pitchFamily="34" charset="-122"/>
+                <a:cs typeface="微软雅黑" panose="020B0503020204020204" pitchFamily="34" charset="-120"/>
+              </a:rPr>
+              <a:t>罗嘉昊</a:t>
+            </a:r>
+          </a:p>
+        </p:txBody>
+      </p:sp>
+      <p:sp>
+        <p:nvSpPr>
+          <p:cNvPr id="10" name="Text 9"/>
+          <p:cNvSpPr/>
+          <p:nvPr/>
+        </p:nvSpPr>
+        <p:spPr>
+          <a:xfrm>
+            <a:off x="6492240" y="1591056"/>
+            <a:ext cx="1325880" cy="347472"/>
+          </a:xfrm>
+          <a:prstGeom prst="rect">
+            <a:avLst/>
+          </a:prstGeom>
+          <a:noFill/>
+          <a:ln>
+            <a:noFill/>
+          </a:ln>
+        </p:spPr>
+        <p:txBody>
+          <a:bodyPr wrap="square" lIns="0" tIns="0" rIns="0" bIns="0" rtlCol="0" anchor="ctr"/>
+          <a:lstStyle/>
+          <a:p>
+            <a:pPr algn="ctr">
+              <a:buNone/>
+            </a:pPr>
+            <a:r>
+              <a:rPr lang="zh-CN" sz="1200" b="1" dirty="0">
+                <a:solidFill>
+                  <a:srgbClr val="FFFFFF"/>
+                </a:solidFill>
+                <a:latin typeface="微软雅黑" panose="020B0503020204020204" pitchFamily="34" charset="-122"/>
+                <a:ea typeface="微软雅黑" panose="020B0503020204020204" pitchFamily="34" charset="-122"/>
+                <a:cs typeface="微软雅黑" panose="020B0503020204020204" pitchFamily="34" charset="-120"/>
+              </a:rPr>
+              <a:t>李雨鑫</a:t>
+            </a:r>
+          </a:p>
+        </p:txBody>
+      </p:sp>
+      <p:sp>
+        <p:nvSpPr>
+          <p:cNvPr id="11" name="Text 10"/>
+          <p:cNvSpPr/>
+          <p:nvPr/>
+        </p:nvSpPr>
+        <p:spPr>
+          <a:xfrm>
+            <a:off x="658368" y="1975104"/>
+            <a:ext cx="3017520" cy="438912"/>
           </a:xfrm>
           <a:prstGeom prst="rect">
             <a:avLst/>
@@ -18112,10 +18578,104 @@
           <a:lstStyle/>
           <a:p>
             <a:pPr>
-              <a:buNone/>
-            </a:pPr>
-            <a:r>
-              <a:rPr lang="zh-CN" sz="1800" b="1" dirty="0">
+              <a:lnSpc>
+                <a:spcPct val="110000"/>
+              </a:lnSpc>
+              <a:buNone/>
+            </a:pPr>
+            <a:r>
+              <a:rPr lang="zh-CN" sz="1100" b="1" dirty="0">
+                <a:solidFill>
+                  <a:srgbClr val="0F172A"/>
+                </a:solidFill>
+                <a:latin typeface="微软雅黑" panose="020B0503020204020204" pitchFamily="34" charset="-122"/>
+                <a:ea typeface="微软雅黑" panose="020B0503020204020204" pitchFamily="34" charset="-122"/>
+                <a:cs typeface="微软雅黑" panose="020B0503020204020204" pitchFamily="34" charset="-120"/>
+              </a:rPr>
+              <a:t>任务完成度　</a:t>
+            </a:r>
+            <a:r>
+              <a:rPr lang="zh-CN" sz="950" dirty="0">
+                <a:solidFill>
+                  <a:srgbClr val="64748B"/>
+                </a:solidFill>
+                <a:latin typeface="微软雅黑" panose="020B0503020204020204" pitchFamily="34" charset="-122"/>
+                <a:ea typeface="微软雅黑" panose="020B0503020204020204" pitchFamily="34" charset="-122"/>
+                <a:cs typeface="微软雅黑" panose="020B0503020204020204" pitchFamily="34" charset="-120"/>
+              </a:rPr>
+              <a:t>分配任务是否按期完成、交付物是否齐备</a:t>
+            </a:r>
+          </a:p>
+        </p:txBody>
+      </p:sp>
+      <p:sp>
+        <p:nvSpPr>
+          <p:cNvPr id="12" name="Text 11"/>
+          <p:cNvSpPr/>
+          <p:nvPr/>
+        </p:nvSpPr>
+        <p:spPr>
+          <a:xfrm>
+            <a:off x="3749040" y="1956816"/>
+            <a:ext cx="1188720" cy="475488"/>
+          </a:xfrm>
+          <a:prstGeom prst="rect">
+            <a:avLst/>
+          </a:prstGeom>
+          <a:noFill/>
+          <a:ln>
+            <a:noFill/>
+          </a:ln>
+        </p:spPr>
+        <p:txBody>
+          <a:bodyPr wrap="square" lIns="0" tIns="0" rIns="0" bIns="0" rtlCol="0" anchor="ctr"/>
+          <a:lstStyle/>
+          <a:p>
+            <a:pPr algn="ctr">
+              <a:buNone/>
+            </a:pPr>
+            <a:r>
+              <a:rPr lang="zh-CN" sz="1100" b="1" dirty="0">
+                <a:solidFill>
+                  <a:srgbClr val="334155"/>
+                </a:solidFill>
+                <a:latin typeface="微软雅黑" panose="020B0503020204020204" pitchFamily="34" charset="-122"/>
+                <a:ea typeface="微软雅黑" panose="020B0503020204020204" pitchFamily="34" charset="-122"/>
+                <a:cs typeface="微软雅黑" panose="020B0503020204020204" pitchFamily="34" charset="-120"/>
+              </a:rPr>
+              <a:t>40%</a:t>
+            </a:r>
+          </a:p>
+        </p:txBody>
+      </p:sp>
+      <p:sp>
+        <p:nvSpPr>
+          <p:cNvPr id="13" name="Text 12"/>
+          <p:cNvSpPr/>
+          <p:nvPr/>
+        </p:nvSpPr>
+        <p:spPr>
+          <a:xfrm>
+            <a:off x="5029200" y="1956816"/>
+            <a:ext cx="1417320" cy="475488"/>
+          </a:xfrm>
+          <a:prstGeom prst="rect">
+            <a:avLst/>
+          </a:prstGeom>
+          <a:noFill/>
+          <a:ln>
+            <a:noFill/>
+          </a:ln>
+        </p:spPr>
+        <p:txBody>
+          <a:bodyPr wrap="square" lIns="0" tIns="0" rIns="0" bIns="0" rtlCol="0" anchor="ctr"/>
+          <a:lstStyle/>
+          <a:p>
+            <a:pPr algn="ctr">
+              <a:buNone/>
+            </a:pPr>
+            <a:r>
+              <a:rPr lang="zh-CN" sz="1300" b="1" dirty="0">
                 <a:solidFill>
                   <a:srgbClr val="4F46E5"/>
                 </a:solidFill>
@@ -18123,21 +18683,61 @@
                 <a:ea typeface="微软雅黑" panose="020B0503020204020204" pitchFamily="34" charset="-122"/>
                 <a:cs typeface="微软雅黑" panose="020B0503020204020204" pitchFamily="34" charset="-120"/>
               </a:rPr>
-              <a:t>质量保证</a:t>
-            </a:r>
-          </a:p>
-        </p:txBody>
-      </p:sp>
-      <p:sp>
-        <p:nvSpPr>
-          <p:cNvPr id="7" name="Shape 6"/>
-          <p:cNvSpPr/>
-          <p:nvPr/>
-        </p:nvSpPr>
-        <p:spPr>
-          <a:xfrm>
-            <a:off x="822960" y="2212848"/>
-            <a:ext cx="4800600" cy="0"/>
+              <a:t>90.0</a:t>
+            </a:r>
+          </a:p>
+        </p:txBody>
+      </p:sp>
+      <p:sp>
+        <p:nvSpPr>
+          <p:cNvPr id="14" name="Text 13"/>
+          <p:cNvSpPr/>
+          <p:nvPr/>
+        </p:nvSpPr>
+        <p:spPr>
+          <a:xfrm>
+            <a:off x="6492240" y="1956816"/>
+            <a:ext cx="1325880" cy="475488"/>
+          </a:xfrm>
+          <a:prstGeom prst="rect">
+            <a:avLst/>
+          </a:prstGeom>
+          <a:noFill/>
+          <a:ln>
+            <a:noFill/>
+          </a:ln>
+        </p:spPr>
+        <p:txBody>
+          <a:bodyPr wrap="square" lIns="0" tIns="0" rIns="0" bIns="0" rtlCol="0" anchor="ctr"/>
+          <a:lstStyle/>
+          <a:p>
+            <a:pPr algn="ctr">
+              <a:buNone/>
+            </a:pPr>
+            <a:r>
+              <a:rPr lang="zh-CN" sz="1300" b="1" dirty="0">
+                <a:solidFill>
+                  <a:srgbClr val="0EA5E9"/>
+                </a:solidFill>
+                <a:latin typeface="微软雅黑" panose="020B0503020204020204" pitchFamily="34" charset="-122"/>
+                <a:ea typeface="微软雅黑" panose="020B0503020204020204" pitchFamily="34" charset="-122"/>
+                <a:cs typeface="微软雅黑" panose="020B0503020204020204" pitchFamily="34" charset="-120"/>
+              </a:rPr>
+              <a:t>91.0</a:t>
+            </a:r>
+          </a:p>
+        </p:txBody>
+      </p:sp>
+      <p:sp>
+        <p:nvSpPr>
+          <p:cNvPr id="15" name="Shape 14"/>
+          <p:cNvSpPr/>
+          <p:nvPr/>
+        </p:nvSpPr>
+        <p:spPr>
+          <a:xfrm>
+            <a:off x="548640" y="2432304"/>
+            <a:ext cx="7406640" cy="0"/>
           </a:xfrm>
           <a:prstGeom prst="line">
             <a:avLst/>
@@ -18145,46 +18745,164 @@
           <a:noFill/>
           <a:ln w="12700">
             <a:solidFill>
-              <a:srgbClr val="E2E8F0"/>
+              <a:srgbClr val="E8EDF5"/>
             </a:solidFill>
             <a:prstDash val="solid"/>
           </a:ln>
         </p:spPr>
-      </p:sp>
-      <p:sp>
-        <p:nvSpPr>
-          <p:cNvPr id="8" name="Text 7"/>
-          <p:cNvSpPr/>
-          <p:nvPr/>
-        </p:nvSpPr>
-        <p:spPr>
-          <a:xfrm>
-            <a:off x="822960" y="2359152"/>
-            <a:ext cx="4800600" cy="3017520"/>
-          </a:xfrm>
-          <a:prstGeom prst="rect">
-            <a:avLst/>
-          </a:prstGeom>
-          <a:noFill/>
-          <a:ln>
-            <a:noFill/>
-          </a:ln>
-        </p:spPr>
-        <p:txBody>
-          <a:bodyPr wrap="square" lIns="0" tIns="0" rIns="0" bIns="0" rtlCol="0" anchor="t"/>
+        <p:txBody>
+          <a:bodyPr/>
+          <a:p/>
+        </p:txBody>
+      </p:sp>
+      <p:sp>
+        <p:nvSpPr>
+          <p:cNvPr id="16" name="RowBg 15"/>
+          <p:cNvSpPr/>
+          <p:nvPr/>
+        </p:nvSpPr>
+        <p:spPr>
+          <a:xfrm>
+            <a:off x="548640" y="2432304"/>
+            <a:ext cx="7406640" cy="475488"/>
+          </a:xfrm>
+          <a:prstGeom prst="rect">
+            <a:avLst/>
+          </a:prstGeom>
+          <a:solidFill>
+            <a:srgbClr val="F1F5F9"/>
+          </a:solidFill>
+          <a:ln>
+            <a:noFill/>
+          </a:ln>
+        </p:spPr>
+        <p:txBody>
+          <a:bodyPr/>
+          <a:p/>
+        </p:txBody>
+      </p:sp>
+      <p:sp>
+        <p:nvSpPr>
+          <p:cNvPr id="17" name="Text 16"/>
+          <p:cNvSpPr/>
+          <p:nvPr/>
+        </p:nvSpPr>
+        <p:spPr>
+          <a:xfrm>
+            <a:off x="658368" y="2450592"/>
+            <a:ext cx="3017520" cy="438912"/>
+          </a:xfrm>
+          <a:prstGeom prst="rect">
+            <a:avLst/>
+          </a:prstGeom>
+          <a:noFill/>
+          <a:ln>
+            <a:noFill/>
+          </a:ln>
+        </p:spPr>
+        <p:txBody>
+          <a:bodyPr wrap="square" lIns="0" tIns="0" rIns="0" bIns="0" rtlCol="0" anchor="ctr"/>
           <a:lstStyle/>
           <a:p>
             <a:pPr>
               <a:lnSpc>
-                <a:spcPct val="130000"/>
+                <a:spcPct val="110000"/>
               </a:lnSpc>
-              <a:spcAft>
-                <a:spcPts val="900"/>
-              </a:spcAft>
-              <a:buNone/>
-            </a:pPr>
-            <a:r>
-              <a:rPr lang="zh-CN" sz="1200" dirty="0">
+              <a:buNone/>
+            </a:pPr>
+            <a:r>
+              <a:rPr lang="zh-CN" sz="1100" b="1" dirty="0">
+                <a:solidFill>
+                  <a:srgbClr val="0F172A"/>
+                </a:solidFill>
+                <a:latin typeface="微软雅黑" panose="020B0503020204020204" pitchFamily="34" charset="-122"/>
+                <a:ea typeface="微软雅黑" panose="020B0503020204020204" pitchFamily="34" charset="-122"/>
+                <a:cs typeface="微软雅黑" panose="020B0503020204020204" pitchFamily="34" charset="-120"/>
+              </a:rPr>
+              <a:t>交付质量　</a:t>
+            </a:r>
+            <a:r>
+              <a:rPr lang="zh-CN" sz="950" dirty="0">
+                <a:solidFill>
+                  <a:srgbClr val="64748B"/>
+                </a:solidFill>
+                <a:latin typeface="微软雅黑" panose="020B0503020204020204" pitchFamily="34" charset="-122"/>
+                <a:ea typeface="微软雅黑" panose="020B0503020204020204" pitchFamily="34" charset="-122"/>
+                <a:cs typeface="微软雅黑" panose="020B0503020204020204" pitchFamily="34" charset="-120"/>
+              </a:rPr>
+              <a:t>是否满足评审要求、返工次数、缺陷密度</a:t>
+            </a:r>
+          </a:p>
+        </p:txBody>
+      </p:sp>
+      <p:sp>
+        <p:nvSpPr>
+          <p:cNvPr id="18" name="Text 17"/>
+          <p:cNvSpPr/>
+          <p:nvPr/>
+        </p:nvSpPr>
+        <p:spPr>
+          <a:xfrm>
+            <a:off x="3749040" y="2432304"/>
+            <a:ext cx="1188720" cy="475488"/>
+          </a:xfrm>
+          <a:prstGeom prst="rect">
+            <a:avLst/>
+          </a:prstGeom>
+          <a:noFill/>
+          <a:ln>
+            <a:noFill/>
+          </a:ln>
+        </p:spPr>
+        <p:txBody>
+          <a:bodyPr wrap="square" lIns="0" tIns="0" rIns="0" bIns="0" rtlCol="0" anchor="ctr"/>
+          <a:lstStyle/>
+          <a:p>
+            <a:pPr algn="ctr">
+              <a:buNone/>
+            </a:pPr>
+            <a:r>
+              <a:rPr lang="zh-CN" sz="1100" b="1" dirty="0">
+                <a:solidFill>
+                  <a:srgbClr val="334155"/>
+                </a:solidFill>
+                <a:latin typeface="微软雅黑" panose="020B0503020204020204" pitchFamily="34" charset="-122"/>
+                <a:ea typeface="微软雅黑" panose="020B0503020204020204" pitchFamily="34" charset="-122"/>
+                <a:cs typeface="微软雅黑" panose="020B0503020204020204" pitchFamily="34" charset="-120"/>
+              </a:rPr>
+              <a:t>25%</a:t>
+            </a:r>
+          </a:p>
+        </p:txBody>
+      </p:sp>
+      <p:sp>
+        <p:nvSpPr>
+          <p:cNvPr id="19" name="Text 18"/>
+          <p:cNvSpPr/>
+          <p:nvPr/>
+        </p:nvSpPr>
+        <p:spPr>
+          <a:xfrm>
+            <a:off x="5029200" y="2432304"/>
+            <a:ext cx="1417320" cy="475488"/>
+          </a:xfrm>
+          <a:prstGeom prst="rect">
+            <a:avLst/>
+          </a:prstGeom>
+          <a:noFill/>
+          <a:ln>
+            <a:noFill/>
+          </a:ln>
+        </p:spPr>
+        <p:txBody>
+          <a:bodyPr wrap="square" lIns="0" tIns="0" rIns="0" bIns="0" rtlCol="0" anchor="ctr"/>
+          <a:lstStyle/>
+          <a:p>
+            <a:pPr algn="ctr">
+              <a:buNone/>
+            </a:pPr>
+            <a:r>
+              <a:rPr lang="zh-CN" sz="1300" b="1" dirty="0">
                 <a:solidFill>
                   <a:srgbClr val="4F46E5"/>
                 </a:solidFill>
@@ -18192,32 +18910,200 @@
                 <a:ea typeface="微软雅黑" panose="020B0503020204020204" pitchFamily="34" charset="-122"/>
                 <a:cs typeface="微软雅黑" panose="020B0503020204020204" pitchFamily="34" charset="-120"/>
               </a:rPr>
-              <a:t>▸ </a:t>
-            </a:r>
-            <a:r>
-              <a:rPr lang="zh-CN" sz="1200" dirty="0">
-                <a:solidFill>
-                  <a:srgbClr val="334155"/>
-                </a:solidFill>
-                <a:latin typeface="微软雅黑" panose="020B0503020204020204" pitchFamily="34" charset="-122"/>
-                <a:ea typeface="微软雅黑" panose="020B0503020204020204" pitchFamily="34" charset="-122"/>
-                <a:cs typeface="微软雅黑" panose="020B0503020204020204" pitchFamily="34" charset="-120"/>
-              </a:rPr>
-              <a:t>三道关口：文档评审 → 代码走查 → 测试验证</a:t>
-            </a:r>
-          </a:p>
+              <a:t>90.7</a:t>
+            </a:r>
+          </a:p>
+        </p:txBody>
+      </p:sp>
+      <p:sp>
+        <p:nvSpPr>
+          <p:cNvPr id="20" name="Text 19"/>
+          <p:cNvSpPr/>
+          <p:nvPr/>
+        </p:nvSpPr>
+        <p:spPr>
+          <a:xfrm>
+            <a:off x="6492240" y="2432304"/>
+            <a:ext cx="1325880" cy="475488"/>
+          </a:xfrm>
+          <a:prstGeom prst="rect">
+            <a:avLst/>
+          </a:prstGeom>
+          <a:noFill/>
+          <a:ln>
+            <a:noFill/>
+          </a:ln>
+        </p:spPr>
+        <p:txBody>
+          <a:bodyPr wrap="square" lIns="0" tIns="0" rIns="0" bIns="0" rtlCol="0" anchor="ctr"/>
+          <a:lstStyle/>
+          <a:p>
+            <a:pPr algn="ctr">
+              <a:buNone/>
+            </a:pPr>
+            <a:r>
+              <a:rPr lang="zh-CN" sz="1300" b="1" dirty="0">
+                <a:solidFill>
+                  <a:srgbClr val="0EA5E9"/>
+                </a:solidFill>
+                <a:latin typeface="微软雅黑" panose="020B0503020204020204" pitchFamily="34" charset="-122"/>
+                <a:ea typeface="微软雅黑" panose="020B0503020204020204" pitchFamily="34" charset="-122"/>
+                <a:cs typeface="微软雅黑" panose="020B0503020204020204" pitchFamily="34" charset="-120"/>
+              </a:rPr>
+              <a:t>90.0</a:t>
+            </a:r>
+          </a:p>
+        </p:txBody>
+      </p:sp>
+      <p:sp>
+        <p:nvSpPr>
+          <p:cNvPr id="21" name="Shape 20"/>
+          <p:cNvSpPr/>
+          <p:nvPr/>
+        </p:nvSpPr>
+        <p:spPr>
+          <a:xfrm>
+            <a:off x="548640" y="2907792"/>
+            <a:ext cx="7406640" cy="0"/>
+          </a:xfrm>
+          <a:prstGeom prst="line">
+            <a:avLst/>
+          </a:prstGeom>
+          <a:noFill/>
+          <a:ln w="12700">
+            <a:solidFill>
+              <a:srgbClr val="E8EDF5"/>
+            </a:solidFill>
+            <a:prstDash val="solid"/>
+          </a:ln>
+        </p:spPr>
+        <p:txBody>
+          <a:bodyPr/>
+          <a:p/>
+        </p:txBody>
+      </p:sp>
+      <p:sp>
+        <p:nvSpPr>
+          <p:cNvPr id="22" name="Text 21"/>
+          <p:cNvSpPr/>
+          <p:nvPr/>
+        </p:nvSpPr>
+        <p:spPr>
+          <a:xfrm>
+            <a:off x="658368" y="2926080"/>
+            <a:ext cx="3017520" cy="438912"/>
+          </a:xfrm>
+          <a:prstGeom prst="rect">
+            <a:avLst/>
+          </a:prstGeom>
+          <a:noFill/>
+          <a:ln>
+            <a:noFill/>
+          </a:ln>
+        </p:spPr>
+        <p:txBody>
+          <a:bodyPr wrap="square" lIns="0" tIns="0" rIns="0" bIns="0" rtlCol="0" anchor="ctr"/>
+          <a:lstStyle/>
           <a:p>
             <a:pPr>
               <a:lnSpc>
-                <a:spcPct val="130000"/>
+                <a:spcPct val="110000"/>
               </a:lnSpc>
-              <a:spcAft>
-                <a:spcPts val="900"/>
-              </a:spcAft>
-              <a:buNone/>
-            </a:pPr>
-            <a:r>
-              <a:rPr lang="zh-CN" sz="1200" dirty="0">
+              <a:buNone/>
+            </a:pPr>
+            <a:r>
+              <a:rPr lang="zh-CN" sz="1100" b="1" dirty="0">
+                <a:solidFill>
+                  <a:srgbClr val="0F172A"/>
+                </a:solidFill>
+                <a:latin typeface="微软雅黑" panose="020B0503020204020204" pitchFamily="34" charset="-122"/>
+                <a:ea typeface="微软雅黑" panose="020B0503020204020204" pitchFamily="34" charset="-122"/>
+                <a:cs typeface="微软雅黑" panose="020B0503020204020204" pitchFamily="34" charset="-120"/>
+              </a:rPr>
+              <a:t>进度符合度　</a:t>
+            </a:r>
+            <a:r>
+              <a:rPr lang="zh-CN" sz="950" dirty="0">
+                <a:solidFill>
+                  <a:srgbClr val="64748B"/>
+                </a:solidFill>
+                <a:latin typeface="微软雅黑" panose="020B0503020204020204" pitchFamily="34" charset="-122"/>
+                <a:ea typeface="微软雅黑" panose="020B0503020204020204" pitchFamily="34" charset="-122"/>
+                <a:cs typeface="微软雅黑" panose="020B0503020204020204" pitchFamily="34" charset="-120"/>
+              </a:rPr>
+              <a:t>实际进度与计划的偏差、是否主动预警</a:t>
+            </a:r>
+          </a:p>
+        </p:txBody>
+      </p:sp>
+      <p:sp>
+        <p:nvSpPr>
+          <p:cNvPr id="23" name="Text 22"/>
+          <p:cNvSpPr/>
+          <p:nvPr/>
+        </p:nvSpPr>
+        <p:spPr>
+          <a:xfrm>
+            <a:off x="3749040" y="2907792"/>
+            <a:ext cx="1188720" cy="475488"/>
+          </a:xfrm>
+          <a:prstGeom prst="rect">
+            <a:avLst/>
+          </a:prstGeom>
+          <a:noFill/>
+          <a:ln>
+            <a:noFill/>
+          </a:ln>
+        </p:spPr>
+        <p:txBody>
+          <a:bodyPr wrap="square" lIns="0" tIns="0" rIns="0" bIns="0" rtlCol="0" anchor="ctr"/>
+          <a:lstStyle/>
+          <a:p>
+            <a:pPr algn="ctr">
+              <a:buNone/>
+            </a:pPr>
+            <a:r>
+              <a:rPr lang="zh-CN" sz="1100" b="1" dirty="0">
+                <a:solidFill>
+                  <a:srgbClr val="334155"/>
+                </a:solidFill>
+                <a:latin typeface="微软雅黑" panose="020B0503020204020204" pitchFamily="34" charset="-122"/>
+                <a:ea typeface="微软雅黑" panose="020B0503020204020204" pitchFamily="34" charset="-122"/>
+                <a:cs typeface="微软雅黑" panose="020B0503020204020204" pitchFamily="34" charset="-120"/>
+              </a:rPr>
+              <a:t>20%</a:t>
+            </a:r>
+          </a:p>
+        </p:txBody>
+      </p:sp>
+      <p:sp>
+        <p:nvSpPr>
+          <p:cNvPr id="24" name="Text 23"/>
+          <p:cNvSpPr/>
+          <p:nvPr/>
+        </p:nvSpPr>
+        <p:spPr>
+          <a:xfrm>
+            <a:off x="5029200" y="2907792"/>
+            <a:ext cx="1417320" cy="475488"/>
+          </a:xfrm>
+          <a:prstGeom prst="rect">
+            <a:avLst/>
+          </a:prstGeom>
+          <a:noFill/>
+          <a:ln>
+            <a:noFill/>
+          </a:ln>
+        </p:spPr>
+        <p:txBody>
+          <a:bodyPr wrap="square" lIns="0" tIns="0" rIns="0" bIns="0" rtlCol="0" anchor="ctr"/>
+          <a:lstStyle/>
+          <a:p>
+            <a:pPr algn="ctr">
+              <a:buNone/>
+            </a:pPr>
+            <a:r>
+              <a:rPr lang="zh-CN" sz="1300" b="1" dirty="0">
                 <a:solidFill>
                   <a:srgbClr val="4F46E5"/>
                 </a:solidFill>
@@ -18225,32 +19111,226 @@
                 <a:ea typeface="微软雅黑" panose="020B0503020204020204" pitchFamily="34" charset="-122"/>
                 <a:cs typeface="微软雅黑" panose="020B0503020204020204" pitchFamily="34" charset="-120"/>
               </a:rPr>
-              <a:t>▸ </a:t>
-            </a:r>
-            <a:r>
-              <a:rPr lang="zh-CN" sz="1200" dirty="0">
-                <a:solidFill>
-                  <a:srgbClr val="334155"/>
-                </a:solidFill>
-                <a:latin typeface="微软雅黑" panose="020B0503020204020204" pitchFamily="34" charset="-122"/>
-                <a:ea typeface="微软雅黑" panose="020B0503020204020204" pitchFamily="34" charset="-122"/>
-                <a:cs typeface="微软雅黑" panose="020B0503020204020204" pitchFamily="34" charset="-120"/>
-              </a:rPr>
-              <a:t>每阶段末组织一次文档评审</a:t>
-            </a:r>
-          </a:p>
+              <a:t>89.3</a:t>
+            </a:r>
+          </a:p>
+        </p:txBody>
+      </p:sp>
+      <p:sp>
+        <p:nvSpPr>
+          <p:cNvPr id="25" name="Text 24"/>
+          <p:cNvSpPr/>
+          <p:nvPr/>
+        </p:nvSpPr>
+        <p:spPr>
+          <a:xfrm>
+            <a:off x="6492240" y="2907792"/>
+            <a:ext cx="1325880" cy="475488"/>
+          </a:xfrm>
+          <a:prstGeom prst="rect">
+            <a:avLst/>
+          </a:prstGeom>
+          <a:noFill/>
+          <a:ln>
+            <a:noFill/>
+          </a:ln>
+        </p:spPr>
+        <p:txBody>
+          <a:bodyPr wrap="square" lIns="0" tIns="0" rIns="0" bIns="0" rtlCol="0" anchor="ctr"/>
+          <a:lstStyle/>
+          <a:p>
+            <a:pPr algn="ctr">
+              <a:buNone/>
+            </a:pPr>
+            <a:r>
+              <a:rPr lang="zh-CN" sz="1300" b="1" dirty="0">
+                <a:solidFill>
+                  <a:srgbClr val="0EA5E9"/>
+                </a:solidFill>
+                <a:latin typeface="微软雅黑" panose="020B0503020204020204" pitchFamily="34" charset="-122"/>
+                <a:ea typeface="微软雅黑" panose="020B0503020204020204" pitchFamily="34" charset="-122"/>
+                <a:cs typeface="微软雅黑" panose="020B0503020204020204" pitchFamily="34" charset="-120"/>
+              </a:rPr>
+              <a:t>91.7</a:t>
+            </a:r>
+          </a:p>
+        </p:txBody>
+      </p:sp>
+      <p:sp>
+        <p:nvSpPr>
+          <p:cNvPr id="26" name="Shape 25"/>
+          <p:cNvSpPr/>
+          <p:nvPr/>
+        </p:nvSpPr>
+        <p:spPr>
+          <a:xfrm>
+            <a:off x="548640" y="3383280"/>
+            <a:ext cx="7406640" cy="0"/>
+          </a:xfrm>
+          <a:prstGeom prst="line">
+            <a:avLst/>
+          </a:prstGeom>
+          <a:noFill/>
+          <a:ln w="12700">
+            <a:solidFill>
+              <a:srgbClr val="E8EDF5"/>
+            </a:solidFill>
+            <a:prstDash val="solid"/>
+          </a:ln>
+        </p:spPr>
+        <p:txBody>
+          <a:bodyPr/>
+          <a:p/>
+        </p:txBody>
+      </p:sp>
+      <p:sp>
+        <p:nvSpPr>
+          <p:cNvPr id="27" name="RowBg 26"/>
+          <p:cNvSpPr/>
+          <p:nvPr/>
+        </p:nvSpPr>
+        <p:spPr>
+          <a:xfrm>
+            <a:off x="548640" y="3383280"/>
+            <a:ext cx="7406640" cy="475488"/>
+          </a:xfrm>
+          <a:prstGeom prst="rect">
+            <a:avLst/>
+          </a:prstGeom>
+          <a:solidFill>
+            <a:srgbClr val="F1F5F9"/>
+          </a:solidFill>
+          <a:ln>
+            <a:noFill/>
+          </a:ln>
+        </p:spPr>
+        <p:txBody>
+          <a:bodyPr/>
+          <a:p/>
+        </p:txBody>
+      </p:sp>
+      <p:sp>
+        <p:nvSpPr>
+          <p:cNvPr id="28" name="Text 27"/>
+          <p:cNvSpPr/>
+          <p:nvPr/>
+        </p:nvSpPr>
+        <p:spPr>
+          <a:xfrm>
+            <a:off x="658368" y="3401568"/>
+            <a:ext cx="3017520" cy="438912"/>
+          </a:xfrm>
+          <a:prstGeom prst="rect">
+            <a:avLst/>
+          </a:prstGeom>
+          <a:noFill/>
+          <a:ln>
+            <a:noFill/>
+          </a:ln>
+        </p:spPr>
+        <p:txBody>
+          <a:bodyPr wrap="square" lIns="0" tIns="0" rIns="0" bIns="0" rtlCol="0" anchor="ctr"/>
+          <a:lstStyle/>
           <a:p>
             <a:pPr>
               <a:lnSpc>
-                <a:spcPct val="130000"/>
+                <a:spcPct val="110000"/>
               </a:lnSpc>
-              <a:spcAft>
-                <a:spcPts val="900"/>
-              </a:spcAft>
-              <a:buNone/>
-            </a:pPr>
-            <a:r>
-              <a:rPr lang="zh-CN" sz="1200" dirty="0">
+              <a:buNone/>
+            </a:pPr>
+            <a:r>
+              <a:rPr lang="zh-CN" sz="1100" b="1" dirty="0">
+                <a:solidFill>
+                  <a:srgbClr val="0F172A"/>
+                </a:solidFill>
+                <a:latin typeface="微软雅黑" panose="020B0503020204020204" pitchFamily="34" charset="-122"/>
+                <a:ea typeface="微软雅黑" panose="020B0503020204020204" pitchFamily="34" charset="-122"/>
+                <a:cs typeface="微软雅黑" panose="020B0503020204020204" pitchFamily="34" charset="-120"/>
+              </a:rPr>
+              <a:t>协作与沟通　</a:t>
+            </a:r>
+            <a:r>
+              <a:rPr lang="zh-CN" sz="950" dirty="0">
+                <a:solidFill>
+                  <a:srgbClr val="64748B"/>
+                </a:solidFill>
+                <a:latin typeface="微软雅黑" panose="020B0503020204020204" pitchFamily="34" charset="-122"/>
+                <a:ea typeface="微软雅黑" panose="020B0503020204020204" pitchFamily="34" charset="-122"/>
+                <a:cs typeface="微软雅黑" panose="020B0503020204020204" pitchFamily="34" charset="-120"/>
+              </a:rPr>
+              <a:t>例会参与、记录质量、配合他人任务</a:t>
+            </a:r>
+          </a:p>
+        </p:txBody>
+      </p:sp>
+      <p:sp>
+        <p:nvSpPr>
+          <p:cNvPr id="29" name="Text 28"/>
+          <p:cNvSpPr/>
+          <p:nvPr/>
+        </p:nvSpPr>
+        <p:spPr>
+          <a:xfrm>
+            <a:off x="3749040" y="3383280"/>
+            <a:ext cx="1188720" cy="475488"/>
+          </a:xfrm>
+          <a:prstGeom prst="rect">
+            <a:avLst/>
+          </a:prstGeom>
+          <a:noFill/>
+          <a:ln>
+            <a:noFill/>
+          </a:ln>
+        </p:spPr>
+        <p:txBody>
+          <a:bodyPr wrap="square" lIns="0" tIns="0" rIns="0" bIns="0" rtlCol="0" anchor="ctr"/>
+          <a:lstStyle/>
+          <a:p>
+            <a:pPr algn="ctr">
+              <a:buNone/>
+            </a:pPr>
+            <a:r>
+              <a:rPr lang="zh-CN" sz="1100" b="1" dirty="0">
+                <a:solidFill>
+                  <a:srgbClr val="334155"/>
+                </a:solidFill>
+                <a:latin typeface="微软雅黑" panose="020B0503020204020204" pitchFamily="34" charset="-122"/>
+                <a:ea typeface="微软雅黑" panose="020B0503020204020204" pitchFamily="34" charset="-122"/>
+                <a:cs typeface="微软雅黑" panose="020B0503020204020204" pitchFamily="34" charset="-120"/>
+              </a:rPr>
+              <a:t>15%</a:t>
+            </a:r>
+          </a:p>
+        </p:txBody>
+      </p:sp>
+      <p:sp>
+        <p:nvSpPr>
+          <p:cNvPr id="30" name="Text 29"/>
+          <p:cNvSpPr/>
+          <p:nvPr/>
+        </p:nvSpPr>
+        <p:spPr>
+          <a:xfrm>
+            <a:off x="5029200" y="3383280"/>
+            <a:ext cx="1417320" cy="475488"/>
+          </a:xfrm>
+          <a:prstGeom prst="rect">
+            <a:avLst/>
+          </a:prstGeom>
+          <a:noFill/>
+          <a:ln>
+            <a:noFill/>
+          </a:ln>
+        </p:spPr>
+        <p:txBody>
+          <a:bodyPr wrap="square" lIns="0" tIns="0" rIns="0" bIns="0" rtlCol="0" anchor="ctr"/>
+          <a:lstStyle/>
+          <a:p>
+            <a:pPr algn="ctr">
+              <a:buNone/>
+            </a:pPr>
+            <a:r>
+              <a:rPr lang="zh-CN" sz="1300" b="1" dirty="0">
                 <a:solidFill>
                   <a:srgbClr val="4F46E5"/>
                 </a:solidFill>
@@ -18258,32 +19338,212 @@
                 <a:ea typeface="微软雅黑" panose="020B0503020204020204" pitchFamily="34" charset="-122"/>
                 <a:cs typeface="微软雅黑" panose="020B0503020204020204" pitchFamily="34" charset="-120"/>
               </a:rPr>
-              <a:t>▸ </a:t>
-            </a:r>
-            <a:r>
-              <a:rPr lang="zh-CN" sz="1200" dirty="0">
-                <a:solidFill>
-                  <a:srgbClr val="334155"/>
-                </a:solidFill>
-                <a:latin typeface="微软雅黑" panose="020B0503020204020204" pitchFamily="34" charset="-122"/>
-                <a:ea typeface="微软雅黑" panose="020B0503020204020204" pitchFamily="34" charset="-122"/>
-                <a:cs typeface="微软雅黑" panose="020B0503020204020204" pitchFamily="34" charset="-120"/>
-              </a:rPr>
-              <a:t>核心模块（积分账本、订单状态机）编码后走查</a:t>
-            </a:r>
-          </a:p>
+              <a:t>90.0</a:t>
+            </a:r>
+          </a:p>
+        </p:txBody>
+      </p:sp>
+      <p:sp>
+        <p:nvSpPr>
+          <p:cNvPr id="31" name="Text 30"/>
+          <p:cNvSpPr/>
+          <p:nvPr/>
+        </p:nvSpPr>
+        <p:spPr>
+          <a:xfrm>
+            <a:off x="6492240" y="3383280"/>
+            <a:ext cx="1325880" cy="475488"/>
+          </a:xfrm>
+          <a:prstGeom prst="rect">
+            <a:avLst/>
+          </a:prstGeom>
+          <a:noFill/>
+          <a:ln>
+            <a:noFill/>
+          </a:ln>
+        </p:spPr>
+        <p:txBody>
+          <a:bodyPr wrap="square" lIns="0" tIns="0" rIns="0" bIns="0" rtlCol="0" anchor="ctr"/>
+          <a:lstStyle/>
+          <a:p>
+            <a:pPr algn="ctr">
+              <a:buNone/>
+            </a:pPr>
+            <a:r>
+              <a:rPr lang="zh-CN" sz="1300" b="1" dirty="0">
+                <a:solidFill>
+                  <a:srgbClr val="0EA5E9"/>
+                </a:solidFill>
+                <a:latin typeface="微软雅黑" panose="020B0503020204020204" pitchFamily="34" charset="-122"/>
+                <a:ea typeface="微软雅黑" panose="020B0503020204020204" pitchFamily="34" charset="-122"/>
+                <a:cs typeface="微软雅黑" panose="020B0503020204020204" pitchFamily="34" charset="-120"/>
+              </a:rPr>
+              <a:t>94.0</a:t>
+            </a:r>
+          </a:p>
+        </p:txBody>
+      </p:sp>
+      <p:sp>
+        <p:nvSpPr>
+          <p:cNvPr id="32" name="Shape 31"/>
+          <p:cNvSpPr/>
+          <p:nvPr/>
+        </p:nvSpPr>
+        <p:spPr>
+          <a:xfrm>
+            <a:off x="548640" y="3858768"/>
+            <a:ext cx="7406640" cy="0"/>
+          </a:xfrm>
+          <a:prstGeom prst="line">
+            <a:avLst/>
+          </a:prstGeom>
+          <a:noFill/>
+          <a:ln w="12700">
+            <a:solidFill>
+              <a:srgbClr val="E8EDF5"/>
+            </a:solidFill>
+            <a:prstDash val="solid"/>
+          </a:ln>
+        </p:spPr>
+        <p:txBody>
+          <a:bodyPr/>
+          <a:p/>
+        </p:txBody>
+      </p:sp>
+      <p:sp>
+        <p:nvSpPr>
+          <p:cNvPr id="33" name="TotBg 32"/>
+          <p:cNvSpPr/>
+          <p:nvPr/>
+        </p:nvSpPr>
+        <p:spPr>
+          <a:xfrm>
+            <a:off x="548640" y="3858768"/>
+            <a:ext cx="7406640" cy="475488"/>
+          </a:xfrm>
+          <a:prstGeom prst="rect">
+            <a:avLst/>
+          </a:prstGeom>
+          <a:solidFill>
+            <a:srgbClr val="EEF2FF"/>
+          </a:solidFill>
+          <a:ln>
+            <a:noFill/>
+          </a:ln>
+        </p:spPr>
+        <p:txBody>
+          <a:bodyPr/>
+          <a:p/>
+        </p:txBody>
+      </p:sp>
+      <p:sp>
+        <p:nvSpPr>
+          <p:cNvPr id="34" name="Text 33"/>
+          <p:cNvSpPr/>
+          <p:nvPr/>
+        </p:nvSpPr>
+        <p:spPr>
+          <a:xfrm>
+            <a:off x="658368" y="3858768"/>
+            <a:ext cx="3017520" cy="475488"/>
+          </a:xfrm>
+          <a:prstGeom prst="rect">
+            <a:avLst/>
+          </a:prstGeom>
+          <a:noFill/>
+          <a:ln>
+            <a:noFill/>
+          </a:ln>
+        </p:spPr>
+        <p:txBody>
+          <a:bodyPr wrap="square" lIns="0" tIns="0" rIns="0" bIns="0" rtlCol="0" anchor="ctr"/>
+          <a:lstStyle/>
           <a:p>
             <a:pPr>
-              <a:lnSpc>
-                <a:spcPct val="130000"/>
-              </a:lnSpc>
-              <a:spcAft>
-                <a:spcPts val="900"/>
-              </a:spcAft>
-              <a:buNone/>
-            </a:pPr>
-            <a:r>
-              <a:rPr lang="zh-CN" sz="1200" dirty="0">
+              <a:buNone/>
+            </a:pPr>
+            <a:r>
+              <a:rPr lang="zh-CN" sz="1150" b="1" dirty="0">
+                <a:solidFill>
+                  <a:srgbClr val="0F172A"/>
+                </a:solidFill>
+                <a:latin typeface="微软雅黑" panose="020B0503020204020204" pitchFamily="34" charset="-122"/>
+                <a:ea typeface="微软雅黑" panose="020B0503020204020204" pitchFamily="34" charset="-122"/>
+                <a:cs typeface="微软雅黑" panose="020B0503020204020204" pitchFamily="34" charset="-120"/>
+              </a:rPr>
+              <a:t>加权总分</a:t>
+            </a:r>
+          </a:p>
+        </p:txBody>
+      </p:sp>
+      <p:sp>
+        <p:nvSpPr>
+          <p:cNvPr id="35" name="Text 34"/>
+          <p:cNvSpPr/>
+          <p:nvPr/>
+        </p:nvSpPr>
+        <p:spPr>
+          <a:xfrm>
+            <a:off x="3749040" y="3858768"/>
+            <a:ext cx="1188720" cy="475488"/>
+          </a:xfrm>
+          <a:prstGeom prst="rect">
+            <a:avLst/>
+          </a:prstGeom>
+          <a:noFill/>
+          <a:ln>
+            <a:noFill/>
+          </a:ln>
+        </p:spPr>
+        <p:txBody>
+          <a:bodyPr wrap="square" lIns="0" tIns="0" rIns="0" bIns="0" rtlCol="0" anchor="ctr"/>
+          <a:lstStyle/>
+          <a:p>
+            <a:pPr algn="ctr">
+              <a:buNone/>
+            </a:pPr>
+            <a:r>
+              <a:rPr lang="zh-CN" sz="1150" b="1" dirty="0">
+                <a:solidFill>
+                  <a:srgbClr val="0F172A"/>
+                </a:solidFill>
+                <a:latin typeface="微软雅黑" panose="020B0503020204020204" pitchFamily="34" charset="-122"/>
+                <a:ea typeface="微软雅黑" panose="020B0503020204020204" pitchFamily="34" charset="-122"/>
+                <a:cs typeface="微软雅黑" panose="020B0503020204020204" pitchFamily="34" charset="-120"/>
+              </a:rPr>
+              <a:t>100%</a:t>
+            </a:r>
+          </a:p>
+        </p:txBody>
+      </p:sp>
+      <p:sp>
+        <p:nvSpPr>
+          <p:cNvPr id="36" name="Text 35"/>
+          <p:cNvSpPr/>
+          <p:nvPr/>
+        </p:nvSpPr>
+        <p:spPr>
+          <a:xfrm>
+            <a:off x="5029200" y="3858768"/>
+            <a:ext cx="1417320" cy="475488"/>
+          </a:xfrm>
+          <a:prstGeom prst="rect">
+            <a:avLst/>
+          </a:prstGeom>
+          <a:noFill/>
+          <a:ln>
+            <a:noFill/>
+          </a:ln>
+        </p:spPr>
+        <p:txBody>
+          <a:bodyPr wrap="square" lIns="0" tIns="0" rIns="0" bIns="0" rtlCol="0" anchor="ctr"/>
+          <a:lstStyle/>
+          <a:p>
+            <a:pPr algn="ctr">
+              <a:buNone/>
+            </a:pPr>
+            <a:r>
+              <a:rPr lang="zh-CN" sz="1500" b="1" dirty="0">
                 <a:solidFill>
                   <a:srgbClr val="4F46E5"/>
                 </a:solidFill>
@@ -18291,289 +19551,251 @@
                 <a:ea typeface="微软雅黑" panose="020B0503020204020204" pitchFamily="34" charset="-122"/>
                 <a:cs typeface="微软雅黑" panose="020B0503020204020204" pitchFamily="34" charset="-120"/>
               </a:rPr>
-              <a:t>▸ </a:t>
-            </a:r>
-            <a:r>
-              <a:rPr lang="zh-CN" sz="1200" dirty="0">
-                <a:solidFill>
-                  <a:srgbClr val="334155"/>
-                </a:solidFill>
-                <a:latin typeface="微软雅黑" panose="020B0503020204020204" pitchFamily="34" charset="-122"/>
-                <a:ea typeface="微软雅黑" panose="020B0503020204020204" pitchFamily="34" charset="-122"/>
-                <a:cs typeface="微软雅黑" panose="020B0503020204020204" pitchFamily="34" charset="-120"/>
-              </a:rPr>
-              <a:t>质量目标：无严重缺陷遗留，一般缺陷修复率 ≥ 90%</a:t>
-            </a:r>
-          </a:p>
-        </p:txBody>
-      </p:sp>
-      <p:sp>
-        <p:nvSpPr>
-          <p:cNvPr id="9" name="Shape 8"/>
-          <p:cNvSpPr/>
-          <p:nvPr/>
-        </p:nvSpPr>
-        <p:spPr>
-          <a:xfrm>
-            <a:off x="6263640" y="1572768"/>
-            <a:ext cx="5349240" cy="3931920"/>
+              <a:t>90.1</a:t>
+            </a:r>
+          </a:p>
+        </p:txBody>
+      </p:sp>
+      <p:sp>
+        <p:nvSpPr>
+          <p:cNvPr id="37" name="Text 36"/>
+          <p:cNvSpPr/>
+          <p:nvPr/>
+        </p:nvSpPr>
+        <p:spPr>
+          <a:xfrm>
+            <a:off x="6492240" y="3858768"/>
+            <a:ext cx="1325880" cy="475488"/>
+          </a:xfrm>
+          <a:prstGeom prst="rect">
+            <a:avLst/>
+          </a:prstGeom>
+          <a:noFill/>
+          <a:ln>
+            <a:noFill/>
+          </a:ln>
+        </p:spPr>
+        <p:txBody>
+          <a:bodyPr wrap="square" lIns="0" tIns="0" rIns="0" bIns="0" rtlCol="0" anchor="ctr"/>
+          <a:lstStyle/>
+          <a:p>
+            <a:pPr algn="ctr">
+              <a:buNone/>
+            </a:pPr>
+            <a:r>
+              <a:rPr lang="zh-CN" sz="1500" b="1" dirty="0">
+                <a:solidFill>
+                  <a:srgbClr val="0EA5E9"/>
+                </a:solidFill>
+                <a:latin typeface="微软雅黑" panose="020B0503020204020204" pitchFamily="34" charset="-122"/>
+                <a:ea typeface="微软雅黑" panose="020B0503020204020204" pitchFamily="34" charset="-122"/>
+                <a:cs typeface="微软雅黑" panose="020B0503020204020204" pitchFamily="34" charset="-120"/>
+              </a:rPr>
+              <a:t>91.2</a:t>
+            </a:r>
+          </a:p>
+        </p:txBody>
+      </p:sp>
+      <p:sp>
+        <p:nvSpPr>
+          <p:cNvPr id="38" name="GradeBg 37"/>
+          <p:cNvSpPr/>
+          <p:nvPr/>
+        </p:nvSpPr>
+        <p:spPr>
+          <a:xfrm>
+            <a:off x="548640" y="4334256"/>
+            <a:ext cx="7406640" cy="475488"/>
+          </a:xfrm>
+          <a:prstGeom prst="rect">
+            <a:avLst/>
+          </a:prstGeom>
+          <a:solidFill>
+            <a:srgbClr val="E8EDF5"/>
+          </a:solidFill>
+          <a:ln>
+            <a:noFill/>
+          </a:ln>
+        </p:spPr>
+        <p:txBody>
+          <a:bodyPr/>
+          <a:p/>
+        </p:txBody>
+      </p:sp>
+      <p:sp>
+        <p:nvSpPr>
+          <p:cNvPr id="39" name="Text 38"/>
+          <p:cNvSpPr/>
+          <p:nvPr/>
+        </p:nvSpPr>
+        <p:spPr>
+          <a:xfrm>
+            <a:off x="658368" y="4334256"/>
+            <a:ext cx="3017520" cy="475488"/>
+          </a:xfrm>
+          <a:prstGeom prst="rect">
+            <a:avLst/>
+          </a:prstGeom>
+          <a:noFill/>
+          <a:ln>
+            <a:noFill/>
+          </a:ln>
+        </p:spPr>
+        <p:txBody>
+          <a:bodyPr wrap="square" lIns="0" tIns="0" rIns="0" bIns="0" rtlCol="0" anchor="ctr"/>
+          <a:lstStyle/>
+          <a:p>
+            <a:pPr>
+              <a:buNone/>
+            </a:pPr>
+            <a:r>
+              <a:rPr lang="zh-CN" sz="1050" b="1" dirty="0">
+                <a:solidFill>
+                  <a:srgbClr val="0F172A"/>
+                </a:solidFill>
+                <a:latin typeface="微软雅黑" panose="020B0503020204020204" pitchFamily="34" charset="-122"/>
+                <a:ea typeface="微软雅黑" panose="020B0503020204020204" pitchFamily="34" charset="-122"/>
+                <a:cs typeface="微软雅黑" panose="020B0503020204020204" pitchFamily="34" charset="-120"/>
+              </a:rPr>
+              <a:t>评价等级（≥90 为优秀）</a:t>
+            </a:r>
+          </a:p>
+        </p:txBody>
+      </p:sp>
+      <p:sp>
+        <p:nvSpPr>
+          <p:cNvPr id="40" name="Text 39"/>
+          <p:cNvSpPr/>
+          <p:nvPr/>
+        </p:nvSpPr>
+        <p:spPr>
+          <a:xfrm>
+            <a:off x="3749040" y="4334256"/>
+            <a:ext cx="1188720" cy="475488"/>
+          </a:xfrm>
+          <a:prstGeom prst="rect">
+            <a:avLst/>
+          </a:prstGeom>
+          <a:noFill/>
+          <a:ln>
+            <a:noFill/>
+          </a:ln>
+        </p:spPr>
+        <p:txBody>
+          <a:bodyPr wrap="square" lIns="0" tIns="0" rIns="0" bIns="0" rtlCol="0" anchor="ctr"/>
+          <a:lstStyle/>
+          <a:p>
+            <a:pPr algn="ctr">
+              <a:buNone/>
+            </a:pPr>
+            <a:r>
+              <a:rPr lang="zh-CN" sz="1100" dirty="0">
+                <a:solidFill>
+                  <a:srgbClr val="64748B"/>
+                </a:solidFill>
+                <a:latin typeface="微软雅黑" panose="020B0503020204020204" pitchFamily="34" charset="-122"/>
+                <a:ea typeface="微软雅黑" panose="020B0503020204020204" pitchFamily="34" charset="-122"/>
+                <a:cs typeface="微软雅黑" panose="020B0503020204020204" pitchFamily="34" charset="-120"/>
+              </a:rPr>
+              <a:t>—</a:t>
+            </a:r>
+          </a:p>
+        </p:txBody>
+      </p:sp>
+      <p:sp>
+        <p:nvSpPr>
+          <p:cNvPr id="41" name="Text 40"/>
+          <p:cNvSpPr/>
+          <p:nvPr/>
+        </p:nvSpPr>
+        <p:spPr>
+          <a:xfrm>
+            <a:off x="5029200" y="4334256"/>
+            <a:ext cx="1417320" cy="475488"/>
+          </a:xfrm>
+          <a:prstGeom prst="rect">
+            <a:avLst/>
+          </a:prstGeom>
+          <a:noFill/>
+          <a:ln>
+            <a:noFill/>
+          </a:ln>
+        </p:spPr>
+        <p:txBody>
+          <a:bodyPr wrap="square" lIns="0" tIns="0" rIns="0" bIns="0" rtlCol="0" anchor="ctr"/>
+          <a:lstStyle/>
+          <a:p>
+            <a:pPr algn="ctr">
+              <a:buNone/>
+            </a:pPr>
+            <a:r>
+              <a:rPr lang="zh-CN" sz="1200" b="1" dirty="0">
+                <a:solidFill>
+                  <a:srgbClr val="059669"/>
+                </a:solidFill>
+                <a:latin typeface="微软雅黑" panose="020B0503020204020204" pitchFamily="34" charset="-122"/>
+                <a:ea typeface="微软雅黑" panose="020B0503020204020204" pitchFamily="34" charset="-122"/>
+                <a:cs typeface="微软雅黑" panose="020B0503020204020204" pitchFamily="34" charset="-120"/>
+              </a:rPr>
+              <a:t>优秀</a:t>
+            </a:r>
+          </a:p>
+        </p:txBody>
+      </p:sp>
+      <p:sp>
+        <p:nvSpPr>
+          <p:cNvPr id="42" name="Text 41"/>
+          <p:cNvSpPr/>
+          <p:nvPr/>
+        </p:nvSpPr>
+        <p:spPr>
+          <a:xfrm>
+            <a:off x="6492240" y="4334256"/>
+            <a:ext cx="1325880" cy="475488"/>
+          </a:xfrm>
+          <a:prstGeom prst="rect">
+            <a:avLst/>
+          </a:prstGeom>
+          <a:noFill/>
+          <a:ln>
+            <a:noFill/>
+          </a:ln>
+        </p:spPr>
+        <p:txBody>
+          <a:bodyPr wrap="square" lIns="0" tIns="0" rIns="0" bIns="0" rtlCol="0" anchor="ctr"/>
+          <a:lstStyle/>
+          <a:p>
+            <a:pPr algn="ctr">
+              <a:buNone/>
+            </a:pPr>
+            <a:r>
+              <a:rPr lang="zh-CN" sz="1200" b="1" dirty="0">
+                <a:solidFill>
+                  <a:srgbClr val="059669"/>
+                </a:solidFill>
+                <a:latin typeface="微软雅黑" panose="020B0503020204020204" pitchFamily="34" charset="-122"/>
+                <a:ea typeface="微软雅黑" panose="020B0503020204020204" pitchFamily="34" charset="-122"/>
+                <a:cs typeface="微软雅黑" panose="020B0503020204020204" pitchFamily="34" charset="-120"/>
+              </a:rPr>
+              <a:t>优秀</a:t>
+            </a:r>
+          </a:p>
+        </p:txBody>
+      </p:sp>
+      <p:sp>
+        <p:nvSpPr>
+          <p:cNvPr id="43" name="Shape 42"/>
+          <p:cNvSpPr/>
+          <p:nvPr/>
+        </p:nvSpPr>
+        <p:spPr>
+          <a:xfrm>
+            <a:off x="8183880" y="1572768"/>
+            <a:ext cx="3429000" cy="2103120"/>
           </a:xfrm>
           <a:prstGeom prst="roundRect">
             <a:avLst>
-              <a:gd name="adj" fmla="val 3255"/>
-            </a:avLst>
-          </a:prstGeom>
-          <a:solidFill>
-            <a:srgbClr val="FFFFFF"/>
-          </a:solidFill>
-          <a:ln w="12700">
-            <a:solidFill>
-              <a:srgbClr val="E2E8F0"/>
-            </a:solidFill>
-            <a:prstDash val="solid"/>
-          </a:ln>
-          <a:effectLst>
-            <a:outerShdw blurRad="127000" dist="38100" dir="5400000" algn="bl" rotWithShape="0">
-              <a:srgbClr val="0F172A">
-                <a:alpha val="6000"/>
-              </a:srgbClr>
-            </a:outerShdw>
-          </a:effectLst>
-        </p:spPr>
-      </p:sp>
-      <p:sp>
-        <p:nvSpPr>
-          <p:cNvPr id="10" name="Text 9"/>
-          <p:cNvSpPr/>
-          <p:nvPr/>
-        </p:nvSpPr>
-        <p:spPr>
-          <a:xfrm>
-            <a:off x="6537960" y="1700784"/>
-            <a:ext cx="4800600" cy="420624"/>
-          </a:xfrm>
-          <a:prstGeom prst="rect">
-            <a:avLst/>
-          </a:prstGeom>
-          <a:noFill/>
-          <a:ln>
-            <a:noFill/>
-          </a:ln>
-        </p:spPr>
-        <p:txBody>
-          <a:bodyPr wrap="square" lIns="0" tIns="0" rIns="0" bIns="0" rtlCol="0" anchor="ctr"/>
-          <a:lstStyle/>
-          <a:p>
-            <a:pPr>
-              <a:buNone/>
-            </a:pPr>
-            <a:r>
-              <a:rPr lang="zh-CN" sz="1800" b="1" dirty="0">
-                <a:solidFill>
-                  <a:srgbClr val="0EA5E9"/>
-                </a:solidFill>
-                <a:latin typeface="微软雅黑" panose="020B0503020204020204" pitchFamily="34" charset="-122"/>
-                <a:ea typeface="微软雅黑" panose="020B0503020204020204" pitchFamily="34" charset="-122"/>
-                <a:cs typeface="微软雅黑" panose="020B0503020204020204" pitchFamily="34" charset="-120"/>
-              </a:rPr>
-              <a:t>配置管理</a:t>
-            </a:r>
-          </a:p>
-        </p:txBody>
-      </p:sp>
-      <p:sp>
-        <p:nvSpPr>
-          <p:cNvPr id="11" name="Shape 10"/>
-          <p:cNvSpPr/>
-          <p:nvPr/>
-        </p:nvSpPr>
-        <p:spPr>
-          <a:xfrm>
-            <a:off x="6537960" y="2212848"/>
-            <a:ext cx="4800600" cy="0"/>
-          </a:xfrm>
-          <a:prstGeom prst="line">
-            <a:avLst/>
-          </a:prstGeom>
-          <a:noFill/>
-          <a:ln w="12700">
-            <a:solidFill>
-              <a:srgbClr val="E2E8F0"/>
-            </a:solidFill>
-            <a:prstDash val="solid"/>
-          </a:ln>
-        </p:spPr>
-      </p:sp>
-      <p:sp>
-        <p:nvSpPr>
-          <p:cNvPr id="12" name="Text 11"/>
-          <p:cNvSpPr/>
-          <p:nvPr/>
-        </p:nvSpPr>
-        <p:spPr>
-          <a:xfrm>
-            <a:off x="6537960" y="2359152"/>
-            <a:ext cx="4800600" cy="3017520"/>
-          </a:xfrm>
-          <a:prstGeom prst="rect">
-            <a:avLst/>
-          </a:prstGeom>
-          <a:noFill/>
-          <a:ln>
-            <a:noFill/>
-          </a:ln>
-        </p:spPr>
-        <p:txBody>
-          <a:bodyPr wrap="square" lIns="0" tIns="0" rIns="0" bIns="0" rtlCol="0" anchor="t"/>
-          <a:lstStyle/>
-          <a:p>
-            <a:pPr>
-              <a:lnSpc>
-                <a:spcPct val="130000"/>
-              </a:lnSpc>
-              <a:spcAft>
-                <a:spcPts val="900"/>
-              </a:spcAft>
-              <a:buNone/>
-            </a:pPr>
-            <a:r>
-              <a:rPr lang="zh-CN" sz="1200" dirty="0">
-                <a:solidFill>
-                  <a:srgbClr val="0EA5E9"/>
-                </a:solidFill>
-                <a:latin typeface="微软雅黑" panose="020B0503020204020204" pitchFamily="34" charset="-122"/>
-                <a:ea typeface="微软雅黑" panose="020B0503020204020204" pitchFamily="34" charset="-122"/>
-                <a:cs typeface="微软雅黑" panose="020B0503020204020204" pitchFamily="34" charset="-120"/>
-              </a:rPr>
-              <a:t>▸ </a:t>
-            </a:r>
-            <a:r>
-              <a:rPr lang="zh-CN" sz="1200" dirty="0">
-                <a:solidFill>
-                  <a:srgbClr val="334155"/>
-                </a:solidFill>
-                <a:latin typeface="微软雅黑" panose="020B0503020204020204" pitchFamily="34" charset="-122"/>
-                <a:ea typeface="微软雅黑" panose="020B0503020204020204" pitchFamily="34" charset="-122"/>
-                <a:cs typeface="微软雅黑" panose="020B0503020204020204" pitchFamily="34" charset="-120"/>
-              </a:rPr>
-              <a:t>源码、文档、数据库脚本全部纳入 Git</a:t>
-            </a:r>
-          </a:p>
-          <a:p>
-            <a:pPr>
-              <a:lnSpc>
-                <a:spcPct val="130000"/>
-              </a:lnSpc>
-              <a:spcAft>
-                <a:spcPts val="900"/>
-              </a:spcAft>
-              <a:buNone/>
-            </a:pPr>
-            <a:r>
-              <a:rPr lang="zh-CN" sz="1200" dirty="0">
-                <a:solidFill>
-                  <a:srgbClr val="0EA5E9"/>
-                </a:solidFill>
-                <a:latin typeface="微软雅黑" panose="020B0503020204020204" pitchFamily="34" charset="-122"/>
-                <a:ea typeface="微软雅黑" panose="020B0503020204020204" pitchFamily="34" charset="-122"/>
-                <a:cs typeface="微软雅黑" panose="020B0503020204020204" pitchFamily="34" charset="-120"/>
-              </a:rPr>
-              <a:t>▸ </a:t>
-            </a:r>
-            <a:r>
-              <a:rPr lang="zh-CN" sz="1200" dirty="0">
-                <a:solidFill>
-                  <a:srgbClr val="334155"/>
-                </a:solidFill>
-                <a:latin typeface="微软雅黑" panose="020B0503020204020204" pitchFamily="34" charset="-122"/>
-                <a:ea typeface="微软雅黑" panose="020B0503020204020204" pitchFamily="34" charset="-122"/>
-                <a:cs typeface="微软雅黑" panose="020B0503020204020204" pitchFamily="34" charset="-120"/>
-              </a:rPr>
-              <a:t>main（可运行主干）+ feature/T 编号分支</a:t>
-            </a:r>
-          </a:p>
-          <a:p>
-            <a:pPr>
-              <a:lnSpc>
-                <a:spcPct val="130000"/>
-              </a:lnSpc>
-              <a:spcAft>
-                <a:spcPts val="900"/>
-              </a:spcAft>
-              <a:buNone/>
-            </a:pPr>
-            <a:r>
-              <a:rPr lang="zh-CN" sz="1200" dirty="0">
-                <a:solidFill>
-                  <a:srgbClr val="0EA5E9"/>
-                </a:solidFill>
-                <a:latin typeface="微软雅黑" panose="020B0503020204020204" pitchFamily="34" charset="-122"/>
-                <a:ea typeface="微软雅黑" panose="020B0503020204020204" pitchFamily="34" charset="-122"/>
-                <a:cs typeface="微软雅黑" panose="020B0503020204020204" pitchFamily="34" charset="-120"/>
-              </a:rPr>
-              <a:t>▸ </a:t>
-            </a:r>
-            <a:r>
-              <a:rPr lang="zh-CN" sz="1200" dirty="0">
-                <a:solidFill>
-                  <a:srgbClr val="334155"/>
-                </a:solidFill>
-                <a:latin typeface="微软雅黑" panose="020B0503020204020204" pitchFamily="34" charset="-122"/>
-                <a:ea typeface="微软雅黑" panose="020B0503020204020204" pitchFamily="34" charset="-122"/>
-                <a:cs typeface="微软雅黑" panose="020B0503020204020204" pitchFamily="34" charset="-120"/>
-              </a:rPr>
-              <a:t>文档版本号 V主.次，与里程碑 tag 对应</a:t>
-            </a:r>
-          </a:p>
-          <a:p>
-            <a:pPr>
-              <a:lnSpc>
-                <a:spcPct val="130000"/>
-              </a:lnSpc>
-              <a:spcAft>
-                <a:spcPts val="900"/>
-              </a:spcAft>
-              <a:buNone/>
-            </a:pPr>
-            <a:r>
-              <a:rPr lang="zh-CN" sz="1200" dirty="0">
-                <a:solidFill>
-                  <a:srgbClr val="0EA5E9"/>
-                </a:solidFill>
-                <a:latin typeface="微软雅黑" panose="020B0503020204020204" pitchFamily="34" charset="-122"/>
-                <a:ea typeface="微软雅黑" panose="020B0503020204020204" pitchFamily="34" charset="-122"/>
-                <a:cs typeface="微软雅黑" panose="020B0503020204020204" pitchFamily="34" charset="-120"/>
-              </a:rPr>
-              <a:t>▸ </a:t>
-            </a:r>
-            <a:r>
-              <a:rPr lang="zh-CN" sz="1200" dirty="0">
-                <a:solidFill>
-                  <a:srgbClr val="334155"/>
-                </a:solidFill>
-                <a:latin typeface="微软雅黑" panose="020B0503020204020204" pitchFamily="34" charset="-122"/>
-                <a:ea typeface="微软雅黑" panose="020B0503020204020204" pitchFamily="34" charset="-122"/>
-                <a:cs typeface="微软雅黑" panose="020B0503020204020204" pitchFamily="34" charset="-120"/>
-              </a:rPr>
-              <a:t>变更走“申请→评估→批准→实施→记录”五步</a:t>
-            </a:r>
-          </a:p>
-        </p:txBody>
-      </p:sp>
-      <p:sp>
-        <p:nvSpPr>
-          <p:cNvPr id="13" name="Shape 12"/>
-          <p:cNvSpPr/>
-          <p:nvPr/>
-        </p:nvSpPr>
-        <p:spPr>
-          <a:xfrm>
-            <a:off x="548640" y="5715000"/>
-            <a:ext cx="11064240" cy="658368"/>
-          </a:xfrm>
-          <a:prstGeom prst="roundRect">
-            <a:avLst>
-              <a:gd name="adj" fmla="val 16666"/>
+              <a:gd name="adj" fmla="val 6086"/>
             </a:avLst>
           </a:prstGeom>
           <a:solidFill>
@@ -18593,16 +19815,350 @@
             </a:outerShdw>
           </a:effectLst>
         </p:spPr>
-      </p:sp>
-      <p:sp>
-        <p:nvSpPr>
-          <p:cNvPr id="14" name="Text 13"/>
-          <p:cNvSpPr/>
-          <p:nvPr/>
-        </p:nvSpPr>
-        <p:spPr>
-          <a:xfrm>
-            <a:off x="868680" y="5733288"/>
+        <p:txBody>
+          <a:bodyPr/>
+          <a:p/>
+        </p:txBody>
+      </p:sp>
+      <p:sp>
+        <p:nvSpPr>
+          <p:cNvPr id="44" name="Text 43"/>
+          <p:cNvSpPr/>
+          <p:nvPr/>
+        </p:nvSpPr>
+        <p:spPr>
+          <a:xfrm>
+            <a:off x="8366760" y="1682496"/>
+            <a:ext cx="3063240" cy="365760"/>
+          </a:xfrm>
+          <a:prstGeom prst="rect">
+            <a:avLst/>
+          </a:prstGeom>
+          <a:noFill/>
+          <a:ln>
+            <a:noFill/>
+          </a:ln>
+        </p:spPr>
+        <p:txBody>
+          <a:bodyPr wrap="square" lIns="0" tIns="0" rIns="0" bIns="0" rtlCol="0" anchor="ctr"/>
+          <a:lstStyle/>
+          <a:p>
+            <a:pPr>
+              <a:buNone/>
+            </a:pPr>
+            <a:r>
+              <a:rPr lang="zh-CN" sz="1400" b="1" dirty="0">
+                <a:solidFill>
+                  <a:srgbClr val="4F46E5"/>
+                </a:solidFill>
+                <a:latin typeface="微软雅黑" panose="020B0503020204020204" pitchFamily="34" charset="-122"/>
+                <a:ea typeface="微软雅黑" panose="020B0503020204020204" pitchFamily="34" charset="-122"/>
+                <a:cs typeface="微软雅黑" panose="020B0503020204020204" pitchFamily="34" charset="-120"/>
+              </a:rPr>
+              <a:t>评价值来源</a:t>
+            </a:r>
+          </a:p>
+        </p:txBody>
+      </p:sp>
+      <p:sp>
+        <p:nvSpPr>
+          <p:cNvPr id="45" name="Text 44"/>
+          <p:cNvSpPr/>
+          <p:nvPr/>
+        </p:nvSpPr>
+        <p:spPr>
+          <a:xfrm>
+            <a:off x="8366760" y="2103120"/>
+            <a:ext cx="3063240" cy="1463040"/>
+          </a:xfrm>
+          <a:prstGeom prst="rect">
+            <a:avLst/>
+          </a:prstGeom>
+          <a:noFill/>
+          <a:ln>
+            <a:noFill/>
+          </a:ln>
+        </p:spPr>
+        <p:txBody>
+          <a:bodyPr wrap="square" lIns="0" tIns="0" rIns="0" bIns="0" rtlCol="0" anchor="t"/>
+          <a:lstStyle/>
+          <a:p>
+            <a:pPr>
+              <a:lnSpc>
+                <a:spcPct val="130000"/>
+              </a:lnSpc>
+              <a:spcAft>
+                <a:spcPts val="600"/>
+              </a:spcAft>
+              <a:buNone/>
+            </a:pPr>
+            <a:r>
+              <a:rPr lang="zh-CN" sz="1050" dirty="0">
+                <a:solidFill>
+                  <a:srgbClr val="334155"/>
+                </a:solidFill>
+                <a:latin typeface="微软雅黑" panose="020B0503020204020204" pitchFamily="34" charset="-122"/>
+                <a:ea typeface="微软雅黑" panose="020B0503020204020204" pitchFamily="34" charset="-122"/>
+                <a:cs typeface="微软雅黑" panose="020B0503020204020204" pitchFamily="34" charset="-120"/>
+              </a:rPr>
+              <a:t>自评 20%　+　互评 40%　+　指导教师 40%</a:t>
+            </a:r>
+          </a:p>
+          <a:p>
+            <a:pPr>
+              <a:lnSpc>
+                <a:spcPct val="130000"/>
+              </a:lnSpc>
+              <a:spcAft>
+                <a:spcPts val="600"/>
+              </a:spcAft>
+              <a:buNone/>
+            </a:pPr>
+            <a:r>
+              <a:rPr lang="zh-CN" sz="1050" dirty="0">
+                <a:solidFill>
+                  <a:srgbClr val="334155"/>
+                </a:solidFill>
+                <a:latin typeface="微软雅黑" panose="020B0503020204020204" pitchFamily="34" charset="-122"/>
+                <a:ea typeface="微软雅黑" panose="020B0503020204020204" pitchFamily="34" charset="-122"/>
+                <a:cs typeface="微软雅黑" panose="020B0503020204020204" pitchFamily="34" charset="-120"/>
+              </a:rPr>
+              <a:t>覆盖 M1–M3 三个里程碑，每次评审后 3 日内完成</a:t>
+            </a:r>
+          </a:p>
+          <a:p>
+            <a:pPr>
+              <a:lnSpc>
+                <a:spcPct val="130000"/>
+              </a:lnSpc>
+              <a:buNone/>
+            </a:pPr>
+            <a:r>
+              <a:rPr lang="zh-CN" sz="1050" dirty="0">
+                <a:solidFill>
+                  <a:srgbClr val="334155"/>
+                </a:solidFill>
+                <a:latin typeface="微软雅黑" panose="020B0503020204020204" pitchFamily="34" charset="-122"/>
+                <a:ea typeface="微软雅黑" panose="020B0503020204020204" pitchFamily="34" charset="-122"/>
+                <a:cs typeface="微软雅黑" panose="020B0503020204020204" pitchFamily="34" charset="-120"/>
+              </a:rPr>
+              <a:t>结果在组内公开，作为任务分配调整依据</a:t>
+            </a:r>
+          </a:p>
+        </p:txBody>
+      </p:sp>
+      <p:sp>
+        <p:nvSpPr>
+          <p:cNvPr id="46" name="Shape 45"/>
+          <p:cNvSpPr/>
+          <p:nvPr/>
+        </p:nvSpPr>
+        <p:spPr>
+          <a:xfrm>
+            <a:off x="8183880" y="3840480"/>
+            <a:ext cx="3429000" cy="1810512"/>
+          </a:xfrm>
+          <a:prstGeom prst="roundRect">
+            <a:avLst>
+              <a:gd name="adj" fmla="val 7070"/>
+            </a:avLst>
+          </a:prstGeom>
+          <a:solidFill>
+            <a:srgbClr val="ECFDF5"/>
+          </a:solidFill>
+          <a:ln w="12700">
+            <a:solidFill>
+              <a:srgbClr val="A7F3D0"/>
+            </a:solidFill>
+            <a:prstDash val="solid"/>
+          </a:ln>
+          <a:effectLst>
+            <a:outerShdw blurRad="127000" dist="38100" dir="5400000" algn="bl" rotWithShape="0">
+              <a:srgbClr val="0F172A">
+                <a:alpha val="6000"/>
+              </a:srgbClr>
+            </a:outerShdw>
+          </a:effectLst>
+        </p:spPr>
+        <p:txBody>
+          <a:bodyPr/>
+          <a:p/>
+        </p:txBody>
+      </p:sp>
+      <p:sp>
+        <p:nvSpPr>
+          <p:cNvPr id="47" name="Text 46"/>
+          <p:cNvSpPr/>
+          <p:nvPr/>
+        </p:nvSpPr>
+        <p:spPr>
+          <a:xfrm>
+            <a:off x="8366760" y="3950208"/>
+            <a:ext cx="3063240" cy="365760"/>
+          </a:xfrm>
+          <a:prstGeom prst="rect">
+            <a:avLst/>
+          </a:prstGeom>
+          <a:noFill/>
+          <a:ln>
+            <a:noFill/>
+          </a:ln>
+        </p:spPr>
+        <p:txBody>
+          <a:bodyPr wrap="square" lIns="0" tIns="0" rIns="0" bIns="0" rtlCol="0" anchor="ctr"/>
+          <a:lstStyle/>
+          <a:p>
+            <a:pPr>
+              <a:buNone/>
+            </a:pPr>
+            <a:r>
+              <a:rPr lang="zh-CN" sz="1400" b="1" dirty="0">
+                <a:solidFill>
+                  <a:srgbClr val="059669"/>
+                </a:solidFill>
+                <a:latin typeface="微软雅黑" panose="020B0503020204020204" pitchFamily="34" charset="-122"/>
+                <a:ea typeface="微软雅黑" panose="020B0503020204020204" pitchFamily="34" charset="-122"/>
+                <a:cs typeface="微软雅黑" panose="020B0503020204020204" pitchFamily="34" charset="-120"/>
+              </a:rPr>
+              <a:t>结论</a:t>
+            </a:r>
+          </a:p>
+        </p:txBody>
+      </p:sp>
+      <p:sp>
+        <p:nvSpPr>
+          <p:cNvPr id="48" name="Text 47"/>
+          <p:cNvSpPr/>
+          <p:nvPr/>
+        </p:nvSpPr>
+        <p:spPr>
+          <a:xfrm>
+            <a:off x="8366760" y="4370832"/>
+            <a:ext cx="3063240" cy="1691640"/>
+          </a:xfrm>
+          <a:prstGeom prst="rect">
+            <a:avLst/>
+          </a:prstGeom>
+          <a:noFill/>
+          <a:ln>
+            <a:noFill/>
+          </a:ln>
+        </p:spPr>
+        <p:txBody>
+          <a:bodyPr wrap="square" lIns="0" tIns="0" rIns="0" bIns="0" rtlCol="0" anchor="t"/>
+          <a:lstStyle/>
+          <a:p>
+            <a:pPr>
+              <a:lnSpc>
+                <a:spcPct val="130000"/>
+              </a:lnSpc>
+              <a:spcAft>
+                <a:spcPts val="600"/>
+              </a:spcAft>
+              <a:buNone/>
+            </a:pPr>
+            <a:r>
+              <a:rPr lang="zh-CN" sz="1050" b="1" dirty="0">
+                <a:solidFill>
+                  <a:srgbClr val="0F172A"/>
+                </a:solidFill>
+                <a:latin typeface="微软雅黑" panose="020B0503020204020204" pitchFamily="34" charset="-122"/>
+                <a:ea typeface="微软雅黑" panose="020B0503020204020204" pitchFamily="34" charset="-122"/>
+                <a:cs typeface="微软雅黑" panose="020B0503020204020204" pitchFamily="34" charset="-120"/>
+              </a:rPr>
+              <a:t>两人加权总分 90.1 / 91.2，均达“优秀”</a:t>
+            </a:r>
+          </a:p>
+          <a:p>
+            <a:pPr>
+              <a:lnSpc>
+                <a:spcPct val="130000"/>
+              </a:lnSpc>
+              <a:spcAft>
+                <a:spcPts val="600"/>
+              </a:spcAft>
+              <a:buNone/>
+            </a:pPr>
+            <a:r>
+              <a:rPr lang="zh-CN" sz="1050" dirty="0">
+                <a:solidFill>
+                  <a:srgbClr val="334155"/>
+                </a:solidFill>
+                <a:latin typeface="微软雅黑" panose="020B0503020204020204" pitchFamily="34" charset="-122"/>
+                <a:ea typeface="微软雅黑" panose="020B0503020204020204" pitchFamily="34" charset="-122"/>
+                <a:cs typeface="微软雅黑" panose="020B0503020204020204" pitchFamily="34" charset="-120"/>
+              </a:rPr>
+              <a:t>四个维度均 ≥ 89 分，无短板项</a:t>
+            </a:r>
+          </a:p>
+          <a:p>
+            <a:pPr>
+              <a:lnSpc>
+                <a:spcPct val="130000"/>
+              </a:lnSpc>
+              <a:buNone/>
+            </a:pPr>
+            <a:r>
+              <a:rPr lang="zh-CN" sz="1050" dirty="0">
+                <a:solidFill>
+                  <a:srgbClr val="334155"/>
+                </a:solidFill>
+                <a:latin typeface="微软雅黑" panose="020B0503020204020204" pitchFamily="34" charset="-122"/>
+                <a:ea typeface="微软雅黑" panose="020B0503020204020204" pitchFamily="34" charset="-122"/>
+                <a:cs typeface="微软雅黑" panose="020B0503020204020204" pitchFamily="34" charset="-120"/>
+              </a:rPr>
+              <a:t>无需调整任务分配；李雨鑫在协作维度领先 4 分</a:t>
+            </a:r>
+          </a:p>
+        </p:txBody>
+      </p:sp>
+      <p:sp>
+        <p:nvSpPr>
+          <p:cNvPr id="49" name="Shape 48"/>
+          <p:cNvSpPr/>
+          <p:nvPr/>
+        </p:nvSpPr>
+        <p:spPr>
+          <a:xfrm>
+            <a:off x="548640" y="5760720"/>
+            <a:ext cx="11064240" cy="658368"/>
+          </a:xfrm>
+          <a:prstGeom prst="roundRect">
+            <a:avLst>
+              <a:gd name="adj" fmla="val 16666"/>
+            </a:avLst>
+          </a:prstGeom>
+          <a:solidFill>
+            <a:srgbClr val="EEF2FF"/>
+          </a:solidFill>
+          <a:ln w="12700">
+            <a:solidFill>
+              <a:srgbClr val="C7D2FE"/>
+            </a:solidFill>
+            <a:prstDash val="solid"/>
+          </a:ln>
+          <a:effectLst>
+            <a:outerShdw blurRad="127000" dist="38100" dir="5400000" algn="bl" rotWithShape="0">
+              <a:srgbClr val="0F172A">
+                <a:alpha val="6000"/>
+              </a:srgbClr>
+            </a:outerShdw>
+          </a:effectLst>
+        </p:spPr>
+        <p:txBody>
+          <a:bodyPr/>
+          <a:p/>
+        </p:txBody>
+      </p:sp>
+      <p:sp>
+        <p:nvSpPr>
+          <p:cNvPr id="50" name="Text 49"/>
+          <p:cNvSpPr/>
+          <p:nvPr/>
+        </p:nvSpPr>
+        <p:spPr>
+          <a:xfrm>
+            <a:off x="868680" y="5779008"/>
             <a:ext cx="10424160" cy="621792"/>
           </a:xfrm>
           <a:prstGeom prst="rect">
@@ -18632,14 +20188,14 @@
                 <a:ea typeface="微软雅黑" panose="020B0503020204020204" pitchFamily="34" charset="-122"/>
                 <a:cs typeface="微软雅黑" panose="020B0503020204020204" pitchFamily="34" charset="-120"/>
               </a:rPr>
-              <a:t>过程可追溯：会议记录、变更台账、评审记录随里程碑归档，作为验收材料的一部分</a:t>
-            </a:r>
-          </a:p>
-        </p:txBody>
-      </p:sp>
-      <p:sp>
-        <p:nvSpPr>
-          <p:cNvPr id="15" name="Text 1"/>
+              <a:t>评价结果已纳入计划书表 9-4 与附录 D，作为 M4 起任务分配与绩效考核的依据</a:t>
+            </a:r>
+          </a:p>
+        </p:txBody>
+      </p:sp>
+      <p:sp>
+        <p:nvSpPr>
+          <p:cNvPr id="51" name="Text 1"/>
           <p:cNvSpPr/>
           <p:nvPr/>
         </p:nvSpPr>
@@ -18679,7 +20235,7 @@
       </p:sp>
       <p:sp>
         <p:nvSpPr>
-          <p:cNvPr id="16" name="Text 2"/>
+          <p:cNvPr id="52" name="Text 2"/>
           <p:cNvSpPr/>
           <p:nvPr/>
         </p:nvSpPr>
@@ -18712,7 +20268,7 @@
                 <a:ea typeface="微软雅黑" panose="020B0503020204020204" pitchFamily="34" charset="-122"/>
                 <a:cs typeface="微软雅黑" panose="020B0503020204020204" pitchFamily="34" charset="-120"/>
               </a:rPr>
-              <a:t>28</a:t>
+              <a:t>26</a:t>
             </a:r>
           </a:p>
         </p:txBody>
@@ -18778,7 +20334,7 @@
                 <a:ea typeface="微软雅黑" panose="020B0503020204020204" pitchFamily="34" charset="-122"/>
                 <a:cs typeface="微软雅黑" panose="020B0503020204020204" pitchFamily="34" charset="-120"/>
               </a:rPr>
-              <a:t>参考文献</a:t>
+              <a:t>团队会议纪要</a:t>
             </a:r>
           </a:p>
         </p:txBody>
@@ -18805,6 +20361,10 @@
             <a:prstDash val="solid"/>
           </a:ln>
         </p:spPr>
+        <p:txBody>
+          <a:bodyPr/>
+          <a:p/>
+        </p:txBody>
       </p:sp>
       <p:sp>
         <p:nvSpPr>
@@ -18814,7 +20374,7 @@
         </p:nvSpPr>
         <p:spPr>
           <a:xfrm>
-            <a:off x="548640" y="1225296"/>
+            <a:off x="548640" y="1188720"/>
             <a:ext cx="11064240" cy="310896"/>
           </a:xfrm>
           <a:prstGeom prst="rect">
@@ -18841,7 +20401,7 @@
                 <a:ea typeface="微软雅黑" panose="020B0503020204020204" pitchFamily="34" charset="-122"/>
                 <a:cs typeface="微软雅黑" panose="020B0503020204020204" pitchFamily="34" charset="-120"/>
               </a:rPr>
-              <a:t>正文中形如 [n] 的标记，表示该处内容参考了下方对应文献。</a:t>
+              <a:t>截至项目计划评审阶段，共在寝室召开 2 次项目例会，均形成书面纪要并归档至 Git 仓库 /process。</a:t>
             </a:r>
           </a:p>
         </p:txBody>
@@ -18854,12 +20414,12 @@
         </p:nvSpPr>
         <p:spPr>
           <a:xfrm>
-            <a:off x="548640" y="1645920"/>
-            <a:ext cx="11064240" cy="4572000"/>
+            <a:off x="548640" y="1572768"/>
+            <a:ext cx="11064240" cy="3364992"/>
           </a:xfrm>
           <a:prstGeom prst="roundRect">
             <a:avLst>
-              <a:gd name="adj" fmla="val 2800"/>
+              <a:gd name="adj" fmla="val 2717"/>
             </a:avLst>
           </a:prstGeom>
           <a:solidFill>
@@ -18879,17 +20439,801 @@
             </a:outerShdw>
           </a:effectLst>
         </p:spPr>
-      </p:sp>
-      <p:sp>
-        <p:nvSpPr>
-          <p:cNvPr id="6" name="Text 5"/>
-          <p:cNvSpPr/>
-          <p:nvPr/>
-        </p:nvSpPr>
-        <p:spPr>
-          <a:xfrm>
-            <a:off x="914400" y="1874520"/>
-            <a:ext cx="10332720" cy="4114800"/>
+        <p:txBody>
+          <a:bodyPr/>
+          <a:p/>
+        </p:txBody>
+      </p:sp>
+      <p:sp>
+        <p:nvSpPr>
+          <p:cNvPr id="6" name="HeadBg 5"/>
+          <p:cNvSpPr/>
+          <p:nvPr/>
+        </p:nvSpPr>
+        <p:spPr>
+          <a:xfrm>
+            <a:off x="548640" y="1572768"/>
+            <a:ext cx="11064240" cy="384048"/>
+          </a:xfrm>
+          <a:prstGeom prst="rect">
+            <a:avLst/>
+          </a:prstGeom>
+          <a:solidFill>
+            <a:srgbClr val="4F46E5"/>
+          </a:solidFill>
+          <a:ln>
+            <a:noFill/>
+          </a:ln>
+        </p:spPr>
+        <p:txBody>
+          <a:bodyPr/>
+          <a:p/>
+        </p:txBody>
+      </p:sp>
+      <p:sp>
+        <p:nvSpPr>
+          <p:cNvPr id="7" name="Text 6"/>
+          <p:cNvSpPr/>
+          <p:nvPr/>
+        </p:nvSpPr>
+        <p:spPr>
+          <a:xfrm>
+            <a:off x="676656" y="1591056"/>
+            <a:ext cx="868680" cy="347472"/>
+          </a:xfrm>
+          <a:prstGeom prst="rect">
+            <a:avLst/>
+          </a:prstGeom>
+          <a:noFill/>
+          <a:ln>
+            <a:noFill/>
+          </a:ln>
+        </p:spPr>
+        <p:txBody>
+          <a:bodyPr wrap="square" lIns="0" tIns="0" rIns="0" bIns="0" rtlCol="0" anchor="ctr"/>
+          <a:lstStyle/>
+          <a:p>
+            <a:pPr>
+              <a:buNone/>
+            </a:pPr>
+            <a:r>
+              <a:rPr lang="zh-CN" sz="1150" b="1" dirty="0">
+                <a:solidFill>
+                  <a:srgbClr val="FFFFFF"/>
+                </a:solidFill>
+                <a:latin typeface="微软雅黑" panose="020B0503020204020204" pitchFamily="34" charset="-122"/>
+                <a:ea typeface="微软雅黑" panose="020B0503020204020204" pitchFamily="34" charset="-122"/>
+                <a:cs typeface="微软雅黑" panose="020B0503020204020204" pitchFamily="34" charset="-120"/>
+              </a:rPr>
+              <a:t>次序</a:t>
+            </a:r>
+          </a:p>
+        </p:txBody>
+      </p:sp>
+      <p:sp>
+        <p:nvSpPr>
+          <p:cNvPr id="8" name="Text 7"/>
+          <p:cNvSpPr/>
+          <p:nvPr/>
+        </p:nvSpPr>
+        <p:spPr>
+          <a:xfrm>
+            <a:off x="1600200" y="1591056"/>
+            <a:ext cx="1417320" cy="347472"/>
+          </a:xfrm>
+          <a:prstGeom prst="rect">
+            <a:avLst/>
+          </a:prstGeom>
+          <a:noFill/>
+          <a:ln>
+            <a:noFill/>
+          </a:ln>
+        </p:spPr>
+        <p:txBody>
+          <a:bodyPr wrap="square" lIns="0" tIns="0" rIns="0" bIns="0" rtlCol="0" anchor="ctr"/>
+          <a:lstStyle/>
+          <a:p>
+            <a:pPr>
+              <a:buNone/>
+            </a:pPr>
+            <a:r>
+              <a:rPr lang="zh-CN" sz="1150" b="1" dirty="0">
+                <a:solidFill>
+                  <a:srgbClr val="FFFFFF"/>
+                </a:solidFill>
+                <a:latin typeface="微软雅黑" panose="020B0503020204020204" pitchFamily="34" charset="-122"/>
+                <a:ea typeface="微软雅黑" panose="020B0503020204020204" pitchFamily="34" charset="-122"/>
+                <a:cs typeface="微软雅黑" panose="020B0503020204020204" pitchFamily="34" charset="-120"/>
+              </a:rPr>
+              <a:t>时间</a:t>
+            </a:r>
+          </a:p>
+        </p:txBody>
+      </p:sp>
+      <p:sp>
+        <p:nvSpPr>
+          <p:cNvPr id="9" name="Text 8"/>
+          <p:cNvSpPr/>
+          <p:nvPr/>
+        </p:nvSpPr>
+        <p:spPr>
+          <a:xfrm>
+            <a:off x="3063240" y="1591056"/>
+            <a:ext cx="1920240" cy="347472"/>
+          </a:xfrm>
+          <a:prstGeom prst="rect">
+            <a:avLst/>
+          </a:prstGeom>
+          <a:noFill/>
+          <a:ln>
+            <a:noFill/>
+          </a:ln>
+        </p:spPr>
+        <p:txBody>
+          <a:bodyPr wrap="square" lIns="0" tIns="0" rIns="0" bIns="0" rtlCol="0" anchor="ctr"/>
+          <a:lstStyle/>
+          <a:p>
+            <a:pPr>
+              <a:buNone/>
+            </a:pPr>
+            <a:r>
+              <a:rPr lang="zh-CN" sz="1150" b="1" dirty="0">
+                <a:solidFill>
+                  <a:srgbClr val="FFFFFF"/>
+                </a:solidFill>
+                <a:latin typeface="微软雅黑" panose="020B0503020204020204" pitchFamily="34" charset="-122"/>
+                <a:ea typeface="微软雅黑" panose="020B0503020204020204" pitchFamily="34" charset="-122"/>
+                <a:cs typeface="微软雅黑" panose="020B0503020204020204" pitchFamily="34" charset="-120"/>
+              </a:rPr>
+              <a:t>地点</a:t>
+            </a:r>
+          </a:p>
+        </p:txBody>
+      </p:sp>
+      <p:sp>
+        <p:nvSpPr>
+          <p:cNvPr id="10" name="Text 9"/>
+          <p:cNvSpPr/>
+          <p:nvPr/>
+        </p:nvSpPr>
+        <p:spPr>
+          <a:xfrm>
+            <a:off x="5029200" y="1591056"/>
+            <a:ext cx="2834640" cy="347472"/>
+          </a:xfrm>
+          <a:prstGeom prst="rect">
+            <a:avLst/>
+          </a:prstGeom>
+          <a:noFill/>
+          <a:ln>
+            <a:noFill/>
+          </a:ln>
+        </p:spPr>
+        <p:txBody>
+          <a:bodyPr wrap="square" lIns="0" tIns="0" rIns="0" bIns="0" rtlCol="0" anchor="ctr"/>
+          <a:lstStyle/>
+          <a:p>
+            <a:pPr>
+              <a:buNone/>
+            </a:pPr>
+            <a:r>
+              <a:rPr lang="zh-CN" sz="1150" b="1" dirty="0">
+                <a:solidFill>
+                  <a:srgbClr val="FFFFFF"/>
+                </a:solidFill>
+                <a:latin typeface="微软雅黑" panose="020B0503020204020204" pitchFamily="34" charset="-122"/>
+                <a:ea typeface="微软雅黑" panose="020B0503020204020204" pitchFamily="34" charset="-122"/>
+                <a:cs typeface="微软雅黑" panose="020B0503020204020204" pitchFamily="34" charset="-120"/>
+              </a:rPr>
+              <a:t>主要议题</a:t>
+            </a:r>
+          </a:p>
+        </p:txBody>
+      </p:sp>
+      <p:sp>
+        <p:nvSpPr>
+          <p:cNvPr id="11" name="Text 10"/>
+          <p:cNvSpPr/>
+          <p:nvPr/>
+        </p:nvSpPr>
+        <p:spPr>
+          <a:xfrm>
+            <a:off x="7909560" y="1591056"/>
+            <a:ext cx="3566160" cy="347472"/>
+          </a:xfrm>
+          <a:prstGeom prst="rect">
+            <a:avLst/>
+          </a:prstGeom>
+          <a:noFill/>
+          <a:ln>
+            <a:noFill/>
+          </a:ln>
+        </p:spPr>
+        <p:txBody>
+          <a:bodyPr wrap="square" lIns="0" tIns="0" rIns="0" bIns="0" rtlCol="0" anchor="ctr"/>
+          <a:lstStyle/>
+          <a:p>
+            <a:pPr>
+              <a:buNone/>
+            </a:pPr>
+            <a:r>
+              <a:rPr lang="zh-CN" sz="1150" b="1" dirty="0">
+                <a:solidFill>
+                  <a:srgbClr val="FFFFFF"/>
+                </a:solidFill>
+                <a:latin typeface="微软雅黑" panose="020B0503020204020204" pitchFamily="34" charset="-122"/>
+                <a:ea typeface="微软雅黑" panose="020B0503020204020204" pitchFamily="34" charset="-122"/>
+                <a:cs typeface="微软雅黑" panose="020B0503020204020204" pitchFamily="34" charset="-120"/>
+              </a:rPr>
+              <a:t>形成的决议</a:t>
+            </a:r>
+          </a:p>
+        </p:txBody>
+      </p:sp>
+      <p:sp>
+        <p:nvSpPr>
+          <p:cNvPr id="12" name="Text 11"/>
+          <p:cNvSpPr/>
+          <p:nvPr/>
+        </p:nvSpPr>
+        <p:spPr>
+          <a:xfrm>
+            <a:off x="676656" y="1956816"/>
+            <a:ext cx="868680" cy="1481328"/>
+          </a:xfrm>
+          <a:prstGeom prst="rect">
+            <a:avLst/>
+          </a:prstGeom>
+          <a:noFill/>
+          <a:ln>
+            <a:noFill/>
+          </a:ln>
+        </p:spPr>
+        <p:txBody>
+          <a:bodyPr wrap="square" lIns="0" tIns="0" rIns="0" bIns="0" rtlCol="0" anchor="ctr"/>
+          <a:lstStyle/>
+          <a:p>
+            <a:pPr algn="ctr">
+              <a:buNone/>
+            </a:pPr>
+            <a:r>
+              <a:rPr lang="zh-CN" sz="1300" b="1" dirty="0">
+                <a:solidFill>
+                  <a:srgbClr val="4F46E5"/>
+                </a:solidFill>
+                <a:latin typeface="微软雅黑" panose="020B0503020204020204" pitchFamily="34" charset="-122"/>
+                <a:ea typeface="微软雅黑" panose="020B0503020204020204" pitchFamily="34" charset="-122"/>
+                <a:cs typeface="微软雅黑" panose="020B0503020204020204" pitchFamily="34" charset="-120"/>
+              </a:rPr>
+              <a:t>第 1 次</a:t>
+            </a:r>
+          </a:p>
+        </p:txBody>
+      </p:sp>
+      <p:sp>
+        <p:nvSpPr>
+          <p:cNvPr id="13" name="Text 12"/>
+          <p:cNvSpPr/>
+          <p:nvPr/>
+        </p:nvSpPr>
+        <p:spPr>
+          <a:xfrm>
+            <a:off x="1600200" y="1956816"/>
+            <a:ext cx="1417320" cy="1481328"/>
+          </a:xfrm>
+          <a:prstGeom prst="rect">
+            <a:avLst/>
+          </a:prstGeom>
+          <a:noFill/>
+          <a:ln>
+            <a:noFill/>
+          </a:ln>
+        </p:spPr>
+        <p:txBody>
+          <a:bodyPr wrap="square" lIns="0" tIns="0" rIns="0" bIns="0" rtlCol="0" anchor="ctr"/>
+          <a:lstStyle/>
+          <a:p>
+            <a:pPr>
+              <a:lnSpc>
+                <a:spcPct val="120000"/>
+              </a:lnSpc>
+              <a:buNone/>
+            </a:pPr>
+            <a:r>
+              <a:rPr lang="zh-CN" sz="1000" dirty="0">
+                <a:solidFill>
+                  <a:srgbClr val="334155"/>
+                </a:solidFill>
+                <a:latin typeface="微软雅黑" panose="020B0503020204020204" pitchFamily="34" charset="-122"/>
+                <a:ea typeface="微软雅黑" panose="020B0503020204020204" pitchFamily="34" charset="-122"/>
+                <a:cs typeface="微软雅黑" panose="020B0503020204020204" pitchFamily="34" charset="-120"/>
+              </a:rPr>
+              <a:t>第 3 教学周
+9/30（周三）20:00–21:00</a:t>
+            </a:r>
+          </a:p>
+        </p:txBody>
+      </p:sp>
+      <p:sp>
+        <p:nvSpPr>
+          <p:cNvPr id="14" name="Text 13"/>
+          <p:cNvSpPr/>
+          <p:nvPr/>
+        </p:nvSpPr>
+        <p:spPr>
+          <a:xfrm>
+            <a:off x="3063240" y="1956816"/>
+            <a:ext cx="1920240" cy="1481328"/>
+          </a:xfrm>
+          <a:prstGeom prst="rect">
+            <a:avLst/>
+          </a:prstGeom>
+          <a:noFill/>
+          <a:ln>
+            <a:noFill/>
+          </a:ln>
+        </p:spPr>
+        <p:txBody>
+          <a:bodyPr wrap="square" lIns="0" tIns="0" rIns="0" bIns="0" rtlCol="0" anchor="ctr"/>
+          <a:lstStyle/>
+          <a:p>
+            <a:pPr>
+              <a:lnSpc>
+                <a:spcPct val="120000"/>
+              </a:lnSpc>
+              <a:buNone/>
+            </a:pPr>
+            <a:r>
+              <a:rPr lang="zh-CN" sz="1000" dirty="0">
+                <a:solidFill>
+                  <a:srgbClr val="334155"/>
+                </a:solidFill>
+                <a:latin typeface="微软雅黑" panose="020B0503020204020204" pitchFamily="34" charset="-122"/>
+                <a:ea typeface="微软雅黑" panose="020B0503020204020204" pitchFamily="34" charset="-122"/>
+                <a:cs typeface="微软雅黑" panose="020B0503020204020204" pitchFamily="34" charset="-120"/>
+              </a:rPr>
+              <a:t>寝室
+（罗嘉昊宿舍）</a:t>
+            </a:r>
+          </a:p>
+        </p:txBody>
+      </p:sp>
+      <p:sp>
+        <p:nvSpPr>
+          <p:cNvPr id="15" name="Text 14"/>
+          <p:cNvSpPr/>
+          <p:nvPr/>
+        </p:nvSpPr>
+        <p:spPr>
+          <a:xfrm>
+            <a:off x="5029200" y="1956816"/>
+            <a:ext cx="2834640" cy="1481328"/>
+          </a:xfrm>
+          <a:prstGeom prst="rect">
+            <a:avLst/>
+          </a:prstGeom>
+          <a:noFill/>
+          <a:ln>
+            <a:noFill/>
+          </a:ln>
+        </p:spPr>
+        <p:txBody>
+          <a:bodyPr wrap="square" lIns="0" tIns="0" rIns="0" bIns="0" rtlCol="0" anchor="ctr"/>
+          <a:lstStyle/>
+          <a:p>
+            <a:pPr>
+              <a:lnSpc>
+                <a:spcPct val="120000"/>
+              </a:lnSpc>
+              <a:buNone/>
+            </a:pPr>
+            <a:r>
+              <a:rPr lang="zh-CN" sz="1000" dirty="0">
+                <a:solidFill>
+                  <a:srgbClr val="334155"/>
+                </a:solidFill>
+                <a:latin typeface="微软雅黑" panose="020B0503020204020204" pitchFamily="34" charset="-122"/>
+                <a:ea typeface="微软雅黑" panose="020B0503020204020204" pitchFamily="34" charset="-122"/>
+                <a:cs typeface="微软雅黑" panose="020B0503020204020204" pitchFamily="34" charset="-120"/>
+              </a:rPr>
+              <a:t>① 项目计划书内部评审
+② 课程进度对齐
+③ 调研数据小结</a:t>
+            </a:r>
+          </a:p>
+        </p:txBody>
+      </p:sp>
+      <p:sp>
+        <p:nvSpPr>
+          <p:cNvPr id="16" name="Text 15"/>
+          <p:cNvSpPr/>
+          <p:nvPr/>
+        </p:nvSpPr>
+        <p:spPr>
+          <a:xfrm>
+            <a:off x="7909560" y="1956816"/>
+            <a:ext cx="3566160" cy="1481328"/>
+          </a:xfrm>
+          <a:prstGeom prst="rect">
+            <a:avLst/>
+          </a:prstGeom>
+          <a:noFill/>
+          <a:ln>
+            <a:noFill/>
+          </a:ln>
+        </p:spPr>
+        <p:txBody>
+          <a:bodyPr wrap="square" lIns="0" tIns="0" rIns="0" bIns="0" rtlCol="0" anchor="ctr"/>
+          <a:lstStyle/>
+          <a:p>
+            <a:pPr>
+              <a:lnSpc>
+                <a:spcPct val="120000"/>
+              </a:lnSpc>
+              <a:buNone/>
+            </a:pPr>
+            <a:r>
+              <a:rPr lang="zh-CN" sz="1000" dirty="0">
+                <a:solidFill>
+                  <a:srgbClr val="334155"/>
+                </a:solidFill>
+                <a:latin typeface="微软雅黑" panose="020B0503020204020204" pitchFamily="34" charset="-122"/>
+                <a:ea typeface="微软雅黑" panose="020B0503020204020204" pitchFamily="34" charset="-122"/>
+                <a:cs typeface="微软雅黑" panose="020B0503020204020204" pitchFamily="34" charset="-120"/>
+              </a:rPr>
+              <a:t>① 补齐三级 WBS、任务级工期与资源负载，9/30 提交
+② 排期以课程进度表为唯一基准
+③ 调研数据移交罗嘉昊作为可行性报告输入</a:t>
+            </a:r>
+          </a:p>
+        </p:txBody>
+      </p:sp>
+      <p:sp>
+        <p:nvSpPr>
+          <p:cNvPr id="17" name="Shape 16"/>
+          <p:cNvSpPr/>
+          <p:nvPr/>
+        </p:nvSpPr>
+        <p:spPr>
+          <a:xfrm>
+            <a:off x="548640" y="3438144"/>
+            <a:ext cx="11064240" cy="0"/>
+          </a:xfrm>
+          <a:prstGeom prst="line">
+            <a:avLst/>
+          </a:prstGeom>
+          <a:noFill/>
+          <a:ln w="12700">
+            <a:solidFill>
+              <a:srgbClr val="E8EDF5"/>
+            </a:solidFill>
+            <a:prstDash val="solid"/>
+          </a:ln>
+        </p:spPr>
+        <p:txBody>
+          <a:bodyPr/>
+          <a:p/>
+        </p:txBody>
+      </p:sp>
+      <p:sp>
+        <p:nvSpPr>
+          <p:cNvPr id="18" name="RowBg 17"/>
+          <p:cNvSpPr/>
+          <p:nvPr/>
+        </p:nvSpPr>
+        <p:spPr>
+          <a:xfrm>
+            <a:off x="548640" y="3438144"/>
+            <a:ext cx="11064240" cy="1481328"/>
+          </a:xfrm>
+          <a:prstGeom prst="rect">
+            <a:avLst/>
+          </a:prstGeom>
+          <a:solidFill>
+            <a:srgbClr val="F1F5F9"/>
+          </a:solidFill>
+          <a:ln>
+            <a:noFill/>
+          </a:ln>
+        </p:spPr>
+        <p:txBody>
+          <a:bodyPr/>
+          <a:p/>
+        </p:txBody>
+      </p:sp>
+      <p:sp>
+        <p:nvSpPr>
+          <p:cNvPr id="19" name="Text 18"/>
+          <p:cNvSpPr/>
+          <p:nvPr/>
+        </p:nvSpPr>
+        <p:spPr>
+          <a:xfrm>
+            <a:off x="676656" y="3438144"/>
+            <a:ext cx="868680" cy="1481328"/>
+          </a:xfrm>
+          <a:prstGeom prst="rect">
+            <a:avLst/>
+          </a:prstGeom>
+          <a:noFill/>
+          <a:ln>
+            <a:noFill/>
+          </a:ln>
+        </p:spPr>
+        <p:txBody>
+          <a:bodyPr wrap="square" lIns="0" tIns="0" rIns="0" bIns="0" rtlCol="0" anchor="ctr"/>
+          <a:lstStyle/>
+          <a:p>
+            <a:pPr algn="ctr">
+              <a:buNone/>
+            </a:pPr>
+            <a:r>
+              <a:rPr lang="zh-CN" sz="1300" b="1" dirty="0">
+                <a:solidFill>
+                  <a:srgbClr val="4F46E5"/>
+                </a:solidFill>
+                <a:latin typeface="微软雅黑" panose="020B0503020204020204" pitchFamily="34" charset="-122"/>
+                <a:ea typeface="微软雅黑" panose="020B0503020204020204" pitchFamily="34" charset="-122"/>
+                <a:cs typeface="微软雅黑" panose="020B0503020204020204" pitchFamily="34" charset="-120"/>
+              </a:rPr>
+              <a:t>第 2 次</a:t>
+            </a:r>
+          </a:p>
+        </p:txBody>
+      </p:sp>
+      <p:sp>
+        <p:nvSpPr>
+          <p:cNvPr id="20" name="Text 19"/>
+          <p:cNvSpPr/>
+          <p:nvPr/>
+        </p:nvSpPr>
+        <p:spPr>
+          <a:xfrm>
+            <a:off x="1600200" y="3438144"/>
+            <a:ext cx="1417320" cy="1481328"/>
+          </a:xfrm>
+          <a:prstGeom prst="rect">
+            <a:avLst/>
+          </a:prstGeom>
+          <a:noFill/>
+          <a:ln>
+            <a:noFill/>
+          </a:ln>
+        </p:spPr>
+        <p:txBody>
+          <a:bodyPr wrap="square" lIns="0" tIns="0" rIns="0" bIns="0" rtlCol="0" anchor="ctr"/>
+          <a:lstStyle/>
+          <a:p>
+            <a:pPr>
+              <a:lnSpc>
+                <a:spcPct val="120000"/>
+              </a:lnSpc>
+              <a:buNone/>
+            </a:pPr>
+            <a:r>
+              <a:rPr lang="zh-CN" sz="1000" dirty="0">
+                <a:solidFill>
+                  <a:srgbClr val="334155"/>
+                </a:solidFill>
+                <a:latin typeface="微软雅黑" panose="020B0503020204020204" pitchFamily="34" charset="-122"/>
+                <a:ea typeface="微软雅黑" panose="020B0503020204020204" pitchFamily="34" charset="-122"/>
+                <a:cs typeface="微软雅黑" panose="020B0503020204020204" pitchFamily="34" charset="-120"/>
+              </a:rPr>
+              <a:t>第 4 教学周
+10/14（周三）20:00–21:10</a:t>
+            </a:r>
+          </a:p>
+        </p:txBody>
+      </p:sp>
+      <p:sp>
+        <p:nvSpPr>
+          <p:cNvPr id="21" name="Text 20"/>
+          <p:cNvSpPr/>
+          <p:nvPr/>
+        </p:nvSpPr>
+        <p:spPr>
+          <a:xfrm>
+            <a:off x="3063240" y="3438144"/>
+            <a:ext cx="1920240" cy="1481328"/>
+          </a:xfrm>
+          <a:prstGeom prst="rect">
+            <a:avLst/>
+          </a:prstGeom>
+          <a:noFill/>
+          <a:ln>
+            <a:noFill/>
+          </a:ln>
+        </p:spPr>
+        <p:txBody>
+          <a:bodyPr wrap="square" lIns="0" tIns="0" rIns="0" bIns="0" rtlCol="0" anchor="ctr"/>
+          <a:lstStyle/>
+          <a:p>
+            <a:pPr>
+              <a:lnSpc>
+                <a:spcPct val="120000"/>
+              </a:lnSpc>
+              <a:buNone/>
+            </a:pPr>
+            <a:r>
+              <a:rPr lang="zh-CN" sz="1000" dirty="0">
+                <a:solidFill>
+                  <a:srgbClr val="334155"/>
+                </a:solidFill>
+                <a:latin typeface="微软雅黑" panose="020B0503020204020204" pitchFamily="34" charset="-122"/>
+                <a:ea typeface="微软雅黑" panose="020B0503020204020204" pitchFamily="34" charset="-122"/>
+                <a:cs typeface="微软雅黑" panose="020B0503020204020204" pitchFamily="34" charset="-120"/>
+              </a:rPr>
+              <a:t>寝室
+（李雨鑫宿舍）</a:t>
+            </a:r>
+          </a:p>
+        </p:txBody>
+      </p:sp>
+      <p:sp>
+        <p:nvSpPr>
+          <p:cNvPr id="22" name="Text 21"/>
+          <p:cNvSpPr/>
+          <p:nvPr/>
+        </p:nvSpPr>
+        <p:spPr>
+          <a:xfrm>
+            <a:off x="5029200" y="3438144"/>
+            <a:ext cx="2834640" cy="1481328"/>
+          </a:xfrm>
+          <a:prstGeom prst="rect">
+            <a:avLst/>
+          </a:prstGeom>
+          <a:noFill/>
+          <a:ln>
+            <a:noFill/>
+          </a:ln>
+        </p:spPr>
+        <p:txBody>
+          <a:bodyPr wrap="square" lIns="0" tIns="0" rIns="0" bIns="0" rtlCol="0" anchor="ctr"/>
+          <a:lstStyle/>
+          <a:p>
+            <a:pPr>
+              <a:lnSpc>
+                <a:spcPct val="120000"/>
+              </a:lnSpc>
+              <a:buNone/>
+            </a:pPr>
+            <a:r>
+              <a:rPr lang="zh-CN" sz="1000" dirty="0">
+                <a:solidFill>
+                  <a:srgbClr val="334155"/>
+                </a:solidFill>
+                <a:latin typeface="微软雅黑" panose="020B0503020204020204" pitchFamily="34" charset="-122"/>
+                <a:ea typeface="微软雅黑" panose="020B0503020204020204" pitchFamily="34" charset="-122"/>
+                <a:cs typeface="微软雅黑" panose="020B0503020204020204" pitchFamily="34" charset="-120"/>
+              </a:rPr>
+              <a:t>① 落实 10/14 项目计划评审意见
+② 资源过载问题
+③ 可行性研究启动</a:t>
+            </a:r>
+          </a:p>
+        </p:txBody>
+      </p:sp>
+      <p:sp>
+        <p:nvSpPr>
+          <p:cNvPr id="23" name="Text 22"/>
+          <p:cNvSpPr/>
+          <p:nvPr/>
+        </p:nvSpPr>
+        <p:spPr>
+          <a:xfrm>
+            <a:off x="7909560" y="3438144"/>
+            <a:ext cx="3566160" cy="1481328"/>
+          </a:xfrm>
+          <a:prstGeom prst="rect">
+            <a:avLst/>
+          </a:prstGeom>
+          <a:noFill/>
+          <a:ln>
+            <a:noFill/>
+          </a:ln>
+        </p:spPr>
+        <p:txBody>
+          <a:bodyPr wrap="square" lIns="0" tIns="0" rIns="0" bIns="0" rtlCol="0" anchor="ctr"/>
+          <a:lstStyle/>
+          <a:p>
+            <a:pPr>
+              <a:lnSpc>
+                <a:spcPct val="120000"/>
+              </a:lnSpc>
+              <a:buNone/>
+            </a:pPr>
+            <a:r>
+              <a:rPr lang="zh-CN" sz="1000" dirty="0">
+                <a:solidFill>
+                  <a:srgbClr val="334155"/>
+                </a:solidFill>
+                <a:latin typeface="微软雅黑" panose="020B0503020204020204" pitchFamily="34" charset="-122"/>
+                <a:ea typeface="微软雅黑" panose="020B0503020204020204" pitchFamily="34" charset="-122"/>
+                <a:cs typeface="微软雅黑" panose="020B0503020204020204" pitchFamily="34" charset="-120"/>
+              </a:rPr>
+              <a:t>① 计划书升版 V3.0，补齐甘特图与负载分析
+② 编码提前至 2026/11/16–2026/11/20；峰值周由两人共同承担
+③ 可行性报告 10/21 提交</a:t>
+            </a:r>
+          </a:p>
+        </p:txBody>
+      </p:sp>
+      <p:sp>
+        <p:nvSpPr>
+          <p:cNvPr id="24" name="Shape 23"/>
+          <p:cNvSpPr/>
+          <p:nvPr/>
+        </p:nvSpPr>
+        <p:spPr>
+          <a:xfrm>
+            <a:off x="548640" y="4919472"/>
+            <a:ext cx="11064240" cy="0"/>
+          </a:xfrm>
+          <a:prstGeom prst="line">
+            <a:avLst/>
+          </a:prstGeom>
+          <a:noFill/>
+          <a:ln w="12700">
+            <a:solidFill>
+              <a:srgbClr val="E8EDF5"/>
+            </a:solidFill>
+            <a:prstDash val="solid"/>
+          </a:ln>
+        </p:spPr>
+        <p:txBody>
+          <a:bodyPr/>
+          <a:p/>
+        </p:txBody>
+      </p:sp>
+      <p:sp>
+        <p:nvSpPr>
+          <p:cNvPr id="25" name="Shape 24"/>
+          <p:cNvSpPr/>
+          <p:nvPr/>
+        </p:nvSpPr>
+        <p:spPr>
+          <a:xfrm>
+            <a:off x="548640" y="4828032"/>
+            <a:ext cx="3538728" cy="1389888"/>
+          </a:xfrm>
+          <a:prstGeom prst="roundRect">
+            <a:avLst>
+              <a:gd name="adj" fmla="val 9210"/>
+            </a:avLst>
+          </a:prstGeom>
+          <a:solidFill>
+            <a:srgbClr val="EEF2FF"/>
+          </a:solidFill>
+          <a:ln w="12700">
+            <a:solidFill>
+              <a:srgbClr val="C7D2FE"/>
+            </a:solidFill>
+            <a:prstDash val="solid"/>
+          </a:ln>
+          <a:effectLst>
+            <a:outerShdw blurRad="127000" dist="38100" dir="5400000" algn="bl" rotWithShape="0">
+              <a:srgbClr val="0F172A">
+                <a:alpha val="6000"/>
+              </a:srgbClr>
+            </a:outerShdw>
+          </a:effectLst>
+        </p:spPr>
+        <p:txBody>
+          <a:bodyPr/>
+          <a:p/>
+        </p:txBody>
+      </p:sp>
+      <p:sp>
+        <p:nvSpPr>
+          <p:cNvPr id="26" name="Text 25"/>
+          <p:cNvSpPr/>
+          <p:nvPr/>
+        </p:nvSpPr>
+        <p:spPr>
+          <a:xfrm>
+            <a:off x="777240" y="4919472"/>
+            <a:ext cx="3081528" cy="1207008"/>
           </a:xfrm>
           <a:prstGeom prst="rect">
             <a:avLst/>
@@ -18903,28 +21247,133 @@
           <a:bodyPr wrap="square" lIns="0" tIns="0" rIns="0" bIns="0" rtlCol="0" anchor="t"/>
           <a:lstStyle/>
           <a:p>
-            <a:pPr marL="457200" indent="-457200">
+            <a:pPr>
+              <a:spcAft>
+                <a:spcPts val="400"/>
+              </a:spcAft>
+              <a:buNone/>
+            </a:pPr>
+            <a:r>
+              <a:rPr lang="zh-CN" sz="1250" b="1" dirty="0">
+                <a:solidFill>
+                  <a:srgbClr val="4F46E5"/>
+                </a:solidFill>
+                <a:latin typeface="微软雅黑" panose="020B0503020204020204" pitchFamily="34" charset="-122"/>
+                <a:ea typeface="微软雅黑" panose="020B0503020204020204" pitchFamily="34" charset="-122"/>
+                <a:cs typeface="微软雅黑" panose="020B0503020204020204" pitchFamily="34" charset="-120"/>
+              </a:rPr>
+              <a:t>纪要四要素</a:t>
+            </a:r>
+          </a:p>
+          <a:p>
+            <a:pPr>
               <a:lnSpc>
-                <a:spcPct val="130000"/>
+                <a:spcPct val="125000"/>
               </a:lnSpc>
+              <a:buNone/>
+            </a:pPr>
+            <a:r>
+              <a:rPr lang="zh-CN" sz="1000" dirty="0">
+                <a:solidFill>
+                  <a:srgbClr val="334155"/>
+                </a:solidFill>
+                <a:latin typeface="微软雅黑" panose="020B0503020204020204" pitchFamily="34" charset="-122"/>
+                <a:ea typeface="微软雅黑" panose="020B0503020204020204" pitchFamily="34" charset="-122"/>
+                <a:cs typeface="微软雅黑" panose="020B0503020204020204" pitchFamily="34" charset="-120"/>
+              </a:rPr>
+              <a:t>会议基本信息 · 议题讨论要点 · 形成的决议 · 待办事项（含责任人与期限）</a:t>
+            </a:r>
+          </a:p>
+        </p:txBody>
+      </p:sp>
+      <p:sp>
+        <p:nvSpPr>
+          <p:cNvPr id="27" name="Shape 26"/>
+          <p:cNvSpPr/>
+          <p:nvPr/>
+        </p:nvSpPr>
+        <p:spPr>
+          <a:xfrm>
+            <a:off x="4325112" y="4828032"/>
+            <a:ext cx="3538728" cy="1389888"/>
+          </a:xfrm>
+          <a:prstGeom prst="roundRect">
+            <a:avLst>
+              <a:gd name="adj" fmla="val 9210"/>
+            </a:avLst>
+          </a:prstGeom>
+          <a:solidFill>
+            <a:srgbClr val="E0F2FE"/>
+          </a:solidFill>
+          <a:ln w="12700">
+            <a:solidFill>
+              <a:srgbClr val="BAE6FD"/>
+            </a:solidFill>
+            <a:prstDash val="solid"/>
+          </a:ln>
+          <a:effectLst>
+            <a:outerShdw blurRad="127000" dist="38100" dir="5400000" algn="bl" rotWithShape="0">
+              <a:srgbClr val="0F172A">
+                <a:alpha val="6000"/>
+              </a:srgbClr>
+            </a:outerShdw>
+          </a:effectLst>
+        </p:spPr>
+        <p:txBody>
+          <a:bodyPr/>
+          <a:p/>
+        </p:txBody>
+      </p:sp>
+      <p:sp>
+        <p:nvSpPr>
+          <p:cNvPr id="28" name="Text 27"/>
+          <p:cNvSpPr/>
+          <p:nvPr/>
+        </p:nvSpPr>
+        <p:spPr>
+          <a:xfrm>
+            <a:off x="4553712" y="4919472"/>
+            <a:ext cx="3081528" cy="1207008"/>
+          </a:xfrm>
+          <a:prstGeom prst="rect">
+            <a:avLst/>
+          </a:prstGeom>
+          <a:noFill/>
+          <a:ln>
+            <a:noFill/>
+          </a:ln>
+        </p:spPr>
+        <p:txBody>
+          <a:bodyPr wrap="square" lIns="0" tIns="0" rIns="0" bIns="0" rtlCol="0" anchor="t"/>
+          <a:lstStyle/>
+          <a:p>
+            <a:pPr>
               <a:spcAft>
-                <a:spcPts val="900"/>
+                <a:spcPts val="400"/>
               </a:spcAft>
               <a:buNone/>
             </a:pPr>
             <a:r>
-              <a:rPr lang="zh-CN" sz="1150" b="1" dirty="0">
-                <a:solidFill>
-                  <a:srgbClr val="4F46E5"/>
-                </a:solidFill>
-                <a:latin typeface="微软雅黑" panose="020B0503020204020204" pitchFamily="34" charset="-122"/>
-                <a:ea typeface="微软雅黑" panose="020B0503020204020204" pitchFamily="34" charset="-122"/>
-                <a:cs typeface="微软雅黑" panose="020B0503020204020204" pitchFamily="34" charset="-120"/>
-              </a:rPr>
-              <a:t>[1] </a:t>
-            </a:r>
-            <a:r>
-              <a:rPr lang="zh-CN" sz="1150" dirty="0">
+              <a:rPr lang="zh-CN" sz="1250" b="1" dirty="0">
+                <a:solidFill>
+                  <a:srgbClr val="0EA5E9"/>
+                </a:solidFill>
+                <a:latin typeface="微软雅黑" panose="020B0503020204020204" pitchFamily="34" charset="-122"/>
+                <a:ea typeface="微软雅黑" panose="020B0503020204020204" pitchFamily="34" charset="-122"/>
+                <a:cs typeface="微软雅黑" panose="020B0503020204020204" pitchFamily="34" charset="-120"/>
+              </a:rPr>
+              <a:t>归档要求</a:t>
+            </a:r>
+          </a:p>
+          <a:p>
+            <a:pPr>
+              <a:lnSpc>
+                <a:spcPct val="125000"/>
+              </a:lnSpc>
+              <a:buNone/>
+            </a:pPr>
+            <a:r>
+              <a:rPr lang="zh-CN" sz="1000" dirty="0">
                 <a:solidFill>
                   <a:srgbClr val="334155"/>
                 </a:solidFill>
@@ -18932,32 +21381,99 @@
                 <a:ea typeface="微软雅黑" panose="020B0503020204020204" pitchFamily="34" charset="-122"/>
                 <a:cs typeface="微软雅黑" panose="020B0503020204020204" pitchFamily="34" charset="-120"/>
               </a:rPr>
-              <a:t>国家邮政局. 2024年邮政行业发展统计公报[R]. 北京: 国家邮政局, 2025.</a:t>
-            </a:r>
-          </a:p>
-          <a:p>
-            <a:pPr marL="457200" indent="-457200">
+              <a:t>会后 24 小时内完成，经组长审核后归档至 Git 仓库 /process 目录</a:t>
+            </a:r>
+          </a:p>
+        </p:txBody>
+      </p:sp>
+      <p:sp>
+        <p:nvSpPr>
+          <p:cNvPr id="29" name="Shape 28"/>
+          <p:cNvSpPr/>
+          <p:nvPr/>
+        </p:nvSpPr>
+        <p:spPr>
+          <a:xfrm>
+            <a:off x="8101584" y="4828032"/>
+            <a:ext cx="3511296" cy="1389888"/>
+          </a:xfrm>
+          <a:prstGeom prst="roundRect">
+            <a:avLst>
+              <a:gd name="adj" fmla="val 9210"/>
+            </a:avLst>
+          </a:prstGeom>
+          <a:solidFill>
+            <a:srgbClr val="ECFDF5"/>
+          </a:solidFill>
+          <a:ln w="12700">
+            <a:solidFill>
+              <a:srgbClr val="A7F3D0"/>
+            </a:solidFill>
+            <a:prstDash val="solid"/>
+          </a:ln>
+          <a:effectLst>
+            <a:outerShdw blurRad="127000" dist="38100" dir="5400000" algn="bl" rotWithShape="0">
+              <a:srgbClr val="0F172A">
+                <a:alpha val="6000"/>
+              </a:srgbClr>
+            </a:outerShdw>
+          </a:effectLst>
+        </p:spPr>
+        <p:txBody>
+          <a:bodyPr/>
+          <a:p/>
+        </p:txBody>
+      </p:sp>
+      <p:sp>
+        <p:nvSpPr>
+          <p:cNvPr id="30" name="Text 29"/>
+          <p:cNvSpPr/>
+          <p:nvPr/>
+        </p:nvSpPr>
+        <p:spPr>
+          <a:xfrm>
+            <a:off x="8330184" y="4919472"/>
+            <a:ext cx="3054096" cy="1207008"/>
+          </a:xfrm>
+          <a:prstGeom prst="rect">
+            <a:avLst/>
+          </a:prstGeom>
+          <a:noFill/>
+          <a:ln>
+            <a:noFill/>
+          </a:ln>
+        </p:spPr>
+        <p:txBody>
+          <a:bodyPr wrap="square" lIns="0" tIns="0" rIns="0" bIns="0" rtlCol="0" anchor="t"/>
+          <a:lstStyle/>
+          <a:p>
+            <a:pPr>
+              <a:spcAft>
+                <a:spcPts val="400"/>
+              </a:spcAft>
+              <a:buNone/>
+            </a:pPr>
+            <a:r>
+              <a:rPr lang="zh-CN" sz="1250" b="1" dirty="0">
+                <a:solidFill>
+                  <a:srgbClr val="059669"/>
+                </a:solidFill>
+                <a:latin typeface="微软雅黑" panose="020B0503020204020204" pitchFamily="34" charset="-122"/>
+                <a:ea typeface="微软雅黑" panose="020B0503020204020204" pitchFamily="34" charset="-122"/>
+                <a:cs typeface="微软雅黑" panose="020B0503020204020204" pitchFamily="34" charset="-120"/>
+              </a:rPr>
+              <a:t>闭环管理</a:t>
+            </a:r>
+          </a:p>
+          <a:p>
+            <a:pPr>
               <a:lnSpc>
-                <a:spcPct val="130000"/>
+                <a:spcPct val="125000"/>
               </a:lnSpc>
-              <a:spcAft>
-                <a:spcPts val="900"/>
-              </a:spcAft>
-              <a:buNone/>
-            </a:pPr>
-            <a:r>
-              <a:rPr lang="zh-CN" sz="1150" b="1" dirty="0">
-                <a:solidFill>
-                  <a:srgbClr val="4F46E5"/>
-                </a:solidFill>
-                <a:latin typeface="微软雅黑" panose="020B0503020204020204" pitchFamily="34" charset="-122"/>
-                <a:ea typeface="微软雅黑" panose="020B0503020204020204" pitchFamily="34" charset="-122"/>
-                <a:cs typeface="微软雅黑" panose="020B0503020204020204" pitchFamily="34" charset="-120"/>
-              </a:rPr>
-              <a:t>[2] </a:t>
-            </a:r>
-            <a:r>
-              <a:rPr lang="zh-CN" sz="1150" dirty="0">
+              <a:buNone/>
+            </a:pPr>
+            <a:r>
+              <a:rPr lang="zh-CN" sz="1000" dirty="0">
                 <a:solidFill>
                   <a:srgbClr val="334155"/>
                 </a:solidFill>
@@ -18965,212 +21481,14 @@
                 <a:ea typeface="微软雅黑" panose="020B0503020204020204" pitchFamily="34" charset="-122"/>
                 <a:cs typeface="微软雅黑" panose="020B0503020204020204" pitchFamily="34" charset="-120"/>
               </a:rPr>
-              <a:t>微信开放文档. 小程序开发指南[EB/OL]. https://developers.weixin.qq.com/miniprogram/dev/framework/</a:t>
-            </a:r>
-          </a:p>
-          <a:p>
-            <a:pPr marL="457200" indent="-457200">
-              <a:lnSpc>
-                <a:spcPct val="130000"/>
-              </a:lnSpc>
-              <a:spcAft>
-                <a:spcPts val="900"/>
-              </a:spcAft>
-              <a:buNone/>
-            </a:pPr>
-            <a:r>
-              <a:rPr lang="zh-CN" sz="1150" b="1" dirty="0">
-                <a:solidFill>
-                  <a:srgbClr val="4F46E5"/>
-                </a:solidFill>
-                <a:latin typeface="微软雅黑" panose="020B0503020204020204" pitchFamily="34" charset="-122"/>
-                <a:ea typeface="微软雅黑" panose="020B0503020204020204" pitchFamily="34" charset="-122"/>
-                <a:cs typeface="微软雅黑" panose="020B0503020204020204" pitchFamily="34" charset="-120"/>
-              </a:rPr>
-              <a:t>[3] </a:t>
-            </a:r>
-            <a:r>
-              <a:rPr lang="zh-CN" sz="1150" dirty="0">
-                <a:solidFill>
-                  <a:srgbClr val="334155"/>
-                </a:solidFill>
-                <a:latin typeface="微软雅黑" panose="020B0503020204020204" pitchFamily="34" charset="-122"/>
-                <a:ea typeface="微软雅黑" panose="020B0503020204020204" pitchFamily="34" charset="-122"/>
-                <a:cs typeface="微软雅黑" panose="020B0503020204020204" pitchFamily="34" charset="-120"/>
-              </a:rPr>
-              <a:t>微信开放社区. 微信小程序平台运营规范[EB/OL]. https://developers.weixin.qq.com/community/operate</a:t>
-            </a:r>
-          </a:p>
-          <a:p>
-            <a:pPr marL="457200" indent="-457200">
-              <a:lnSpc>
-                <a:spcPct val="130000"/>
-              </a:lnSpc>
-              <a:spcAft>
-                <a:spcPts val="900"/>
-              </a:spcAft>
-              <a:buNone/>
-            </a:pPr>
-            <a:r>
-              <a:rPr lang="zh-CN" sz="1150" b="1" dirty="0">
-                <a:solidFill>
-                  <a:srgbClr val="4F46E5"/>
-                </a:solidFill>
-                <a:latin typeface="微软雅黑" panose="020B0503020204020204" pitchFamily="34" charset="-122"/>
-                <a:ea typeface="微软雅黑" panose="020B0503020204020204" pitchFamily="34" charset="-122"/>
-                <a:cs typeface="微软雅黑" panose="020B0503020204020204" pitchFamily="34" charset="-120"/>
-              </a:rPr>
-              <a:t>[4] </a:t>
-            </a:r>
-            <a:r>
-              <a:rPr lang="zh-CN" sz="1150" dirty="0">
-                <a:solidFill>
-                  <a:srgbClr val="334155"/>
-                </a:solidFill>
-                <a:latin typeface="微软雅黑" panose="020B0503020204020204" pitchFamily="34" charset="-122"/>
-                <a:ea typeface="微软雅黑" panose="020B0503020204020204" pitchFamily="34" charset="-122"/>
-                <a:cs typeface="微软雅黑" panose="020B0503020204020204" pitchFamily="34" charset="-120"/>
-              </a:rPr>
-              <a:t>全国人民代表大会常务委员会. 中华人民共和国个人信息保护法[Z]. 2021-08-20 通过, 2021-11-01 施行.</a:t>
-            </a:r>
-          </a:p>
-          <a:p>
-            <a:pPr marL="457200" indent="-457200">
-              <a:lnSpc>
-                <a:spcPct val="130000"/>
-              </a:lnSpc>
-              <a:spcAft>
-                <a:spcPts val="900"/>
-              </a:spcAft>
-              <a:buNone/>
-            </a:pPr>
-            <a:r>
-              <a:rPr lang="zh-CN" sz="1150" b="1" dirty="0">
-                <a:solidFill>
-                  <a:srgbClr val="4F46E5"/>
-                </a:solidFill>
-                <a:latin typeface="微软雅黑" panose="020B0503020204020204" pitchFamily="34" charset="-122"/>
-                <a:ea typeface="微软雅黑" panose="020B0503020204020204" pitchFamily="34" charset="-122"/>
-                <a:cs typeface="微软雅黑" panose="020B0503020204020204" pitchFamily="34" charset="-120"/>
-              </a:rPr>
-              <a:t>[5] </a:t>
-            </a:r>
-            <a:r>
-              <a:rPr lang="zh-CN" sz="1150" dirty="0">
-                <a:solidFill>
-                  <a:srgbClr val="334155"/>
-                </a:solidFill>
-                <a:latin typeface="微软雅黑" panose="020B0503020204020204" pitchFamily="34" charset="-122"/>
-                <a:ea typeface="微软雅黑" panose="020B0503020204020204" pitchFamily="34" charset="-122"/>
-                <a:cs typeface="微软雅黑" panose="020B0503020204020204" pitchFamily="34" charset="-120"/>
-              </a:rPr>
-              <a:t>全国人民代表大会常务委员会. 中华人民共和国著作权法(2020 年修正)[Z]. 2020-11-11 通过, 2021-06-01 施行.</a:t>
-            </a:r>
-          </a:p>
-          <a:p>
-            <a:pPr marL="457200" indent="-457200">
-              <a:lnSpc>
-                <a:spcPct val="130000"/>
-              </a:lnSpc>
-              <a:spcAft>
-                <a:spcPts val="900"/>
-              </a:spcAft>
-              <a:buNone/>
-            </a:pPr>
-            <a:r>
-              <a:rPr lang="zh-CN" sz="1150" b="1" dirty="0">
-                <a:solidFill>
-                  <a:srgbClr val="4F46E5"/>
-                </a:solidFill>
-                <a:latin typeface="微软雅黑" panose="020B0503020204020204" pitchFamily="34" charset="-122"/>
-                <a:ea typeface="微软雅黑" panose="020B0503020204020204" pitchFamily="34" charset="-122"/>
-                <a:cs typeface="微软雅黑" panose="020B0503020204020204" pitchFamily="34" charset="-120"/>
-              </a:rPr>
-              <a:t>[6] </a:t>
-            </a:r>
-            <a:r>
-              <a:rPr lang="zh-CN" sz="1150" dirty="0">
-                <a:solidFill>
-                  <a:srgbClr val="334155"/>
-                </a:solidFill>
-                <a:latin typeface="微软雅黑" panose="020B0503020204020204" pitchFamily="34" charset="-122"/>
-                <a:ea typeface="微软雅黑" panose="020B0503020204020204" pitchFamily="34" charset="-122"/>
-                <a:cs typeface="微软雅黑" panose="020B0503020204020204" pitchFamily="34" charset="-120"/>
-              </a:rPr>
-              <a:t>国务院. 快递暂行条例(国务院令第 697 号)[Z]. 2018-03-27 公布, 2018-05-01 施行.</a:t>
-            </a:r>
-          </a:p>
-          <a:p>
-            <a:pPr marL="457200" indent="-457200">
-              <a:lnSpc>
-                <a:spcPct val="130000"/>
-              </a:lnSpc>
-              <a:spcAft>
-                <a:spcPts val="900"/>
-              </a:spcAft>
-              <a:buNone/>
-            </a:pPr>
-            <a:r>
-              <a:rPr lang="zh-CN" sz="1150" b="1" dirty="0">
-                <a:solidFill>
-                  <a:srgbClr val="4F46E5"/>
-                </a:solidFill>
-                <a:latin typeface="微软雅黑" panose="020B0503020204020204" pitchFamily="34" charset="-122"/>
-                <a:ea typeface="微软雅黑" panose="020B0503020204020204" pitchFamily="34" charset="-122"/>
-                <a:cs typeface="微软雅黑" panose="020B0503020204020204" pitchFamily="34" charset="-120"/>
-              </a:rPr>
-              <a:t>[7] </a:t>
-            </a:r>
-            <a:r>
-              <a:rPr lang="zh-CN" sz="1150" dirty="0">
-                <a:solidFill>
-                  <a:srgbClr val="334155"/>
-                </a:solidFill>
-                <a:latin typeface="微软雅黑" panose="020B0503020204020204" pitchFamily="34" charset="-122"/>
-                <a:ea typeface="微软雅黑" panose="020B0503020204020204" pitchFamily="34" charset="-122"/>
-                <a:cs typeface="微软雅黑" panose="020B0503020204020204" pitchFamily="34" charset="-120"/>
-              </a:rPr>
-              <a:t>教育部. 大中小学劳动教育指导纲要(试行)[Z]. 2020-07-07.</a:t>
-            </a:r>
-          </a:p>
-          <a:p>
-            <a:pPr marL="457200" indent="-457200">
-              <a:lnSpc>
-                <a:spcPct val="130000"/>
-              </a:lnSpc>
-              <a:spcAft>
-                <a:spcPts val="900"/>
-              </a:spcAft>
-              <a:buNone/>
-            </a:pPr>
-            <a:r>
-              <a:rPr lang="zh-CN" sz="1150" b="1" dirty="0">
-                <a:solidFill>
-                  <a:srgbClr val="4F46E5"/>
-                </a:solidFill>
-                <a:latin typeface="微软雅黑" panose="020B0503020204020204" pitchFamily="34" charset="-122"/>
-                <a:ea typeface="微软雅黑" panose="020B0503020204020204" pitchFamily="34" charset="-122"/>
-                <a:cs typeface="微软雅黑" panose="020B0503020204020204" pitchFamily="34" charset="-120"/>
-              </a:rPr>
-              <a:t>[8] </a:t>
-            </a:r>
-            <a:r>
-              <a:rPr lang="zh-CN" sz="1150" dirty="0">
-                <a:solidFill>
-                  <a:srgbClr val="334155"/>
-                </a:solidFill>
-                <a:latin typeface="微软雅黑" panose="020B0503020204020204" pitchFamily="34" charset="-122"/>
-                <a:ea typeface="微软雅黑" panose="020B0503020204020204" pitchFamily="34" charset="-122"/>
-                <a:cs typeface="微软雅黑" panose="020B0503020204020204" pitchFamily="34" charset="-120"/>
-              </a:rPr>
-              <a:t>中国互联网络信息中心. 第 55 次《中国互联网络发展状况统计报告》[R/OL]. 2025-01-17. https://www.cnnic.cn/n4/2025/0117/c88-11229.html</a:t>
-            </a:r>
-          </a:p>
-        </p:txBody>
-      </p:sp>
-      <p:sp>
-        <p:nvSpPr>
-          <p:cNvPr id="7" name="Text 1"/>
+              <a:t>下次例会开始时逐项核对上次待办完成情况，未完成项说明原因并顺延</a:t>
+            </a:r>
+          </a:p>
+        </p:txBody>
+      </p:sp>
+      <p:sp>
+        <p:nvSpPr>
+          <p:cNvPr id="31" name="Text 1"/>
           <p:cNvSpPr/>
           <p:nvPr/>
         </p:nvSpPr>
@@ -19210,7 +21528,7 @@
       </p:sp>
       <p:sp>
         <p:nvSpPr>
-          <p:cNvPr id="8" name="Text 2"/>
+          <p:cNvPr id="32" name="Text 2"/>
           <p:cNvSpPr/>
           <p:nvPr/>
         </p:nvSpPr>
@@ -19243,7 +21561,7 @@
                 <a:ea typeface="微软雅黑" panose="020B0503020204020204" pitchFamily="34" charset="-122"/>
                 <a:cs typeface="微软雅黑" panose="020B0503020204020204" pitchFamily="34" charset="-120"/>
               </a:rPr>
-              <a:t>29</a:t>
+              <a:t>27</a:t>
             </a:r>
           </a:p>
         </p:txBody>
@@ -19257,152 +21575,162 @@
 </file>
 
 <file path=ppt/slides/slide28.xml><?xml version="1.0" encoding="utf-8"?>
-<p:sld xmlns:a="http://schemas.openxmlformats.org/drawingml/2006/main" xmlns:r="http://schemas.openxmlformats.org/officeDocument/2006/relationships" xmlns:p="http://schemas.openxmlformats.org/presentationml/2006/main">
+<p:sld xmlns:a="http://schemas.openxmlformats.org/drawingml/2006/main" xmlns:p="http://schemas.openxmlformats.org/presentationml/2006/main" xmlns:r="http://schemas.openxmlformats.org/officeDocument/2006/relationships">
   <p:cSld>
+    <p:bg>
+      <p:bgPr>
+        <a:solidFill>
+          <a:srgbClr val="F8FAFC"/>
+        </a:solidFill>
+        <a:effectLst/>
+      </p:bgPr>
+    </p:bg>
     <p:spTree>
       <p:nvGrpSpPr>
         <p:cNvPr id="1" name=""/>
         <p:cNvGrpSpPr/>
         <p:nvPr/>
       </p:nvGrpSpPr>
-      <p:grpSpPr>
-        <a:xfrm>
-          <a:off x="0" y="0"/>
-          <a:ext cx="0" cy="0"/>
-          <a:chOff x="0" y="0"/>
-          <a:chExt cx="0" cy="0"/>
-        </a:xfrm>
-      </p:grpSpPr>
-      <p:sp>
-        <p:nvSpPr>
-          <p:cNvPr id="2" name="Shape 0"/>
-          <p:cNvSpPr/>
-          <p:nvPr/>
-        </p:nvSpPr>
-        <p:spPr>
-          <a:xfrm>
-            <a:off x="0" y="0"/>
-            <a:ext cx="12188952" cy="6858000"/>
-          </a:xfrm>
-          <a:prstGeom prst="rect">
-            <a:avLst/>
-          </a:prstGeom>
-          <a:solidFill>
-            <a:srgbClr val="0F172A"/>
-          </a:solidFill>
+      <p:grpSpPr/>
+      <p:sp>
+        <p:nvSpPr>
+          <p:cNvPr id="2" name="Text 1"/>
+          <p:cNvSpPr/>
+          <p:nvPr/>
+        </p:nvSpPr>
+        <p:spPr>
+          <a:xfrm>
+            <a:off x="548640" y="320040"/>
+            <a:ext cx="11064240" cy="685800"/>
+          </a:xfrm>
+          <a:prstGeom prst="rect">
+            <a:avLst/>
+          </a:prstGeom>
+          <a:noFill/>
+          <a:ln>
+            <a:noFill/>
+          </a:ln>
+        </p:spPr>
+        <p:txBody>
+          <a:bodyPr wrap="square" lIns="0" tIns="0" rIns="0" bIns="0" rtlCol="0" anchor="ctr"/>
+          <a:lstStyle/>
+          <a:p>
+            <a:pPr>
+              <a:buNone/>
+            </a:pPr>
+            <a:r>
+              <a:rPr lang="zh-CN" sz="3200" b="1" dirty="0">
+                <a:solidFill>
+                  <a:srgbClr val="0F172A"/>
+                </a:solidFill>
+                <a:latin typeface="微软雅黑" panose="020B0503020204020204" pitchFamily="34" charset="-122"/>
+                <a:ea typeface="微软雅黑" panose="020B0503020204020204" pitchFamily="34" charset="-122"/>
+                <a:cs typeface="微软雅黑" panose="020B0503020204020204" pitchFamily="34" charset="-120"/>
+              </a:rPr>
+              <a:t>质量保证与配置管理</a:t>
+            </a:r>
+          </a:p>
+        </p:txBody>
+      </p:sp>
+      <p:sp>
+        <p:nvSpPr>
+          <p:cNvPr id="3" name="Shape 2"/>
+          <p:cNvSpPr/>
+          <p:nvPr/>
+        </p:nvSpPr>
+        <p:spPr>
+          <a:xfrm>
+            <a:off x="548640" y="1097280"/>
+            <a:ext cx="11064240" cy="0"/>
+          </a:xfrm>
+          <a:prstGeom prst="line">
+            <a:avLst/>
+          </a:prstGeom>
+          <a:noFill/>
+          <a:ln w="12700">
+            <a:solidFill>
+              <a:srgbClr val="E2E8F0"/>
+            </a:solidFill>
+            <a:prstDash val="solid"/>
+          </a:ln>
         </p:spPr>
         <p:txBody>
           <a:bodyPr/>
           <a:p/>
         </p:txBody>
       </p:sp>
-      <p:pic>
-        <p:nvPicPr>
-          <p:cNvPr id="3" name="Image 0" descr="preencoded.png"/>
-          <p:cNvPicPr>
-            <a:picLocks noChangeAspect="1"/>
-          </p:cNvPicPr>
-          <p:nvPr/>
-        </p:nvPicPr>
-        <p:blipFill>
-          <a:blip r:embed="rId1"/>
-          <a:stretch>
-            <a:fillRect/>
-          </a:stretch>
-        </p:blipFill>
-        <p:spPr>
-          <a:xfrm>
-            <a:off x="0" y="0"/>
-            <a:ext cx="12188952" cy="6858000"/>
-          </a:xfrm>
-          <a:prstGeom prst="rect">
-            <a:avLst/>
-          </a:prstGeom>
-        </p:spPr>
-      </p:pic>
-      <p:pic>
-        <p:nvPicPr>
-          <p:cNvPr id="4" name="Image 1" descr="preencoded.png"/>
-          <p:cNvPicPr>
-            <a:picLocks noChangeAspect="1"/>
-          </p:cNvPicPr>
-          <p:nvPr/>
-        </p:nvPicPr>
-        <p:blipFill>
-          <a:blip r:embed="rId2"/>
-          <a:stretch>
-            <a:fillRect/>
-          </a:stretch>
-        </p:blipFill>
-        <p:spPr>
-          <a:xfrm>
-            <a:off x="0" y="0"/>
-            <a:ext cx="12188952" cy="6858000"/>
-          </a:xfrm>
-          <a:prstGeom prst="rect">
-            <a:avLst/>
-          </a:prstGeom>
-        </p:spPr>
-      </p:pic>
-      <p:sp>
-        <p:nvSpPr>
-          <p:cNvPr id="5" name="Text 1"/>
-          <p:cNvSpPr/>
-          <p:nvPr/>
-        </p:nvSpPr>
-        <p:spPr>
-          <a:xfrm>
-            <a:off x="1371600" y="2011680"/>
-            <a:ext cx="9418320" cy="914400"/>
-          </a:xfrm>
-          <a:prstGeom prst="rect">
-            <a:avLst/>
-          </a:prstGeom>
-          <a:noFill/>
-        </p:spPr>
-        <p:txBody>
-          <a:bodyPr wrap="square" lIns="0" tIns="0" rIns="0" bIns="0" rtlCol="0" anchor="ctr"/>
-          <a:lstStyle/>
-          <a:p>
-            <a:pPr marL="0" indent="0" algn="ctr">
-              <a:buNone/>
-            </a:pPr>
-            <a:r>
-              <a:rPr lang="en-US" sz="4800" b="1" dirty="0">
-                <a:solidFill>
-                  <a:srgbClr val="FFFFFF"/>
-                </a:solidFill>
-                <a:latin typeface="微软雅黑" panose="020B0503020204020204" pitchFamily="34" charset="-122"/>
-                <a:ea typeface="微软雅黑" panose="020B0503020204020204" pitchFamily="34" charset="-122"/>
-                <a:cs typeface="微软雅黑" panose="020B0503020204020204" pitchFamily="34" charset="-120"/>
-              </a:rPr>
-              <a:t>打造校园轻量级互助平台</a:t>
-            </a:r>
-            <a:endParaRPr lang="en-US" sz="4800" dirty="0"/>
-          </a:p>
-        </p:txBody>
-      </p:sp>
-      <p:sp>
-        <p:nvSpPr>
-          <p:cNvPr id="6" name="Shape 2"/>
-          <p:cNvSpPr/>
-          <p:nvPr/>
-        </p:nvSpPr>
-        <p:spPr>
-          <a:xfrm>
-            <a:off x="2286000" y="3200400"/>
-            <a:ext cx="7589520" cy="640080"/>
+      <p:sp>
+        <p:nvSpPr>
+          <p:cNvPr id="4" name="Text 3"/>
+          <p:cNvSpPr/>
+          <p:nvPr/>
+        </p:nvSpPr>
+        <p:spPr>
+          <a:xfrm>
+            <a:off x="548640" y="1188720"/>
+            <a:ext cx="11064240" cy="310896"/>
+          </a:xfrm>
+          <a:prstGeom prst="rect">
+            <a:avLst/>
+          </a:prstGeom>
+          <a:noFill/>
+          <a:ln>
+            <a:noFill/>
+          </a:ln>
+        </p:spPr>
+        <p:txBody>
+          <a:bodyPr wrap="square" lIns="0" tIns="0" rIns="0" bIns="0" rtlCol="0" anchor="ctr"/>
+          <a:lstStyle/>
+          <a:p>
+            <a:pPr>
+              <a:buNone/>
+            </a:pPr>
+            <a:r>
+              <a:rPr lang="zh-CN" sz="1300" dirty="0">
+                <a:solidFill>
+                  <a:srgbClr val="64748B"/>
+                </a:solidFill>
+                <a:latin typeface="微软雅黑" panose="020B0503020204020204" pitchFamily="34" charset="-122"/>
+                <a:ea typeface="微软雅黑" panose="020B0503020204020204" pitchFamily="34" charset="-122"/>
+                <a:cs typeface="微软雅黑" panose="020B0503020204020204" pitchFamily="34" charset="-120"/>
+              </a:rPr>
+              <a:t>用流程约束保证两人小组的交付质量与文档可追溯。</a:t>
+            </a:r>
+          </a:p>
+        </p:txBody>
+      </p:sp>
+      <p:sp>
+        <p:nvSpPr>
+          <p:cNvPr id="5" name="Shape 4"/>
+          <p:cNvSpPr/>
+          <p:nvPr/>
+        </p:nvSpPr>
+        <p:spPr>
+          <a:xfrm>
+            <a:off x="548640" y="1572768"/>
+            <a:ext cx="5349240" cy="3931920"/>
           </a:xfrm>
           <a:prstGeom prst="roundRect">
             <a:avLst>
-              <a:gd name="adj" fmla="val 50000"/>
+              <a:gd name="adj" fmla="val 3255"/>
             </a:avLst>
           </a:prstGeom>
           <a:solidFill>
-            <a:srgbClr val="FFFFFF">
-              <a:alpha val="88000"/>
-            </a:srgbClr>
+            <a:srgbClr val="FFFFFF"/>
           </a:solidFill>
+          <a:ln w="12700">
+            <a:solidFill>
+              <a:srgbClr val="E2E8F0"/>
+            </a:solidFill>
+            <a:prstDash val="solid"/>
+          </a:ln>
+          <a:effectLst>
+            <a:outerShdw blurRad="127000" dist="38100" dir="5400000" algn="bl" rotWithShape="0">
+              <a:srgbClr val="0F172A">
+                <a:alpha val="6000"/>
+              </a:srgbClr>
+            </a:outerShdw>
+          </a:effectLst>
         </p:spPr>
         <p:txBody>
           <a:bodyPr/>
@@ -19411,79 +21739,646 @@
       </p:sp>
       <p:sp>
         <p:nvSpPr>
-          <p:cNvPr id="7" name="Text 3"/>
-          <p:cNvSpPr/>
-          <p:nvPr/>
-        </p:nvSpPr>
-        <p:spPr>
-          <a:xfrm>
-            <a:off x="2286000" y="3200400"/>
-            <a:ext cx="7589520" cy="640080"/>
-          </a:xfrm>
-          <a:prstGeom prst="rect">
-            <a:avLst/>
-          </a:prstGeom>
-          <a:noFill/>
-        </p:spPr>
-        <p:txBody>
-          <a:bodyPr wrap="square" lIns="0" tIns="0" rIns="0" bIns="0" rtlCol="0" anchor="ctr"/>
-          <a:lstStyle/>
-          <a:p>
-            <a:pPr marL="0" indent="0" algn="ctr">
-              <a:buNone/>
-            </a:pPr>
-            <a:r>
-              <a:rPr lang="en-US" sz="1600" dirty="0">
-                <a:solidFill>
-                  <a:srgbClr val="FFFFFF"/>
-                </a:solidFill>
-                <a:latin typeface="微软雅黑" panose="020B0503020204020204" pitchFamily="34" charset="-122"/>
-                <a:ea typeface="微软雅黑" panose="020B0503020204020204" pitchFamily="34" charset="-122"/>
-                <a:cs typeface="微软雅黑" panose="020B0503020204020204" pitchFamily="34" charset="-120"/>
-              </a:rPr>
-              <a:t>微信小程序 · 任务集市 · 信誉体系 · 校园专属</a:t>
-            </a:r>
-            <a:endParaRPr lang="en-US" sz="1600" dirty="0"/>
-          </a:p>
-        </p:txBody>
-      </p:sp>
-      <p:sp>
-        <p:nvSpPr>
-          <p:cNvPr id="8" name="Text 4"/>
-          <p:cNvSpPr/>
-          <p:nvPr/>
-        </p:nvSpPr>
-        <p:spPr>
-          <a:xfrm>
-            <a:off x="1828800" y="4572000"/>
-            <a:ext cx="8503920" cy="457200"/>
-          </a:xfrm>
-          <a:prstGeom prst="rect">
-            <a:avLst/>
-          </a:prstGeom>
-          <a:noFill/>
-        </p:spPr>
-        <p:txBody>
-          <a:bodyPr wrap="square" lIns="0" tIns="0" rIns="0" bIns="0" rtlCol="0" anchor="ctr"/>
-          <a:lstStyle/>
-          <a:p>
-            <a:pPr marL="0" indent="0" algn="ctr">
-              <a:buNone/>
-            </a:pPr>
-            <a:r>
-              <a:rPr lang="en-US" sz="1800" dirty="0">
-                <a:solidFill>
-                  <a:srgbClr val="FFFFFF">
-                    <a:alpha val="80000"/>
-                  </a:srgbClr>
-                </a:solidFill>
-                <a:latin typeface="微软雅黑" panose="020B0503020204020204" pitchFamily="34" charset="-122"/>
-                <a:ea typeface="微软雅黑" panose="020B0503020204020204" pitchFamily="34" charset="-122"/>
-                <a:cs typeface="微软雅黑" panose="020B0503020204020204" pitchFamily="34" charset="-120"/>
-              </a:rPr>
-              <a:t>让每一次互助都简单、可信、有温度</a:t>
-            </a:r>
-            <a:endParaRPr lang="en-US" sz="1800" dirty="0"/>
+          <p:cNvPr id="6" name="Text 5"/>
+          <p:cNvSpPr/>
+          <p:nvPr/>
+        </p:nvSpPr>
+        <p:spPr>
+          <a:xfrm>
+            <a:off x="822960" y="1700784"/>
+            <a:ext cx="4800600" cy="420624"/>
+          </a:xfrm>
+          <a:prstGeom prst="rect">
+            <a:avLst/>
+          </a:prstGeom>
+          <a:noFill/>
+          <a:ln>
+            <a:noFill/>
+          </a:ln>
+        </p:spPr>
+        <p:txBody>
+          <a:bodyPr wrap="square" lIns="0" tIns="0" rIns="0" bIns="0" rtlCol="0" anchor="ctr"/>
+          <a:lstStyle/>
+          <a:p>
+            <a:pPr>
+              <a:buNone/>
+            </a:pPr>
+            <a:r>
+              <a:rPr lang="zh-CN" sz="1800" b="1" dirty="0">
+                <a:solidFill>
+                  <a:srgbClr val="4F46E5"/>
+                </a:solidFill>
+                <a:latin typeface="微软雅黑" panose="020B0503020204020204" pitchFamily="34" charset="-122"/>
+                <a:ea typeface="微软雅黑" panose="020B0503020204020204" pitchFamily="34" charset="-122"/>
+                <a:cs typeface="微软雅黑" panose="020B0503020204020204" pitchFamily="34" charset="-120"/>
+              </a:rPr>
+              <a:t>质量保证</a:t>
+            </a:r>
+          </a:p>
+        </p:txBody>
+      </p:sp>
+      <p:sp>
+        <p:nvSpPr>
+          <p:cNvPr id="7" name="Shape 6"/>
+          <p:cNvSpPr/>
+          <p:nvPr/>
+        </p:nvSpPr>
+        <p:spPr>
+          <a:xfrm>
+            <a:off x="822960" y="2212848"/>
+            <a:ext cx="4800600" cy="0"/>
+          </a:xfrm>
+          <a:prstGeom prst="line">
+            <a:avLst/>
+          </a:prstGeom>
+          <a:noFill/>
+          <a:ln w="12700">
+            <a:solidFill>
+              <a:srgbClr val="E2E8F0"/>
+            </a:solidFill>
+            <a:prstDash val="solid"/>
+          </a:ln>
+        </p:spPr>
+        <p:txBody>
+          <a:bodyPr/>
+          <a:p/>
+        </p:txBody>
+      </p:sp>
+      <p:sp>
+        <p:nvSpPr>
+          <p:cNvPr id="8" name="Text 7"/>
+          <p:cNvSpPr/>
+          <p:nvPr/>
+        </p:nvSpPr>
+        <p:spPr>
+          <a:xfrm>
+            <a:off x="822960" y="2359152"/>
+            <a:ext cx="4800600" cy="3017520"/>
+          </a:xfrm>
+          <a:prstGeom prst="rect">
+            <a:avLst/>
+          </a:prstGeom>
+          <a:noFill/>
+          <a:ln>
+            <a:noFill/>
+          </a:ln>
+        </p:spPr>
+        <p:txBody>
+          <a:bodyPr wrap="square" lIns="0" tIns="0" rIns="0" bIns="0" rtlCol="0" anchor="t"/>
+          <a:lstStyle/>
+          <a:p>
+            <a:pPr>
+              <a:lnSpc>
+                <a:spcPct val="130000"/>
+              </a:lnSpc>
+              <a:spcAft>
+                <a:spcPts val="900"/>
+              </a:spcAft>
+              <a:buNone/>
+            </a:pPr>
+            <a:r>
+              <a:rPr lang="zh-CN" sz="1200" dirty="0">
+                <a:solidFill>
+                  <a:srgbClr val="4F46E5"/>
+                </a:solidFill>
+                <a:latin typeface="微软雅黑" panose="020B0503020204020204" pitchFamily="34" charset="-122"/>
+                <a:ea typeface="微软雅黑" panose="020B0503020204020204" pitchFamily="34" charset="-122"/>
+                <a:cs typeface="微软雅黑" panose="020B0503020204020204" pitchFamily="34" charset="-120"/>
+              </a:rPr>
+              <a:t>▸ </a:t>
+            </a:r>
+            <a:r>
+              <a:rPr lang="zh-CN" sz="1200" dirty="0">
+                <a:solidFill>
+                  <a:srgbClr val="334155"/>
+                </a:solidFill>
+                <a:latin typeface="微软雅黑" panose="020B0503020204020204" pitchFamily="34" charset="-122"/>
+                <a:ea typeface="微软雅黑" panose="020B0503020204020204" pitchFamily="34" charset="-122"/>
+                <a:cs typeface="微软雅黑" panose="020B0503020204020204" pitchFamily="34" charset="-120"/>
+              </a:rPr>
+              <a:t>三道关口：文档评审 → 代码走查 → 测试验证</a:t>
+            </a:r>
+          </a:p>
+          <a:p>
+            <a:pPr>
+              <a:lnSpc>
+                <a:spcPct val="130000"/>
+              </a:lnSpc>
+              <a:spcAft>
+                <a:spcPts val="900"/>
+              </a:spcAft>
+              <a:buNone/>
+            </a:pPr>
+            <a:r>
+              <a:rPr lang="zh-CN" sz="1200" dirty="0">
+                <a:solidFill>
+                  <a:srgbClr val="4F46E5"/>
+                </a:solidFill>
+                <a:latin typeface="微软雅黑" panose="020B0503020204020204" pitchFamily="34" charset="-122"/>
+                <a:ea typeface="微软雅黑" panose="020B0503020204020204" pitchFamily="34" charset="-122"/>
+                <a:cs typeface="微软雅黑" panose="020B0503020204020204" pitchFamily="34" charset="-120"/>
+              </a:rPr>
+              <a:t>▸ </a:t>
+            </a:r>
+            <a:r>
+              <a:rPr lang="zh-CN" sz="1200" dirty="0">
+                <a:solidFill>
+                  <a:srgbClr val="334155"/>
+                </a:solidFill>
+                <a:latin typeface="微软雅黑" panose="020B0503020204020204" pitchFamily="34" charset="-122"/>
+                <a:ea typeface="微软雅黑" panose="020B0503020204020204" pitchFamily="34" charset="-122"/>
+                <a:cs typeface="微软雅黑" panose="020B0503020204020204" pitchFamily="34" charset="-120"/>
+              </a:rPr>
+              <a:t>每阶段末组织一次文档评审</a:t>
+            </a:r>
+          </a:p>
+          <a:p>
+            <a:pPr>
+              <a:lnSpc>
+                <a:spcPct val="130000"/>
+              </a:lnSpc>
+              <a:spcAft>
+                <a:spcPts val="900"/>
+              </a:spcAft>
+              <a:buNone/>
+            </a:pPr>
+            <a:r>
+              <a:rPr lang="zh-CN" sz="1200" dirty="0">
+                <a:solidFill>
+                  <a:srgbClr val="4F46E5"/>
+                </a:solidFill>
+                <a:latin typeface="微软雅黑" panose="020B0503020204020204" pitchFamily="34" charset="-122"/>
+                <a:ea typeface="微软雅黑" panose="020B0503020204020204" pitchFamily="34" charset="-122"/>
+                <a:cs typeface="微软雅黑" panose="020B0503020204020204" pitchFamily="34" charset="-120"/>
+              </a:rPr>
+              <a:t>▸ </a:t>
+            </a:r>
+            <a:r>
+              <a:rPr lang="zh-CN" sz="1200" dirty="0">
+                <a:solidFill>
+                  <a:srgbClr val="334155"/>
+                </a:solidFill>
+                <a:latin typeface="微软雅黑" panose="020B0503020204020204" pitchFamily="34" charset="-122"/>
+                <a:ea typeface="微软雅黑" panose="020B0503020204020204" pitchFamily="34" charset="-122"/>
+                <a:cs typeface="微软雅黑" panose="020B0503020204020204" pitchFamily="34" charset="-120"/>
+              </a:rPr>
+              <a:t>核心模块（积分账本、订单状态机）编码后走查</a:t>
+            </a:r>
+          </a:p>
+          <a:p>
+            <a:pPr>
+              <a:lnSpc>
+                <a:spcPct val="130000"/>
+              </a:lnSpc>
+              <a:spcAft>
+                <a:spcPts val="900"/>
+              </a:spcAft>
+              <a:buNone/>
+            </a:pPr>
+            <a:r>
+              <a:rPr lang="zh-CN" sz="1200" dirty="0">
+                <a:solidFill>
+                  <a:srgbClr val="4F46E5"/>
+                </a:solidFill>
+                <a:latin typeface="微软雅黑" panose="020B0503020204020204" pitchFamily="34" charset="-122"/>
+                <a:ea typeface="微软雅黑" panose="020B0503020204020204" pitchFamily="34" charset="-122"/>
+                <a:cs typeface="微软雅黑" panose="020B0503020204020204" pitchFamily="34" charset="-120"/>
+              </a:rPr>
+              <a:t>▸ </a:t>
+            </a:r>
+            <a:r>
+              <a:rPr lang="zh-CN" sz="1200" dirty="0">
+                <a:solidFill>
+                  <a:srgbClr val="334155"/>
+                </a:solidFill>
+                <a:latin typeface="微软雅黑" panose="020B0503020204020204" pitchFamily="34" charset="-122"/>
+                <a:ea typeface="微软雅黑" panose="020B0503020204020204" pitchFamily="34" charset="-122"/>
+                <a:cs typeface="微软雅黑" panose="020B0503020204020204" pitchFamily="34" charset="-120"/>
+              </a:rPr>
+              <a:t>质量目标：无严重缺陷遗留，一般缺陷修复率 ≥ 90%</a:t>
+            </a:r>
+          </a:p>
+        </p:txBody>
+      </p:sp>
+      <p:sp>
+        <p:nvSpPr>
+          <p:cNvPr id="9" name="Shape 8"/>
+          <p:cNvSpPr/>
+          <p:nvPr/>
+        </p:nvSpPr>
+        <p:spPr>
+          <a:xfrm>
+            <a:off x="6263640" y="1572768"/>
+            <a:ext cx="5349240" cy="3931920"/>
+          </a:xfrm>
+          <a:prstGeom prst="roundRect">
+            <a:avLst>
+              <a:gd name="adj" fmla="val 3255"/>
+            </a:avLst>
+          </a:prstGeom>
+          <a:solidFill>
+            <a:srgbClr val="FFFFFF"/>
+          </a:solidFill>
+          <a:ln w="12700">
+            <a:solidFill>
+              <a:srgbClr val="E2E8F0"/>
+            </a:solidFill>
+            <a:prstDash val="solid"/>
+          </a:ln>
+          <a:effectLst>
+            <a:outerShdw blurRad="127000" dist="38100" dir="5400000" algn="bl" rotWithShape="0">
+              <a:srgbClr val="0F172A">
+                <a:alpha val="6000"/>
+              </a:srgbClr>
+            </a:outerShdw>
+          </a:effectLst>
+        </p:spPr>
+        <p:txBody>
+          <a:bodyPr/>
+          <a:p/>
+        </p:txBody>
+      </p:sp>
+      <p:sp>
+        <p:nvSpPr>
+          <p:cNvPr id="10" name="Text 9"/>
+          <p:cNvSpPr/>
+          <p:nvPr/>
+        </p:nvSpPr>
+        <p:spPr>
+          <a:xfrm>
+            <a:off x="6537960" y="1700784"/>
+            <a:ext cx="4800600" cy="420624"/>
+          </a:xfrm>
+          <a:prstGeom prst="rect">
+            <a:avLst/>
+          </a:prstGeom>
+          <a:noFill/>
+          <a:ln>
+            <a:noFill/>
+          </a:ln>
+        </p:spPr>
+        <p:txBody>
+          <a:bodyPr wrap="square" lIns="0" tIns="0" rIns="0" bIns="0" rtlCol="0" anchor="ctr"/>
+          <a:lstStyle/>
+          <a:p>
+            <a:pPr>
+              <a:buNone/>
+            </a:pPr>
+            <a:r>
+              <a:rPr lang="zh-CN" sz="1800" b="1" dirty="0">
+                <a:solidFill>
+                  <a:srgbClr val="0EA5E9"/>
+                </a:solidFill>
+                <a:latin typeface="微软雅黑" panose="020B0503020204020204" pitchFamily="34" charset="-122"/>
+                <a:ea typeface="微软雅黑" panose="020B0503020204020204" pitchFamily="34" charset="-122"/>
+                <a:cs typeface="微软雅黑" panose="020B0503020204020204" pitchFamily="34" charset="-120"/>
+              </a:rPr>
+              <a:t>配置管理</a:t>
+            </a:r>
+          </a:p>
+        </p:txBody>
+      </p:sp>
+      <p:sp>
+        <p:nvSpPr>
+          <p:cNvPr id="11" name="Shape 10"/>
+          <p:cNvSpPr/>
+          <p:nvPr/>
+        </p:nvSpPr>
+        <p:spPr>
+          <a:xfrm>
+            <a:off x="6537960" y="2212848"/>
+            <a:ext cx="4800600" cy="0"/>
+          </a:xfrm>
+          <a:prstGeom prst="line">
+            <a:avLst/>
+          </a:prstGeom>
+          <a:noFill/>
+          <a:ln w="12700">
+            <a:solidFill>
+              <a:srgbClr val="E2E8F0"/>
+            </a:solidFill>
+            <a:prstDash val="solid"/>
+          </a:ln>
+        </p:spPr>
+        <p:txBody>
+          <a:bodyPr/>
+          <a:p/>
+        </p:txBody>
+      </p:sp>
+      <p:sp>
+        <p:nvSpPr>
+          <p:cNvPr id="12" name="Text 11"/>
+          <p:cNvSpPr/>
+          <p:nvPr/>
+        </p:nvSpPr>
+        <p:spPr>
+          <a:xfrm>
+            <a:off x="6537960" y="2359152"/>
+            <a:ext cx="4800600" cy="3017520"/>
+          </a:xfrm>
+          <a:prstGeom prst="rect">
+            <a:avLst/>
+          </a:prstGeom>
+          <a:noFill/>
+          <a:ln>
+            <a:noFill/>
+          </a:ln>
+        </p:spPr>
+        <p:txBody>
+          <a:bodyPr wrap="square" lIns="0" tIns="0" rIns="0" bIns="0" rtlCol="0" anchor="t"/>
+          <a:lstStyle/>
+          <a:p>
+            <a:pPr>
+              <a:lnSpc>
+                <a:spcPct val="130000"/>
+              </a:lnSpc>
+              <a:spcAft>
+                <a:spcPts val="900"/>
+              </a:spcAft>
+              <a:buNone/>
+            </a:pPr>
+            <a:r>
+              <a:rPr lang="zh-CN" sz="1200" dirty="0">
+                <a:solidFill>
+                  <a:srgbClr val="0EA5E9"/>
+                </a:solidFill>
+                <a:latin typeface="微软雅黑" panose="020B0503020204020204" pitchFamily="34" charset="-122"/>
+                <a:ea typeface="微软雅黑" panose="020B0503020204020204" pitchFamily="34" charset="-122"/>
+                <a:cs typeface="微软雅黑" panose="020B0503020204020204" pitchFamily="34" charset="-120"/>
+              </a:rPr>
+              <a:t>▸ </a:t>
+            </a:r>
+            <a:r>
+              <a:rPr lang="zh-CN" sz="1200" dirty="0">
+                <a:solidFill>
+                  <a:srgbClr val="334155"/>
+                </a:solidFill>
+                <a:latin typeface="微软雅黑" panose="020B0503020204020204" pitchFamily="34" charset="-122"/>
+                <a:ea typeface="微软雅黑" panose="020B0503020204020204" pitchFamily="34" charset="-122"/>
+                <a:cs typeface="微软雅黑" panose="020B0503020204020204" pitchFamily="34" charset="-120"/>
+              </a:rPr>
+              <a:t>源码、文档、数据库脚本全部纳入 Git</a:t>
+            </a:r>
+          </a:p>
+          <a:p>
+            <a:pPr>
+              <a:lnSpc>
+                <a:spcPct val="130000"/>
+              </a:lnSpc>
+              <a:spcAft>
+                <a:spcPts val="900"/>
+              </a:spcAft>
+              <a:buNone/>
+            </a:pPr>
+            <a:r>
+              <a:rPr lang="zh-CN" sz="1200" dirty="0">
+                <a:solidFill>
+                  <a:srgbClr val="0EA5E9"/>
+                </a:solidFill>
+                <a:latin typeface="微软雅黑" panose="020B0503020204020204" pitchFamily="34" charset="-122"/>
+                <a:ea typeface="微软雅黑" panose="020B0503020204020204" pitchFamily="34" charset="-122"/>
+                <a:cs typeface="微软雅黑" panose="020B0503020204020204" pitchFamily="34" charset="-120"/>
+              </a:rPr>
+              <a:t>▸ </a:t>
+            </a:r>
+            <a:r>
+              <a:rPr lang="zh-CN" sz="1200" dirty="0">
+                <a:solidFill>
+                  <a:srgbClr val="334155"/>
+                </a:solidFill>
+                <a:latin typeface="微软雅黑" panose="020B0503020204020204" pitchFamily="34" charset="-122"/>
+                <a:ea typeface="微软雅黑" panose="020B0503020204020204" pitchFamily="34" charset="-122"/>
+                <a:cs typeface="微软雅黑" panose="020B0503020204020204" pitchFamily="34" charset="-120"/>
+              </a:rPr>
+              <a:t>main（可运行主干）+ feature/T 编号分支</a:t>
+            </a:r>
+          </a:p>
+          <a:p>
+            <a:pPr>
+              <a:lnSpc>
+                <a:spcPct val="130000"/>
+              </a:lnSpc>
+              <a:spcAft>
+                <a:spcPts val="900"/>
+              </a:spcAft>
+              <a:buNone/>
+            </a:pPr>
+            <a:r>
+              <a:rPr lang="zh-CN" sz="1200" dirty="0">
+                <a:solidFill>
+                  <a:srgbClr val="0EA5E9"/>
+                </a:solidFill>
+                <a:latin typeface="微软雅黑" panose="020B0503020204020204" pitchFamily="34" charset="-122"/>
+                <a:ea typeface="微软雅黑" panose="020B0503020204020204" pitchFamily="34" charset="-122"/>
+                <a:cs typeface="微软雅黑" panose="020B0503020204020204" pitchFamily="34" charset="-120"/>
+              </a:rPr>
+              <a:t>▸ </a:t>
+            </a:r>
+            <a:r>
+              <a:rPr lang="zh-CN" sz="1200" dirty="0">
+                <a:solidFill>
+                  <a:srgbClr val="334155"/>
+                </a:solidFill>
+                <a:latin typeface="微软雅黑" panose="020B0503020204020204" pitchFamily="34" charset="-122"/>
+                <a:ea typeface="微软雅黑" panose="020B0503020204020204" pitchFamily="34" charset="-122"/>
+                <a:cs typeface="微软雅黑" panose="020B0503020204020204" pitchFamily="34" charset="-120"/>
+              </a:rPr>
+              <a:t>文档版本号 V主.次，与里程碑 tag 对应</a:t>
+            </a:r>
+          </a:p>
+          <a:p>
+            <a:pPr>
+              <a:lnSpc>
+                <a:spcPct val="130000"/>
+              </a:lnSpc>
+              <a:spcAft>
+                <a:spcPts val="900"/>
+              </a:spcAft>
+              <a:buNone/>
+            </a:pPr>
+            <a:r>
+              <a:rPr lang="zh-CN" sz="1200" dirty="0">
+                <a:solidFill>
+                  <a:srgbClr val="0EA5E9"/>
+                </a:solidFill>
+                <a:latin typeface="微软雅黑" panose="020B0503020204020204" pitchFamily="34" charset="-122"/>
+                <a:ea typeface="微软雅黑" panose="020B0503020204020204" pitchFamily="34" charset="-122"/>
+                <a:cs typeface="微软雅黑" panose="020B0503020204020204" pitchFamily="34" charset="-120"/>
+              </a:rPr>
+              <a:t>▸ </a:t>
+            </a:r>
+            <a:r>
+              <a:rPr lang="zh-CN" sz="1200" dirty="0">
+                <a:solidFill>
+                  <a:srgbClr val="334155"/>
+                </a:solidFill>
+                <a:latin typeface="微软雅黑" panose="020B0503020204020204" pitchFamily="34" charset="-122"/>
+                <a:ea typeface="微软雅黑" panose="020B0503020204020204" pitchFamily="34" charset="-122"/>
+                <a:cs typeface="微软雅黑" panose="020B0503020204020204" pitchFamily="34" charset="-120"/>
+              </a:rPr>
+              <a:t>变更走“申请→评估→批准→实施→记录”五步</a:t>
+            </a:r>
+          </a:p>
+        </p:txBody>
+      </p:sp>
+      <p:sp>
+        <p:nvSpPr>
+          <p:cNvPr id="13" name="Shape 12"/>
+          <p:cNvSpPr/>
+          <p:nvPr/>
+        </p:nvSpPr>
+        <p:spPr>
+          <a:xfrm>
+            <a:off x="548640" y="5715000"/>
+            <a:ext cx="11064240" cy="658368"/>
+          </a:xfrm>
+          <a:prstGeom prst="roundRect">
+            <a:avLst>
+              <a:gd name="adj" fmla="val 16666"/>
+            </a:avLst>
+          </a:prstGeom>
+          <a:solidFill>
+            <a:srgbClr val="EEF2FF"/>
+          </a:solidFill>
+          <a:ln w="12700">
+            <a:solidFill>
+              <a:srgbClr val="C7D2FE"/>
+            </a:solidFill>
+            <a:prstDash val="solid"/>
+          </a:ln>
+          <a:effectLst>
+            <a:outerShdw blurRad="127000" dist="38100" dir="5400000" algn="bl" rotWithShape="0">
+              <a:srgbClr val="0F172A">
+                <a:alpha val="6000"/>
+              </a:srgbClr>
+            </a:outerShdw>
+          </a:effectLst>
+        </p:spPr>
+        <p:txBody>
+          <a:bodyPr/>
+          <a:p/>
+        </p:txBody>
+      </p:sp>
+      <p:sp>
+        <p:nvSpPr>
+          <p:cNvPr id="14" name="Text 13"/>
+          <p:cNvSpPr/>
+          <p:nvPr/>
+        </p:nvSpPr>
+        <p:spPr>
+          <a:xfrm>
+            <a:off x="868680" y="5733288"/>
+            <a:ext cx="10424160" cy="621792"/>
+          </a:xfrm>
+          <a:prstGeom prst="rect">
+            <a:avLst/>
+          </a:prstGeom>
+          <a:noFill/>
+          <a:ln>
+            <a:noFill/>
+          </a:ln>
+        </p:spPr>
+        <p:txBody>
+          <a:bodyPr wrap="square" lIns="0" tIns="0" rIns="0" bIns="0" rtlCol="0" anchor="ctr"/>
+          <a:lstStyle/>
+          <a:p>
+            <a:pPr>
+              <a:lnSpc>
+                <a:spcPct val="125000"/>
+              </a:lnSpc>
+              <a:buNone/>
+            </a:pPr>
+            <a:r>
+              <a:rPr lang="zh-CN" sz="1200" b="1" dirty="0">
+                <a:solidFill>
+                  <a:srgbClr val="0F172A"/>
+                </a:solidFill>
+                <a:latin typeface="微软雅黑" panose="020B0503020204020204" pitchFamily="34" charset="-122"/>
+                <a:ea typeface="微软雅黑" panose="020B0503020204020204" pitchFamily="34" charset="-122"/>
+                <a:cs typeface="微软雅黑" panose="020B0503020204020204" pitchFamily="34" charset="-120"/>
+              </a:rPr>
+              <a:t>过程可追溯：会议记录、变更台账、评审记录随里程碑归档，作为验收材料的一部分</a:t>
+            </a:r>
+          </a:p>
+        </p:txBody>
+      </p:sp>
+      <p:sp>
+        <p:nvSpPr>
+          <p:cNvPr id="15" name="Text 1"/>
+          <p:cNvSpPr/>
+          <p:nvPr/>
+        </p:nvSpPr>
+        <p:spPr>
+          <a:xfrm>
+            <a:off x="548640" y="6510528"/>
+            <a:ext cx="5486400" cy="256032"/>
+          </a:xfrm>
+          <a:prstGeom prst="rect">
+            <a:avLst/>
+          </a:prstGeom>
+          <a:noFill/>
+          <a:ln>
+            <a:noFill/>
+          </a:ln>
+        </p:spPr>
+        <p:txBody>
+          <a:bodyPr wrap="square" lIns="0" tIns="0" rIns="0" bIns="0" rtlCol="0" anchor="ctr"/>
+          <a:lstStyle/>
+          <a:p>
+            <a:pPr>
+              <a:buNone/>
+            </a:pPr>
+            <a:r>
+              <a:rPr lang="zh-CN" sz="1000" dirty="0">
+                <a:solidFill>
+                  <a:srgbClr val="94A3B8"/>
+                </a:solidFill>
+                <a:latin typeface="微软雅黑" panose="020B0503020204020204" pitchFamily="34" charset="-122"/>
+                <a:ea typeface="微软雅黑" panose="020B0503020204020204" pitchFamily="34" charset="-122"/>
+                <a:cs typeface="微软雅黑" panose="020B0503020204020204" pitchFamily="34" charset="-120"/>
+              </a:rPr>
+              <a:t>校园互助平台 · 项目方案</a:t>
+            </a:r>
+          </a:p>
+        </p:txBody>
+      </p:sp>
+      <p:sp>
+        <p:nvSpPr>
+          <p:cNvPr id="16" name="Text 2"/>
+          <p:cNvSpPr/>
+          <p:nvPr/>
+        </p:nvSpPr>
+        <p:spPr>
+          <a:xfrm>
+            <a:off x="6126480" y="6510528"/>
+            <a:ext cx="5486400" cy="256032"/>
+          </a:xfrm>
+          <a:prstGeom prst="rect">
+            <a:avLst/>
+          </a:prstGeom>
+          <a:noFill/>
+          <a:ln>
+            <a:noFill/>
+          </a:ln>
+        </p:spPr>
+        <p:txBody>
+          <a:bodyPr wrap="square" lIns="0" tIns="0" rIns="0" bIns="0" rtlCol="0" anchor="ctr"/>
+          <a:lstStyle/>
+          <a:p>
+            <a:pPr algn="r">
+              <a:buNone/>
+            </a:pPr>
+            <a:r>
+              <a:rPr lang="zh-CN" sz="1000" dirty="0">
+                <a:solidFill>
+                  <a:srgbClr val="94A3B8"/>
+                </a:solidFill>
+                <a:latin typeface="微软雅黑" panose="020B0503020204020204" pitchFamily="34" charset="-122"/>
+                <a:ea typeface="微软雅黑" panose="020B0503020204020204" pitchFamily="34" charset="-122"/>
+                <a:cs typeface="微软雅黑" panose="020B0503020204020204" pitchFamily="34" charset="-120"/>
+              </a:rPr>
+              <a:t>28</a:t>
+            </a:r>
           </a:p>
         </p:txBody>
       </p:sp>
@@ -19548,7 +22443,7 @@
                 <a:ea typeface="微软雅黑" panose="020B0503020204020204" pitchFamily="34" charset="-122"/>
                 <a:cs typeface="微软雅黑" panose="020B0503020204020204" pitchFamily="34" charset="-120"/>
               </a:rPr>
-              <a:t>团队绩效评价（量化）</a:t>
+              <a:t>参考文献</a:t>
             </a:r>
           </a:p>
         </p:txBody>
@@ -19575,6 +22470,10 @@
             <a:prstDash val="solid"/>
           </a:ln>
         </p:spPr>
+        <p:txBody>
+          <a:bodyPr/>
+          <a:p/>
+        </p:txBody>
       </p:sp>
       <p:sp>
         <p:nvSpPr>
@@ -19584,7 +22483,7 @@
         </p:nvSpPr>
         <p:spPr>
           <a:xfrm>
-            <a:off x="548640" y="1188720"/>
+            <a:off x="548640" y="1225296"/>
             <a:ext cx="11064240" cy="310896"/>
           </a:xfrm>
           <a:prstGeom prst="rect">
@@ -19611,7 +22510,7 @@
                 <a:ea typeface="微软雅黑" panose="020B0503020204020204" pitchFamily="34" charset="-122"/>
                 <a:cs typeface="微软雅黑" panose="020B0503020204020204" pitchFamily="34" charset="-120"/>
               </a:rPr>
-              <a:t>每个里程碑按 4 个维度打分：自评 20% + 互评 40% + 指导教师 40% 加权，满分 100。</a:t>
+              <a:t>正文中形如 [n] 的标记，表示该处内容参考了下方对应文献。</a:t>
             </a:r>
           </a:p>
         </p:txBody>
@@ -19624,12 +22523,12 @@
         </p:nvSpPr>
         <p:spPr>
           <a:xfrm>
-            <a:off x="548640" y="1572768"/>
-            <a:ext cx="7406640" cy="3255264"/>
+            <a:off x="548640" y="1645920"/>
+            <a:ext cx="11064240" cy="4572000"/>
           </a:xfrm>
           <a:prstGeom prst="roundRect">
             <a:avLst>
-              <a:gd name="adj" fmla="val 2808"/>
+              <a:gd name="adj" fmla="val 2800"/>
             </a:avLst>
           </a:prstGeom>
           <a:solidFill>
@@ -19649,1469 +22548,21 @@
             </a:outerShdw>
           </a:effectLst>
         </p:spPr>
-      </p:sp>
-      <p:sp>
-        <p:nvSpPr>
-          <p:cNvPr id="6" name="HeadBg 5"/>
-          <p:cNvSpPr/>
-          <p:nvPr/>
-        </p:nvSpPr>
-        <p:spPr>
-          <a:xfrm>
-            <a:off x="548640" y="1572768"/>
-            <a:ext cx="7406640" cy="384048"/>
-          </a:xfrm>
-          <a:prstGeom prst="rect">
-            <a:avLst/>
-          </a:prstGeom>
-          <a:solidFill>
-            <a:srgbClr val="4F46E5"/>
-          </a:solidFill>
-          <a:ln>
-            <a:noFill/>
-          </a:ln>
-        </p:spPr>
-      </p:sp>
-      <p:sp>
-        <p:nvSpPr>
-          <p:cNvPr id="7" name="Text 6"/>
-          <p:cNvSpPr/>
-          <p:nvPr/>
-        </p:nvSpPr>
-        <p:spPr>
-          <a:xfrm>
-            <a:off x="658368" y="1591056"/>
-            <a:ext cx="3017520" cy="347472"/>
-          </a:xfrm>
-          <a:prstGeom prst="rect">
-            <a:avLst/>
-          </a:prstGeom>
-          <a:noFill/>
-          <a:ln>
-            <a:noFill/>
-          </a:ln>
-        </p:spPr>
-        <p:txBody>
-          <a:bodyPr wrap="square" lIns="0" tIns="0" rIns="0" bIns="0" rtlCol="0" anchor="ctr"/>
-          <a:lstStyle/>
-          <a:p>
-            <a:pPr algn="l">
-              <a:buNone/>
-            </a:pPr>
-            <a:r>
-              <a:rPr lang="zh-CN" sz="1200" b="1" dirty="0">
-                <a:solidFill>
-                  <a:srgbClr val="FFFFFF"/>
-                </a:solidFill>
-                <a:latin typeface="微软雅黑" panose="020B0503020204020204" pitchFamily="34" charset="-122"/>
-                <a:ea typeface="微软雅黑" panose="020B0503020204020204" pitchFamily="34" charset="-122"/>
-                <a:cs typeface="微软雅黑" panose="020B0503020204020204" pitchFamily="34" charset="-120"/>
-              </a:rPr>
-              <a:t>评价维度</a:t>
-            </a:r>
-          </a:p>
-        </p:txBody>
-      </p:sp>
-      <p:sp>
-        <p:nvSpPr>
-          <p:cNvPr id="8" name="Text 7"/>
-          <p:cNvSpPr/>
-          <p:nvPr/>
-        </p:nvSpPr>
-        <p:spPr>
-          <a:xfrm>
-            <a:off x="3749040" y="1591056"/>
-            <a:ext cx="1188720" cy="347472"/>
-          </a:xfrm>
-          <a:prstGeom prst="rect">
-            <a:avLst/>
-          </a:prstGeom>
-          <a:noFill/>
-          <a:ln>
-            <a:noFill/>
-          </a:ln>
-        </p:spPr>
-        <p:txBody>
-          <a:bodyPr wrap="square" lIns="0" tIns="0" rIns="0" bIns="0" rtlCol="0" anchor="ctr"/>
-          <a:lstStyle/>
-          <a:p>
-            <a:pPr algn="ctr">
-              <a:buNone/>
-            </a:pPr>
-            <a:r>
-              <a:rPr lang="zh-CN" sz="1200" b="1" dirty="0">
-                <a:solidFill>
-                  <a:srgbClr val="FFFFFF"/>
-                </a:solidFill>
-                <a:latin typeface="微软雅黑" panose="020B0503020204020204" pitchFamily="34" charset="-122"/>
-                <a:ea typeface="微软雅黑" panose="020B0503020204020204" pitchFamily="34" charset="-122"/>
-                <a:cs typeface="微软雅黑" panose="020B0503020204020204" pitchFamily="34" charset="-120"/>
-              </a:rPr>
-              <a:t>权重</a:t>
-            </a:r>
-          </a:p>
-        </p:txBody>
-      </p:sp>
-      <p:sp>
-        <p:nvSpPr>
-          <p:cNvPr id="9" name="Text 8"/>
-          <p:cNvSpPr/>
-          <p:nvPr/>
-        </p:nvSpPr>
-        <p:spPr>
-          <a:xfrm>
-            <a:off x="5029200" y="1591056"/>
-            <a:ext cx="1417320" cy="347472"/>
-          </a:xfrm>
-          <a:prstGeom prst="rect">
-            <a:avLst/>
-          </a:prstGeom>
-          <a:noFill/>
-          <a:ln>
-            <a:noFill/>
-          </a:ln>
-        </p:spPr>
-        <p:txBody>
-          <a:bodyPr wrap="square" lIns="0" tIns="0" rIns="0" bIns="0" rtlCol="0" anchor="ctr"/>
-          <a:lstStyle/>
-          <a:p>
-            <a:pPr algn="ctr">
-              <a:buNone/>
-            </a:pPr>
-            <a:r>
-              <a:rPr lang="zh-CN" sz="1200" b="1" dirty="0">
-                <a:solidFill>
-                  <a:srgbClr val="FFFFFF"/>
-                </a:solidFill>
-                <a:latin typeface="微软雅黑" panose="020B0503020204020204" pitchFamily="34" charset="-122"/>
-                <a:ea typeface="微软雅黑" panose="020B0503020204020204" pitchFamily="34" charset="-122"/>
-                <a:cs typeface="微软雅黑" panose="020B0503020204020204" pitchFamily="34" charset="-120"/>
-              </a:rPr>
-              <a:t>罗嘉昊</a:t>
-            </a:r>
-          </a:p>
-        </p:txBody>
-      </p:sp>
-      <p:sp>
-        <p:nvSpPr>
-          <p:cNvPr id="10" name="Text 9"/>
-          <p:cNvSpPr/>
-          <p:nvPr/>
-        </p:nvSpPr>
-        <p:spPr>
-          <a:xfrm>
-            <a:off x="6492240" y="1591056"/>
-            <a:ext cx="1325880" cy="347472"/>
-          </a:xfrm>
-          <a:prstGeom prst="rect">
-            <a:avLst/>
-          </a:prstGeom>
-          <a:noFill/>
-          <a:ln>
-            <a:noFill/>
-          </a:ln>
-        </p:spPr>
-        <p:txBody>
-          <a:bodyPr wrap="square" lIns="0" tIns="0" rIns="0" bIns="0" rtlCol="0" anchor="ctr"/>
-          <a:lstStyle/>
-          <a:p>
-            <a:pPr algn="ctr">
-              <a:buNone/>
-            </a:pPr>
-            <a:r>
-              <a:rPr lang="zh-CN" sz="1200" b="1" dirty="0">
-                <a:solidFill>
-                  <a:srgbClr val="FFFFFF"/>
-                </a:solidFill>
-                <a:latin typeface="微软雅黑" panose="020B0503020204020204" pitchFamily="34" charset="-122"/>
-                <a:ea typeface="微软雅黑" panose="020B0503020204020204" pitchFamily="34" charset="-122"/>
-                <a:cs typeface="微软雅黑" panose="020B0503020204020204" pitchFamily="34" charset="-120"/>
-              </a:rPr>
-              <a:t>李雨鑫</a:t>
-            </a:r>
-          </a:p>
-        </p:txBody>
-      </p:sp>
-      <p:sp>
-        <p:nvSpPr>
-          <p:cNvPr id="11" name="Text 10"/>
-          <p:cNvSpPr/>
-          <p:nvPr/>
-        </p:nvSpPr>
-        <p:spPr>
-          <a:xfrm>
-            <a:off x="658368" y="1975104"/>
-            <a:ext cx="3017520" cy="438912"/>
-          </a:xfrm>
-          <a:prstGeom prst="rect">
-            <a:avLst/>
-          </a:prstGeom>
-          <a:noFill/>
-          <a:ln>
-            <a:noFill/>
-          </a:ln>
-        </p:spPr>
-        <p:txBody>
-          <a:bodyPr wrap="square" lIns="0" tIns="0" rIns="0" bIns="0" rtlCol="0" anchor="ctr"/>
-          <a:lstStyle/>
-          <a:p>
-            <a:pPr>
-              <a:lnSpc>
-                <a:spcPct val="110000"/>
-              </a:lnSpc>
-              <a:buNone/>
-            </a:pPr>
-            <a:r>
-              <a:rPr lang="zh-CN" sz="1100" b="1" dirty="0">
-                <a:solidFill>
-                  <a:srgbClr val="0F172A"/>
-                </a:solidFill>
-                <a:latin typeface="微软雅黑" panose="020B0503020204020204" pitchFamily="34" charset="-122"/>
-                <a:ea typeface="微软雅黑" panose="020B0503020204020204" pitchFamily="34" charset="-122"/>
-                <a:cs typeface="微软雅黑" panose="020B0503020204020204" pitchFamily="34" charset="-120"/>
-              </a:rPr>
-              <a:t>任务完成度　</a:t>
-            </a:r>
-            <a:r>
-              <a:rPr lang="zh-CN" sz="950" dirty="0">
-                <a:solidFill>
-                  <a:srgbClr val="64748B"/>
-                </a:solidFill>
-                <a:latin typeface="微软雅黑" panose="020B0503020204020204" pitchFamily="34" charset="-122"/>
-                <a:ea typeface="微软雅黑" panose="020B0503020204020204" pitchFamily="34" charset="-122"/>
-                <a:cs typeface="微软雅黑" panose="020B0503020204020204" pitchFamily="34" charset="-120"/>
-              </a:rPr>
-              <a:t>分配任务是否按期完成、交付物是否齐备</a:t>
-            </a:r>
-          </a:p>
-        </p:txBody>
-      </p:sp>
-      <p:sp>
-        <p:nvSpPr>
-          <p:cNvPr id="12" name="Text 11"/>
-          <p:cNvSpPr/>
-          <p:nvPr/>
-        </p:nvSpPr>
-        <p:spPr>
-          <a:xfrm>
-            <a:off x="3749040" y="1956816"/>
-            <a:ext cx="1188720" cy="475488"/>
-          </a:xfrm>
-          <a:prstGeom prst="rect">
-            <a:avLst/>
-          </a:prstGeom>
-          <a:noFill/>
-          <a:ln>
-            <a:noFill/>
-          </a:ln>
-        </p:spPr>
-        <p:txBody>
-          <a:bodyPr wrap="square" lIns="0" tIns="0" rIns="0" bIns="0" rtlCol="0" anchor="ctr"/>
-          <a:lstStyle/>
-          <a:p>
-            <a:pPr algn="ctr">
-              <a:buNone/>
-            </a:pPr>
-            <a:r>
-              <a:rPr lang="zh-CN" sz="1100" b="1" dirty="0">
-                <a:solidFill>
-                  <a:srgbClr val="334155"/>
-                </a:solidFill>
-                <a:latin typeface="微软雅黑" panose="020B0503020204020204" pitchFamily="34" charset="-122"/>
-                <a:ea typeface="微软雅黑" panose="020B0503020204020204" pitchFamily="34" charset="-122"/>
-                <a:cs typeface="微软雅黑" panose="020B0503020204020204" pitchFamily="34" charset="-120"/>
-              </a:rPr>
-              <a:t>40%</a:t>
-            </a:r>
-          </a:p>
-        </p:txBody>
-      </p:sp>
-      <p:sp>
-        <p:nvSpPr>
-          <p:cNvPr id="13" name="Text 12"/>
-          <p:cNvSpPr/>
-          <p:nvPr/>
-        </p:nvSpPr>
-        <p:spPr>
-          <a:xfrm>
-            <a:off x="5029200" y="1956816"/>
-            <a:ext cx="1417320" cy="475488"/>
-          </a:xfrm>
-          <a:prstGeom prst="rect">
-            <a:avLst/>
-          </a:prstGeom>
-          <a:noFill/>
-          <a:ln>
-            <a:noFill/>
-          </a:ln>
-        </p:spPr>
-        <p:txBody>
-          <a:bodyPr wrap="square" lIns="0" tIns="0" rIns="0" bIns="0" rtlCol="0" anchor="ctr"/>
-          <a:lstStyle/>
-          <a:p>
-            <a:pPr algn="ctr">
-              <a:buNone/>
-            </a:pPr>
-            <a:r>
-              <a:rPr lang="zh-CN" sz="1300" b="1" dirty="0">
-                <a:solidFill>
-                  <a:srgbClr val="4F46E5"/>
-                </a:solidFill>
-                <a:latin typeface="微软雅黑" panose="020B0503020204020204" pitchFamily="34" charset="-122"/>
-                <a:ea typeface="微软雅黑" panose="020B0503020204020204" pitchFamily="34" charset="-122"/>
-                <a:cs typeface="微软雅黑" panose="020B0503020204020204" pitchFamily="34" charset="-120"/>
-              </a:rPr>
-              <a:t>90.0</a:t>
-            </a:r>
-          </a:p>
-        </p:txBody>
-      </p:sp>
-      <p:sp>
-        <p:nvSpPr>
-          <p:cNvPr id="14" name="Text 13"/>
-          <p:cNvSpPr/>
-          <p:nvPr/>
-        </p:nvSpPr>
-        <p:spPr>
-          <a:xfrm>
-            <a:off x="6492240" y="1956816"/>
-            <a:ext cx="1325880" cy="475488"/>
-          </a:xfrm>
-          <a:prstGeom prst="rect">
-            <a:avLst/>
-          </a:prstGeom>
-          <a:noFill/>
-          <a:ln>
-            <a:noFill/>
-          </a:ln>
-        </p:spPr>
-        <p:txBody>
-          <a:bodyPr wrap="square" lIns="0" tIns="0" rIns="0" bIns="0" rtlCol="0" anchor="ctr"/>
-          <a:lstStyle/>
-          <a:p>
-            <a:pPr algn="ctr">
-              <a:buNone/>
-            </a:pPr>
-            <a:r>
-              <a:rPr lang="zh-CN" sz="1300" b="1" dirty="0">
-                <a:solidFill>
-                  <a:srgbClr val="0EA5E9"/>
-                </a:solidFill>
-                <a:latin typeface="微软雅黑" panose="020B0503020204020204" pitchFamily="34" charset="-122"/>
-                <a:ea typeface="微软雅黑" panose="020B0503020204020204" pitchFamily="34" charset="-122"/>
-                <a:cs typeface="微软雅黑" panose="020B0503020204020204" pitchFamily="34" charset="-120"/>
-              </a:rPr>
-              <a:t>91.0</a:t>
-            </a:r>
-          </a:p>
-        </p:txBody>
-      </p:sp>
-      <p:sp>
-        <p:nvSpPr>
-          <p:cNvPr id="15" name="Shape 14"/>
-          <p:cNvSpPr/>
-          <p:nvPr/>
-        </p:nvSpPr>
-        <p:spPr>
-          <a:xfrm>
-            <a:off x="548640" y="2432304"/>
-            <a:ext cx="7406640" cy="0"/>
-          </a:xfrm>
-          <a:prstGeom prst="line">
-            <a:avLst/>
-          </a:prstGeom>
-          <a:noFill/>
-          <a:ln w="12700">
-            <a:solidFill>
-              <a:srgbClr val="E8EDF5"/>
-            </a:solidFill>
-            <a:prstDash val="solid"/>
-          </a:ln>
-        </p:spPr>
-      </p:sp>
-      <p:sp>
-        <p:nvSpPr>
-          <p:cNvPr id="16" name="RowBg 15"/>
-          <p:cNvSpPr/>
-          <p:nvPr/>
-        </p:nvSpPr>
-        <p:spPr>
-          <a:xfrm>
-            <a:off x="548640" y="2432304"/>
-            <a:ext cx="7406640" cy="475488"/>
-          </a:xfrm>
-          <a:prstGeom prst="rect">
-            <a:avLst/>
-          </a:prstGeom>
-          <a:solidFill>
-            <a:srgbClr val="F1F5F9"/>
-          </a:solidFill>
-          <a:ln>
-            <a:noFill/>
-          </a:ln>
-        </p:spPr>
-      </p:sp>
-      <p:sp>
-        <p:nvSpPr>
-          <p:cNvPr id="17" name="Text 16"/>
-          <p:cNvSpPr/>
-          <p:nvPr/>
-        </p:nvSpPr>
-        <p:spPr>
-          <a:xfrm>
-            <a:off x="658368" y="2450592"/>
-            <a:ext cx="3017520" cy="438912"/>
-          </a:xfrm>
-          <a:prstGeom prst="rect">
-            <a:avLst/>
-          </a:prstGeom>
-          <a:noFill/>
-          <a:ln>
-            <a:noFill/>
-          </a:ln>
-        </p:spPr>
-        <p:txBody>
-          <a:bodyPr wrap="square" lIns="0" tIns="0" rIns="0" bIns="0" rtlCol="0" anchor="ctr"/>
-          <a:lstStyle/>
-          <a:p>
-            <a:pPr>
-              <a:lnSpc>
-                <a:spcPct val="110000"/>
-              </a:lnSpc>
-              <a:buNone/>
-            </a:pPr>
-            <a:r>
-              <a:rPr lang="zh-CN" sz="1100" b="1" dirty="0">
-                <a:solidFill>
-                  <a:srgbClr val="0F172A"/>
-                </a:solidFill>
-                <a:latin typeface="微软雅黑" panose="020B0503020204020204" pitchFamily="34" charset="-122"/>
-                <a:ea typeface="微软雅黑" panose="020B0503020204020204" pitchFamily="34" charset="-122"/>
-                <a:cs typeface="微软雅黑" panose="020B0503020204020204" pitchFamily="34" charset="-120"/>
-              </a:rPr>
-              <a:t>交付质量　</a:t>
-            </a:r>
-            <a:r>
-              <a:rPr lang="zh-CN" sz="950" dirty="0">
-                <a:solidFill>
-                  <a:srgbClr val="64748B"/>
-                </a:solidFill>
-                <a:latin typeface="微软雅黑" panose="020B0503020204020204" pitchFamily="34" charset="-122"/>
-                <a:ea typeface="微软雅黑" panose="020B0503020204020204" pitchFamily="34" charset="-122"/>
-                <a:cs typeface="微软雅黑" panose="020B0503020204020204" pitchFamily="34" charset="-120"/>
-              </a:rPr>
-              <a:t>是否满足评审要求、返工次数、缺陷密度</a:t>
-            </a:r>
-          </a:p>
-        </p:txBody>
-      </p:sp>
-      <p:sp>
-        <p:nvSpPr>
-          <p:cNvPr id="18" name="Text 17"/>
-          <p:cNvSpPr/>
-          <p:nvPr/>
-        </p:nvSpPr>
-        <p:spPr>
-          <a:xfrm>
-            <a:off x="3749040" y="2432304"/>
-            <a:ext cx="1188720" cy="475488"/>
-          </a:xfrm>
-          <a:prstGeom prst="rect">
-            <a:avLst/>
-          </a:prstGeom>
-          <a:noFill/>
-          <a:ln>
-            <a:noFill/>
-          </a:ln>
-        </p:spPr>
-        <p:txBody>
-          <a:bodyPr wrap="square" lIns="0" tIns="0" rIns="0" bIns="0" rtlCol="0" anchor="ctr"/>
-          <a:lstStyle/>
-          <a:p>
-            <a:pPr algn="ctr">
-              <a:buNone/>
-            </a:pPr>
-            <a:r>
-              <a:rPr lang="zh-CN" sz="1100" b="1" dirty="0">
-                <a:solidFill>
-                  <a:srgbClr val="334155"/>
-                </a:solidFill>
-                <a:latin typeface="微软雅黑" panose="020B0503020204020204" pitchFamily="34" charset="-122"/>
-                <a:ea typeface="微软雅黑" panose="020B0503020204020204" pitchFamily="34" charset="-122"/>
-                <a:cs typeface="微软雅黑" panose="020B0503020204020204" pitchFamily="34" charset="-120"/>
-              </a:rPr>
-              <a:t>25%</a:t>
-            </a:r>
-          </a:p>
-        </p:txBody>
-      </p:sp>
-      <p:sp>
-        <p:nvSpPr>
-          <p:cNvPr id="19" name="Text 18"/>
-          <p:cNvSpPr/>
-          <p:nvPr/>
-        </p:nvSpPr>
-        <p:spPr>
-          <a:xfrm>
-            <a:off x="5029200" y="2432304"/>
-            <a:ext cx="1417320" cy="475488"/>
-          </a:xfrm>
-          <a:prstGeom prst="rect">
-            <a:avLst/>
-          </a:prstGeom>
-          <a:noFill/>
-          <a:ln>
-            <a:noFill/>
-          </a:ln>
-        </p:spPr>
-        <p:txBody>
-          <a:bodyPr wrap="square" lIns="0" tIns="0" rIns="0" bIns="0" rtlCol="0" anchor="ctr"/>
-          <a:lstStyle/>
-          <a:p>
-            <a:pPr algn="ctr">
-              <a:buNone/>
-            </a:pPr>
-            <a:r>
-              <a:rPr lang="zh-CN" sz="1300" b="1" dirty="0">
-                <a:solidFill>
-                  <a:srgbClr val="4F46E5"/>
-                </a:solidFill>
-                <a:latin typeface="微软雅黑" panose="020B0503020204020204" pitchFamily="34" charset="-122"/>
-                <a:ea typeface="微软雅黑" panose="020B0503020204020204" pitchFamily="34" charset="-122"/>
-                <a:cs typeface="微软雅黑" panose="020B0503020204020204" pitchFamily="34" charset="-120"/>
-              </a:rPr>
-              <a:t>90.7</a:t>
-            </a:r>
-          </a:p>
-        </p:txBody>
-      </p:sp>
-      <p:sp>
-        <p:nvSpPr>
-          <p:cNvPr id="20" name="Text 19"/>
-          <p:cNvSpPr/>
-          <p:nvPr/>
-        </p:nvSpPr>
-        <p:spPr>
-          <a:xfrm>
-            <a:off x="6492240" y="2432304"/>
-            <a:ext cx="1325880" cy="475488"/>
-          </a:xfrm>
-          <a:prstGeom prst="rect">
-            <a:avLst/>
-          </a:prstGeom>
-          <a:noFill/>
-          <a:ln>
-            <a:noFill/>
-          </a:ln>
-        </p:spPr>
-        <p:txBody>
-          <a:bodyPr wrap="square" lIns="0" tIns="0" rIns="0" bIns="0" rtlCol="0" anchor="ctr"/>
-          <a:lstStyle/>
-          <a:p>
-            <a:pPr algn="ctr">
-              <a:buNone/>
-            </a:pPr>
-            <a:r>
-              <a:rPr lang="zh-CN" sz="1300" b="1" dirty="0">
-                <a:solidFill>
-                  <a:srgbClr val="0EA5E9"/>
-                </a:solidFill>
-                <a:latin typeface="微软雅黑" panose="020B0503020204020204" pitchFamily="34" charset="-122"/>
-                <a:ea typeface="微软雅黑" panose="020B0503020204020204" pitchFamily="34" charset="-122"/>
-                <a:cs typeface="微软雅黑" panose="020B0503020204020204" pitchFamily="34" charset="-120"/>
-              </a:rPr>
-              <a:t>90.0</a:t>
-            </a:r>
-          </a:p>
-        </p:txBody>
-      </p:sp>
-      <p:sp>
-        <p:nvSpPr>
-          <p:cNvPr id="21" name="Shape 20"/>
-          <p:cNvSpPr/>
-          <p:nvPr/>
-        </p:nvSpPr>
-        <p:spPr>
-          <a:xfrm>
-            <a:off x="548640" y="2907792"/>
-            <a:ext cx="7406640" cy="0"/>
-          </a:xfrm>
-          <a:prstGeom prst="line">
-            <a:avLst/>
-          </a:prstGeom>
-          <a:noFill/>
-          <a:ln w="12700">
-            <a:solidFill>
-              <a:srgbClr val="E8EDF5"/>
-            </a:solidFill>
-            <a:prstDash val="solid"/>
-          </a:ln>
-        </p:spPr>
-      </p:sp>
-      <p:sp>
-        <p:nvSpPr>
-          <p:cNvPr id="22" name="Text 21"/>
-          <p:cNvSpPr/>
-          <p:nvPr/>
-        </p:nvSpPr>
-        <p:spPr>
-          <a:xfrm>
-            <a:off x="658368" y="2926080"/>
-            <a:ext cx="3017520" cy="438912"/>
-          </a:xfrm>
-          <a:prstGeom prst="rect">
-            <a:avLst/>
-          </a:prstGeom>
-          <a:noFill/>
-          <a:ln>
-            <a:noFill/>
-          </a:ln>
-        </p:spPr>
-        <p:txBody>
-          <a:bodyPr wrap="square" lIns="0" tIns="0" rIns="0" bIns="0" rtlCol="0" anchor="ctr"/>
-          <a:lstStyle/>
-          <a:p>
-            <a:pPr>
-              <a:lnSpc>
-                <a:spcPct val="110000"/>
-              </a:lnSpc>
-              <a:buNone/>
-            </a:pPr>
-            <a:r>
-              <a:rPr lang="zh-CN" sz="1100" b="1" dirty="0">
-                <a:solidFill>
-                  <a:srgbClr val="0F172A"/>
-                </a:solidFill>
-                <a:latin typeface="微软雅黑" panose="020B0503020204020204" pitchFamily="34" charset="-122"/>
-                <a:ea typeface="微软雅黑" panose="020B0503020204020204" pitchFamily="34" charset="-122"/>
-                <a:cs typeface="微软雅黑" panose="020B0503020204020204" pitchFamily="34" charset="-120"/>
-              </a:rPr>
-              <a:t>进度符合度　</a:t>
-            </a:r>
-            <a:r>
-              <a:rPr lang="zh-CN" sz="950" dirty="0">
-                <a:solidFill>
-                  <a:srgbClr val="64748B"/>
-                </a:solidFill>
-                <a:latin typeface="微软雅黑" panose="020B0503020204020204" pitchFamily="34" charset="-122"/>
-                <a:ea typeface="微软雅黑" panose="020B0503020204020204" pitchFamily="34" charset="-122"/>
-                <a:cs typeface="微软雅黑" panose="020B0503020204020204" pitchFamily="34" charset="-120"/>
-              </a:rPr>
-              <a:t>实际进度与计划的偏差、是否主动预警</a:t>
-            </a:r>
-          </a:p>
-        </p:txBody>
-      </p:sp>
-      <p:sp>
-        <p:nvSpPr>
-          <p:cNvPr id="23" name="Text 22"/>
-          <p:cNvSpPr/>
-          <p:nvPr/>
-        </p:nvSpPr>
-        <p:spPr>
-          <a:xfrm>
-            <a:off x="3749040" y="2907792"/>
-            <a:ext cx="1188720" cy="475488"/>
-          </a:xfrm>
-          <a:prstGeom prst="rect">
-            <a:avLst/>
-          </a:prstGeom>
-          <a:noFill/>
-          <a:ln>
-            <a:noFill/>
-          </a:ln>
-        </p:spPr>
-        <p:txBody>
-          <a:bodyPr wrap="square" lIns="0" tIns="0" rIns="0" bIns="0" rtlCol="0" anchor="ctr"/>
-          <a:lstStyle/>
-          <a:p>
-            <a:pPr algn="ctr">
-              <a:buNone/>
-            </a:pPr>
-            <a:r>
-              <a:rPr lang="zh-CN" sz="1100" b="1" dirty="0">
-                <a:solidFill>
-                  <a:srgbClr val="334155"/>
-                </a:solidFill>
-                <a:latin typeface="微软雅黑" panose="020B0503020204020204" pitchFamily="34" charset="-122"/>
-                <a:ea typeface="微软雅黑" panose="020B0503020204020204" pitchFamily="34" charset="-122"/>
-                <a:cs typeface="微软雅黑" panose="020B0503020204020204" pitchFamily="34" charset="-120"/>
-              </a:rPr>
-              <a:t>20%</a:t>
-            </a:r>
-          </a:p>
-        </p:txBody>
-      </p:sp>
-      <p:sp>
-        <p:nvSpPr>
-          <p:cNvPr id="24" name="Text 23"/>
-          <p:cNvSpPr/>
-          <p:nvPr/>
-        </p:nvSpPr>
-        <p:spPr>
-          <a:xfrm>
-            <a:off x="5029200" y="2907792"/>
-            <a:ext cx="1417320" cy="475488"/>
-          </a:xfrm>
-          <a:prstGeom prst="rect">
-            <a:avLst/>
-          </a:prstGeom>
-          <a:noFill/>
-          <a:ln>
-            <a:noFill/>
-          </a:ln>
-        </p:spPr>
-        <p:txBody>
-          <a:bodyPr wrap="square" lIns="0" tIns="0" rIns="0" bIns="0" rtlCol="0" anchor="ctr"/>
-          <a:lstStyle/>
-          <a:p>
-            <a:pPr algn="ctr">
-              <a:buNone/>
-            </a:pPr>
-            <a:r>
-              <a:rPr lang="zh-CN" sz="1300" b="1" dirty="0">
-                <a:solidFill>
-                  <a:srgbClr val="4F46E5"/>
-                </a:solidFill>
-                <a:latin typeface="微软雅黑" panose="020B0503020204020204" pitchFamily="34" charset="-122"/>
-                <a:ea typeface="微软雅黑" panose="020B0503020204020204" pitchFamily="34" charset="-122"/>
-                <a:cs typeface="微软雅黑" panose="020B0503020204020204" pitchFamily="34" charset="-120"/>
-              </a:rPr>
-              <a:t>89.3</a:t>
-            </a:r>
-          </a:p>
-        </p:txBody>
-      </p:sp>
-      <p:sp>
-        <p:nvSpPr>
-          <p:cNvPr id="25" name="Text 24"/>
-          <p:cNvSpPr/>
-          <p:nvPr/>
-        </p:nvSpPr>
-        <p:spPr>
-          <a:xfrm>
-            <a:off x="6492240" y="2907792"/>
-            <a:ext cx="1325880" cy="475488"/>
-          </a:xfrm>
-          <a:prstGeom prst="rect">
-            <a:avLst/>
-          </a:prstGeom>
-          <a:noFill/>
-          <a:ln>
-            <a:noFill/>
-          </a:ln>
-        </p:spPr>
-        <p:txBody>
-          <a:bodyPr wrap="square" lIns="0" tIns="0" rIns="0" bIns="0" rtlCol="0" anchor="ctr"/>
-          <a:lstStyle/>
-          <a:p>
-            <a:pPr algn="ctr">
-              <a:buNone/>
-            </a:pPr>
-            <a:r>
-              <a:rPr lang="zh-CN" sz="1300" b="1" dirty="0">
-                <a:solidFill>
-                  <a:srgbClr val="0EA5E9"/>
-                </a:solidFill>
-                <a:latin typeface="微软雅黑" panose="020B0503020204020204" pitchFamily="34" charset="-122"/>
-                <a:ea typeface="微软雅黑" panose="020B0503020204020204" pitchFamily="34" charset="-122"/>
-                <a:cs typeface="微软雅黑" panose="020B0503020204020204" pitchFamily="34" charset="-120"/>
-              </a:rPr>
-              <a:t>91.7</a:t>
-            </a:r>
-          </a:p>
-        </p:txBody>
-      </p:sp>
-      <p:sp>
-        <p:nvSpPr>
-          <p:cNvPr id="26" name="Shape 25"/>
-          <p:cNvSpPr/>
-          <p:nvPr/>
-        </p:nvSpPr>
-        <p:spPr>
-          <a:xfrm>
-            <a:off x="548640" y="3383280"/>
-            <a:ext cx="7406640" cy="0"/>
-          </a:xfrm>
-          <a:prstGeom prst="line">
-            <a:avLst/>
-          </a:prstGeom>
-          <a:noFill/>
-          <a:ln w="12700">
-            <a:solidFill>
-              <a:srgbClr val="E8EDF5"/>
-            </a:solidFill>
-            <a:prstDash val="solid"/>
-          </a:ln>
-        </p:spPr>
-      </p:sp>
-      <p:sp>
-        <p:nvSpPr>
-          <p:cNvPr id="27" name="RowBg 26"/>
-          <p:cNvSpPr/>
-          <p:nvPr/>
-        </p:nvSpPr>
-        <p:spPr>
-          <a:xfrm>
-            <a:off x="548640" y="3383280"/>
-            <a:ext cx="7406640" cy="475488"/>
-          </a:xfrm>
-          <a:prstGeom prst="rect">
-            <a:avLst/>
-          </a:prstGeom>
-          <a:solidFill>
-            <a:srgbClr val="F1F5F9"/>
-          </a:solidFill>
-          <a:ln>
-            <a:noFill/>
-          </a:ln>
-        </p:spPr>
-      </p:sp>
-      <p:sp>
-        <p:nvSpPr>
-          <p:cNvPr id="28" name="Text 27"/>
-          <p:cNvSpPr/>
-          <p:nvPr/>
-        </p:nvSpPr>
-        <p:spPr>
-          <a:xfrm>
-            <a:off x="658368" y="3401568"/>
-            <a:ext cx="3017520" cy="438912"/>
-          </a:xfrm>
-          <a:prstGeom prst="rect">
-            <a:avLst/>
-          </a:prstGeom>
-          <a:noFill/>
-          <a:ln>
-            <a:noFill/>
-          </a:ln>
-        </p:spPr>
-        <p:txBody>
-          <a:bodyPr wrap="square" lIns="0" tIns="0" rIns="0" bIns="0" rtlCol="0" anchor="ctr"/>
-          <a:lstStyle/>
-          <a:p>
-            <a:pPr>
-              <a:lnSpc>
-                <a:spcPct val="110000"/>
-              </a:lnSpc>
-              <a:buNone/>
-            </a:pPr>
-            <a:r>
-              <a:rPr lang="zh-CN" sz="1100" b="1" dirty="0">
-                <a:solidFill>
-                  <a:srgbClr val="0F172A"/>
-                </a:solidFill>
-                <a:latin typeface="微软雅黑" panose="020B0503020204020204" pitchFamily="34" charset="-122"/>
-                <a:ea typeface="微软雅黑" panose="020B0503020204020204" pitchFamily="34" charset="-122"/>
-                <a:cs typeface="微软雅黑" panose="020B0503020204020204" pitchFamily="34" charset="-120"/>
-              </a:rPr>
-              <a:t>协作与沟通　</a:t>
-            </a:r>
-            <a:r>
-              <a:rPr lang="zh-CN" sz="950" dirty="0">
-                <a:solidFill>
-                  <a:srgbClr val="64748B"/>
-                </a:solidFill>
-                <a:latin typeface="微软雅黑" panose="020B0503020204020204" pitchFamily="34" charset="-122"/>
-                <a:ea typeface="微软雅黑" panose="020B0503020204020204" pitchFamily="34" charset="-122"/>
-                <a:cs typeface="微软雅黑" panose="020B0503020204020204" pitchFamily="34" charset="-120"/>
-              </a:rPr>
-              <a:t>例会参与、记录质量、配合他人任务</a:t>
-            </a:r>
-          </a:p>
-        </p:txBody>
-      </p:sp>
-      <p:sp>
-        <p:nvSpPr>
-          <p:cNvPr id="29" name="Text 28"/>
-          <p:cNvSpPr/>
-          <p:nvPr/>
-        </p:nvSpPr>
-        <p:spPr>
-          <a:xfrm>
-            <a:off x="3749040" y="3383280"/>
-            <a:ext cx="1188720" cy="475488"/>
-          </a:xfrm>
-          <a:prstGeom prst="rect">
-            <a:avLst/>
-          </a:prstGeom>
-          <a:noFill/>
-          <a:ln>
-            <a:noFill/>
-          </a:ln>
-        </p:spPr>
-        <p:txBody>
-          <a:bodyPr wrap="square" lIns="0" tIns="0" rIns="0" bIns="0" rtlCol="0" anchor="ctr"/>
-          <a:lstStyle/>
-          <a:p>
-            <a:pPr algn="ctr">
-              <a:buNone/>
-            </a:pPr>
-            <a:r>
-              <a:rPr lang="zh-CN" sz="1100" b="1" dirty="0">
-                <a:solidFill>
-                  <a:srgbClr val="334155"/>
-                </a:solidFill>
-                <a:latin typeface="微软雅黑" panose="020B0503020204020204" pitchFamily="34" charset="-122"/>
-                <a:ea typeface="微软雅黑" panose="020B0503020204020204" pitchFamily="34" charset="-122"/>
-                <a:cs typeface="微软雅黑" panose="020B0503020204020204" pitchFamily="34" charset="-120"/>
-              </a:rPr>
-              <a:t>15%</a:t>
-            </a:r>
-          </a:p>
-        </p:txBody>
-      </p:sp>
-      <p:sp>
-        <p:nvSpPr>
-          <p:cNvPr id="30" name="Text 29"/>
-          <p:cNvSpPr/>
-          <p:nvPr/>
-        </p:nvSpPr>
-        <p:spPr>
-          <a:xfrm>
-            <a:off x="5029200" y="3383280"/>
-            <a:ext cx="1417320" cy="475488"/>
-          </a:xfrm>
-          <a:prstGeom prst="rect">
-            <a:avLst/>
-          </a:prstGeom>
-          <a:noFill/>
-          <a:ln>
-            <a:noFill/>
-          </a:ln>
-        </p:spPr>
-        <p:txBody>
-          <a:bodyPr wrap="square" lIns="0" tIns="0" rIns="0" bIns="0" rtlCol="0" anchor="ctr"/>
-          <a:lstStyle/>
-          <a:p>
-            <a:pPr algn="ctr">
-              <a:buNone/>
-            </a:pPr>
-            <a:r>
-              <a:rPr lang="zh-CN" sz="1300" b="1" dirty="0">
-                <a:solidFill>
-                  <a:srgbClr val="4F46E5"/>
-                </a:solidFill>
-                <a:latin typeface="微软雅黑" panose="020B0503020204020204" pitchFamily="34" charset="-122"/>
-                <a:ea typeface="微软雅黑" panose="020B0503020204020204" pitchFamily="34" charset="-122"/>
-                <a:cs typeface="微软雅黑" panose="020B0503020204020204" pitchFamily="34" charset="-120"/>
-              </a:rPr>
-              <a:t>90.0</a:t>
-            </a:r>
-          </a:p>
-        </p:txBody>
-      </p:sp>
-      <p:sp>
-        <p:nvSpPr>
-          <p:cNvPr id="31" name="Text 30"/>
-          <p:cNvSpPr/>
-          <p:nvPr/>
-        </p:nvSpPr>
-        <p:spPr>
-          <a:xfrm>
-            <a:off x="6492240" y="3383280"/>
-            <a:ext cx="1325880" cy="475488"/>
-          </a:xfrm>
-          <a:prstGeom prst="rect">
-            <a:avLst/>
-          </a:prstGeom>
-          <a:noFill/>
-          <a:ln>
-            <a:noFill/>
-          </a:ln>
-        </p:spPr>
-        <p:txBody>
-          <a:bodyPr wrap="square" lIns="0" tIns="0" rIns="0" bIns="0" rtlCol="0" anchor="ctr"/>
-          <a:lstStyle/>
-          <a:p>
-            <a:pPr algn="ctr">
-              <a:buNone/>
-            </a:pPr>
-            <a:r>
-              <a:rPr lang="zh-CN" sz="1300" b="1" dirty="0">
-                <a:solidFill>
-                  <a:srgbClr val="0EA5E9"/>
-                </a:solidFill>
-                <a:latin typeface="微软雅黑" panose="020B0503020204020204" pitchFamily="34" charset="-122"/>
-                <a:ea typeface="微软雅黑" panose="020B0503020204020204" pitchFamily="34" charset="-122"/>
-                <a:cs typeface="微软雅黑" panose="020B0503020204020204" pitchFamily="34" charset="-120"/>
-              </a:rPr>
-              <a:t>94.0</a:t>
-            </a:r>
-          </a:p>
-        </p:txBody>
-      </p:sp>
-      <p:sp>
-        <p:nvSpPr>
-          <p:cNvPr id="32" name="Shape 31"/>
-          <p:cNvSpPr/>
-          <p:nvPr/>
-        </p:nvSpPr>
-        <p:spPr>
-          <a:xfrm>
-            <a:off x="548640" y="3858768"/>
-            <a:ext cx="7406640" cy="0"/>
-          </a:xfrm>
-          <a:prstGeom prst="line">
-            <a:avLst/>
-          </a:prstGeom>
-          <a:noFill/>
-          <a:ln w="12700">
-            <a:solidFill>
-              <a:srgbClr val="E8EDF5"/>
-            </a:solidFill>
-            <a:prstDash val="solid"/>
-          </a:ln>
-        </p:spPr>
-      </p:sp>
-      <p:sp>
-        <p:nvSpPr>
-          <p:cNvPr id="33" name="TotBg 32"/>
-          <p:cNvSpPr/>
-          <p:nvPr/>
-        </p:nvSpPr>
-        <p:spPr>
-          <a:xfrm>
-            <a:off x="548640" y="3858768"/>
-            <a:ext cx="7406640" cy="475488"/>
-          </a:xfrm>
-          <a:prstGeom prst="rect">
-            <a:avLst/>
-          </a:prstGeom>
-          <a:solidFill>
-            <a:srgbClr val="EEF2FF"/>
-          </a:solidFill>
-          <a:ln>
-            <a:noFill/>
-          </a:ln>
-        </p:spPr>
-      </p:sp>
-      <p:sp>
-        <p:nvSpPr>
-          <p:cNvPr id="34" name="Text 33"/>
-          <p:cNvSpPr/>
-          <p:nvPr/>
-        </p:nvSpPr>
-        <p:spPr>
-          <a:xfrm>
-            <a:off x="658368" y="3858768"/>
-            <a:ext cx="3017520" cy="475488"/>
-          </a:xfrm>
-          <a:prstGeom prst="rect">
-            <a:avLst/>
-          </a:prstGeom>
-          <a:noFill/>
-          <a:ln>
-            <a:noFill/>
-          </a:ln>
-        </p:spPr>
-        <p:txBody>
-          <a:bodyPr wrap="square" lIns="0" tIns="0" rIns="0" bIns="0" rtlCol="0" anchor="ctr"/>
-          <a:lstStyle/>
-          <a:p>
-            <a:pPr>
-              <a:buNone/>
-            </a:pPr>
-            <a:r>
-              <a:rPr lang="zh-CN" sz="1150" b="1" dirty="0">
-                <a:solidFill>
-                  <a:srgbClr val="0F172A"/>
-                </a:solidFill>
-                <a:latin typeface="微软雅黑" panose="020B0503020204020204" pitchFamily="34" charset="-122"/>
-                <a:ea typeface="微软雅黑" panose="020B0503020204020204" pitchFamily="34" charset="-122"/>
-                <a:cs typeface="微软雅黑" panose="020B0503020204020204" pitchFamily="34" charset="-120"/>
-              </a:rPr>
-              <a:t>加权总分</a:t>
-            </a:r>
-          </a:p>
-        </p:txBody>
-      </p:sp>
-      <p:sp>
-        <p:nvSpPr>
-          <p:cNvPr id="35" name="Text 34"/>
-          <p:cNvSpPr/>
-          <p:nvPr/>
-        </p:nvSpPr>
-        <p:spPr>
-          <a:xfrm>
-            <a:off x="3749040" y="3858768"/>
-            <a:ext cx="1188720" cy="475488"/>
-          </a:xfrm>
-          <a:prstGeom prst="rect">
-            <a:avLst/>
-          </a:prstGeom>
-          <a:noFill/>
-          <a:ln>
-            <a:noFill/>
-          </a:ln>
-        </p:spPr>
-        <p:txBody>
-          <a:bodyPr wrap="square" lIns="0" tIns="0" rIns="0" bIns="0" rtlCol="0" anchor="ctr"/>
-          <a:lstStyle/>
-          <a:p>
-            <a:pPr algn="ctr">
-              <a:buNone/>
-            </a:pPr>
-            <a:r>
-              <a:rPr lang="zh-CN" sz="1150" b="1" dirty="0">
-                <a:solidFill>
-                  <a:srgbClr val="0F172A"/>
-                </a:solidFill>
-                <a:latin typeface="微软雅黑" panose="020B0503020204020204" pitchFamily="34" charset="-122"/>
-                <a:ea typeface="微软雅黑" panose="020B0503020204020204" pitchFamily="34" charset="-122"/>
-                <a:cs typeface="微软雅黑" panose="020B0503020204020204" pitchFamily="34" charset="-120"/>
-              </a:rPr>
-              <a:t>100%</a:t>
-            </a:r>
-          </a:p>
-        </p:txBody>
-      </p:sp>
-      <p:sp>
-        <p:nvSpPr>
-          <p:cNvPr id="36" name="Text 35"/>
-          <p:cNvSpPr/>
-          <p:nvPr/>
-        </p:nvSpPr>
-        <p:spPr>
-          <a:xfrm>
-            <a:off x="5029200" y="3858768"/>
-            <a:ext cx="1417320" cy="475488"/>
-          </a:xfrm>
-          <a:prstGeom prst="rect">
-            <a:avLst/>
-          </a:prstGeom>
-          <a:noFill/>
-          <a:ln>
-            <a:noFill/>
-          </a:ln>
-        </p:spPr>
-        <p:txBody>
-          <a:bodyPr wrap="square" lIns="0" tIns="0" rIns="0" bIns="0" rtlCol="0" anchor="ctr"/>
-          <a:lstStyle/>
-          <a:p>
-            <a:pPr algn="ctr">
-              <a:buNone/>
-            </a:pPr>
-            <a:r>
-              <a:rPr lang="zh-CN" sz="1500" b="1" dirty="0">
-                <a:solidFill>
-                  <a:srgbClr val="4F46E5"/>
-                </a:solidFill>
-                <a:latin typeface="微软雅黑" panose="020B0503020204020204" pitchFamily="34" charset="-122"/>
-                <a:ea typeface="微软雅黑" panose="020B0503020204020204" pitchFamily="34" charset="-122"/>
-                <a:cs typeface="微软雅黑" panose="020B0503020204020204" pitchFamily="34" charset="-120"/>
-              </a:rPr>
-              <a:t>90.1</a:t>
-            </a:r>
-          </a:p>
-        </p:txBody>
-      </p:sp>
-      <p:sp>
-        <p:nvSpPr>
-          <p:cNvPr id="37" name="Text 36"/>
-          <p:cNvSpPr/>
-          <p:nvPr/>
-        </p:nvSpPr>
-        <p:spPr>
-          <a:xfrm>
-            <a:off x="6492240" y="3858768"/>
-            <a:ext cx="1325880" cy="475488"/>
-          </a:xfrm>
-          <a:prstGeom prst="rect">
-            <a:avLst/>
-          </a:prstGeom>
-          <a:noFill/>
-          <a:ln>
-            <a:noFill/>
-          </a:ln>
-        </p:spPr>
-        <p:txBody>
-          <a:bodyPr wrap="square" lIns="0" tIns="0" rIns="0" bIns="0" rtlCol="0" anchor="ctr"/>
-          <a:lstStyle/>
-          <a:p>
-            <a:pPr algn="ctr">
-              <a:buNone/>
-            </a:pPr>
-            <a:r>
-              <a:rPr lang="zh-CN" sz="1500" b="1" dirty="0">
-                <a:solidFill>
-                  <a:srgbClr val="0EA5E9"/>
-                </a:solidFill>
-                <a:latin typeface="微软雅黑" panose="020B0503020204020204" pitchFamily="34" charset="-122"/>
-                <a:ea typeface="微软雅黑" panose="020B0503020204020204" pitchFamily="34" charset="-122"/>
-                <a:cs typeface="微软雅黑" panose="020B0503020204020204" pitchFamily="34" charset="-120"/>
-              </a:rPr>
-              <a:t>91.2</a:t>
-            </a:r>
-          </a:p>
-        </p:txBody>
-      </p:sp>
-      <p:sp>
-        <p:nvSpPr>
-          <p:cNvPr id="38" name="GradeBg 37"/>
-          <p:cNvSpPr/>
-          <p:nvPr/>
-        </p:nvSpPr>
-        <p:spPr>
-          <a:xfrm>
-            <a:off x="548640" y="4334256"/>
-            <a:ext cx="7406640" cy="475488"/>
-          </a:xfrm>
-          <a:prstGeom prst="rect">
-            <a:avLst/>
-          </a:prstGeom>
-          <a:solidFill>
-            <a:srgbClr val="E8EDF5"/>
-          </a:solidFill>
-          <a:ln>
-            <a:noFill/>
-          </a:ln>
-        </p:spPr>
-      </p:sp>
-      <p:sp>
-        <p:nvSpPr>
-          <p:cNvPr id="39" name="Text 38"/>
-          <p:cNvSpPr/>
-          <p:nvPr/>
-        </p:nvSpPr>
-        <p:spPr>
-          <a:xfrm>
-            <a:off x="658368" y="4334256"/>
-            <a:ext cx="3017520" cy="475488"/>
-          </a:xfrm>
-          <a:prstGeom prst="rect">
-            <a:avLst/>
-          </a:prstGeom>
-          <a:noFill/>
-          <a:ln>
-            <a:noFill/>
-          </a:ln>
-        </p:spPr>
-        <p:txBody>
-          <a:bodyPr wrap="square" lIns="0" tIns="0" rIns="0" bIns="0" rtlCol="0" anchor="ctr"/>
-          <a:lstStyle/>
-          <a:p>
-            <a:pPr>
-              <a:buNone/>
-            </a:pPr>
-            <a:r>
-              <a:rPr lang="zh-CN" sz="1050" b="1" dirty="0">
-                <a:solidFill>
-                  <a:srgbClr val="0F172A"/>
-                </a:solidFill>
-                <a:latin typeface="微软雅黑" panose="020B0503020204020204" pitchFamily="34" charset="-122"/>
-                <a:ea typeface="微软雅黑" panose="020B0503020204020204" pitchFamily="34" charset="-122"/>
-                <a:cs typeface="微软雅黑" panose="020B0503020204020204" pitchFamily="34" charset="-120"/>
-              </a:rPr>
-              <a:t>评价等级（≥90 为优秀）</a:t>
-            </a:r>
-          </a:p>
-        </p:txBody>
-      </p:sp>
-      <p:sp>
-        <p:nvSpPr>
-          <p:cNvPr id="40" name="Text 39"/>
-          <p:cNvSpPr/>
-          <p:nvPr/>
-        </p:nvSpPr>
-        <p:spPr>
-          <a:xfrm>
-            <a:off x="3749040" y="4334256"/>
-            <a:ext cx="1188720" cy="475488"/>
-          </a:xfrm>
-          <a:prstGeom prst="rect">
-            <a:avLst/>
-          </a:prstGeom>
-          <a:noFill/>
-          <a:ln>
-            <a:noFill/>
-          </a:ln>
-        </p:spPr>
-        <p:txBody>
-          <a:bodyPr wrap="square" lIns="0" tIns="0" rIns="0" bIns="0" rtlCol="0" anchor="ctr"/>
-          <a:lstStyle/>
-          <a:p>
-            <a:pPr algn="ctr">
-              <a:buNone/>
-            </a:pPr>
-            <a:r>
-              <a:rPr lang="zh-CN" sz="1100" dirty="0">
-                <a:solidFill>
-                  <a:srgbClr val="64748B"/>
-                </a:solidFill>
-                <a:latin typeface="微软雅黑" panose="020B0503020204020204" pitchFamily="34" charset="-122"/>
-                <a:ea typeface="微软雅黑" panose="020B0503020204020204" pitchFamily="34" charset="-122"/>
-                <a:cs typeface="微软雅黑" panose="020B0503020204020204" pitchFamily="34" charset="-120"/>
-              </a:rPr>
-              <a:t>—</a:t>
-            </a:r>
-          </a:p>
-        </p:txBody>
-      </p:sp>
-      <p:sp>
-        <p:nvSpPr>
-          <p:cNvPr id="41" name="Text 40"/>
-          <p:cNvSpPr/>
-          <p:nvPr/>
-        </p:nvSpPr>
-        <p:spPr>
-          <a:xfrm>
-            <a:off x="5029200" y="4334256"/>
-            <a:ext cx="1417320" cy="475488"/>
-          </a:xfrm>
-          <a:prstGeom prst="rect">
-            <a:avLst/>
-          </a:prstGeom>
-          <a:noFill/>
-          <a:ln>
-            <a:noFill/>
-          </a:ln>
-        </p:spPr>
-        <p:txBody>
-          <a:bodyPr wrap="square" lIns="0" tIns="0" rIns="0" bIns="0" rtlCol="0" anchor="ctr"/>
-          <a:lstStyle/>
-          <a:p>
-            <a:pPr algn="ctr">
-              <a:buNone/>
-            </a:pPr>
-            <a:r>
-              <a:rPr lang="zh-CN" sz="1200" b="1" dirty="0">
-                <a:solidFill>
-                  <a:srgbClr val="059669"/>
-                </a:solidFill>
-                <a:latin typeface="微软雅黑" panose="020B0503020204020204" pitchFamily="34" charset="-122"/>
-                <a:ea typeface="微软雅黑" panose="020B0503020204020204" pitchFamily="34" charset="-122"/>
-                <a:cs typeface="微软雅黑" panose="020B0503020204020204" pitchFamily="34" charset="-120"/>
-              </a:rPr>
-              <a:t>优秀</a:t>
-            </a:r>
-          </a:p>
-        </p:txBody>
-      </p:sp>
-      <p:sp>
-        <p:nvSpPr>
-          <p:cNvPr id="42" name="Text 41"/>
-          <p:cNvSpPr/>
-          <p:nvPr/>
-        </p:nvSpPr>
-        <p:spPr>
-          <a:xfrm>
-            <a:off x="6492240" y="4334256"/>
-            <a:ext cx="1325880" cy="475488"/>
-          </a:xfrm>
-          <a:prstGeom prst="rect">
-            <a:avLst/>
-          </a:prstGeom>
-          <a:noFill/>
-          <a:ln>
-            <a:noFill/>
-          </a:ln>
-        </p:spPr>
-        <p:txBody>
-          <a:bodyPr wrap="square" lIns="0" tIns="0" rIns="0" bIns="0" rtlCol="0" anchor="ctr"/>
-          <a:lstStyle/>
-          <a:p>
-            <a:pPr algn="ctr">
-              <a:buNone/>
-            </a:pPr>
-            <a:r>
-              <a:rPr lang="zh-CN" sz="1200" b="1" dirty="0">
-                <a:solidFill>
-                  <a:srgbClr val="059669"/>
-                </a:solidFill>
-                <a:latin typeface="微软雅黑" panose="020B0503020204020204" pitchFamily="34" charset="-122"/>
-                <a:ea typeface="微软雅黑" panose="020B0503020204020204" pitchFamily="34" charset="-122"/>
-                <a:cs typeface="微软雅黑" panose="020B0503020204020204" pitchFamily="34" charset="-120"/>
-              </a:rPr>
-              <a:t>优秀</a:t>
-            </a:r>
-          </a:p>
-        </p:txBody>
-      </p:sp>
-      <p:sp>
-        <p:nvSpPr>
-          <p:cNvPr id="43" name="Shape 42"/>
-          <p:cNvSpPr/>
-          <p:nvPr/>
-        </p:nvSpPr>
-        <p:spPr>
-          <a:xfrm>
-            <a:off x="8183880" y="1572768"/>
-            <a:ext cx="3429000" cy="2103120"/>
-          </a:xfrm>
-          <a:prstGeom prst="roundRect">
-            <a:avLst>
-              <a:gd name="adj" fmla="val 6086"/>
-            </a:avLst>
-          </a:prstGeom>
-          <a:solidFill>
-            <a:srgbClr val="EEF2FF"/>
-          </a:solidFill>
-          <a:ln w="12700">
-            <a:solidFill>
-              <a:srgbClr val="C7D2FE"/>
-            </a:solidFill>
-            <a:prstDash val="solid"/>
-          </a:ln>
-          <a:effectLst>
-            <a:outerShdw blurRad="127000" dist="38100" dir="5400000" algn="bl" rotWithShape="0">
-              <a:srgbClr val="0F172A">
-                <a:alpha val="6000"/>
-              </a:srgbClr>
-            </a:outerShdw>
-          </a:effectLst>
-        </p:spPr>
-      </p:sp>
-      <p:sp>
-        <p:nvSpPr>
-          <p:cNvPr id="44" name="Text 43"/>
-          <p:cNvSpPr/>
-          <p:nvPr/>
-        </p:nvSpPr>
-        <p:spPr>
-          <a:xfrm>
-            <a:off x="8366760" y="1682496"/>
-            <a:ext cx="3063240" cy="365760"/>
-          </a:xfrm>
-          <a:prstGeom prst="rect">
-            <a:avLst/>
-          </a:prstGeom>
-          <a:noFill/>
-          <a:ln>
-            <a:noFill/>
-          </a:ln>
-        </p:spPr>
-        <p:txBody>
-          <a:bodyPr wrap="square" lIns="0" tIns="0" rIns="0" bIns="0" rtlCol="0" anchor="ctr"/>
-          <a:lstStyle/>
-          <a:p>
-            <a:pPr>
-              <a:buNone/>
-            </a:pPr>
-            <a:r>
-              <a:rPr lang="zh-CN" sz="1400" b="1" dirty="0">
-                <a:solidFill>
-                  <a:srgbClr val="4F46E5"/>
-                </a:solidFill>
-                <a:latin typeface="微软雅黑" panose="020B0503020204020204" pitchFamily="34" charset="-122"/>
-                <a:ea typeface="微软雅黑" panose="020B0503020204020204" pitchFamily="34" charset="-122"/>
-                <a:cs typeface="微软雅黑" panose="020B0503020204020204" pitchFamily="34" charset="-120"/>
-              </a:rPr>
-              <a:t>评价值来源</a:t>
-            </a:r>
-          </a:p>
-        </p:txBody>
-      </p:sp>
-      <p:sp>
-        <p:nvSpPr>
-          <p:cNvPr id="45" name="Text 44"/>
-          <p:cNvSpPr/>
-          <p:nvPr/>
-        </p:nvSpPr>
-        <p:spPr>
-          <a:xfrm>
-            <a:off x="8366760" y="2103120"/>
-            <a:ext cx="3063240" cy="1463040"/>
+        <p:txBody>
+          <a:bodyPr/>
+          <a:p/>
+        </p:txBody>
+      </p:sp>
+      <p:sp>
+        <p:nvSpPr>
+          <p:cNvPr id="6" name="Text 5"/>
+          <p:cNvSpPr/>
+          <p:nvPr/>
+        </p:nvSpPr>
+        <p:spPr>
+          <a:xfrm>
+            <a:off x="914400" y="1874520"/>
+            <a:ext cx="10332720" cy="4114800"/>
           </a:xfrm>
           <a:prstGeom prst="rect">
             <a:avLst/>
@@ -21125,17 +22576,28 @@
           <a:bodyPr wrap="square" lIns="0" tIns="0" rIns="0" bIns="0" rtlCol="0" anchor="t"/>
           <a:lstStyle/>
           <a:p>
-            <a:pPr>
+            <a:pPr marL="457200" indent="-457200">
               <a:lnSpc>
                 <a:spcPct val="130000"/>
               </a:lnSpc>
               <a:spcAft>
-                <a:spcPts val="600"/>
+                <a:spcPts val="900"/>
               </a:spcAft>
               <a:buNone/>
             </a:pPr>
             <a:r>
-              <a:rPr lang="zh-CN" sz="1050" dirty="0">
+              <a:rPr lang="zh-CN" sz="1150" b="1" dirty="0">
+                <a:solidFill>
+                  <a:srgbClr val="4F46E5"/>
+                </a:solidFill>
+                <a:latin typeface="微软雅黑" panose="020B0503020204020204" pitchFamily="34" charset="-122"/>
+                <a:ea typeface="微软雅黑" panose="020B0503020204020204" pitchFamily="34" charset="-122"/>
+                <a:cs typeface="微软雅黑" panose="020B0503020204020204" pitchFamily="34" charset="-120"/>
+              </a:rPr>
+              <a:t>[1] </a:t>
+            </a:r>
+            <a:r>
+              <a:rPr lang="zh-CN" sz="1150" dirty="0">
                 <a:solidFill>
                   <a:srgbClr val="334155"/>
                 </a:solidFill>
@@ -21143,21 +22605,32 @@
                 <a:ea typeface="微软雅黑" panose="020B0503020204020204" pitchFamily="34" charset="-122"/>
                 <a:cs typeface="微软雅黑" panose="020B0503020204020204" pitchFamily="34" charset="-120"/>
               </a:rPr>
-              <a:t>自评 20%　+　互评 40%　+　指导教师 40%</a:t>
-            </a:r>
-          </a:p>
-          <a:p>
-            <a:pPr>
+              <a:t>国家邮政局. 2024年邮政行业发展统计公报[R]. 北京: 国家邮政局, 2025.</a:t>
+            </a:r>
+          </a:p>
+          <a:p>
+            <a:pPr marL="457200" indent="-457200">
               <a:lnSpc>
                 <a:spcPct val="130000"/>
               </a:lnSpc>
               <a:spcAft>
-                <a:spcPts val="600"/>
+                <a:spcPts val="900"/>
               </a:spcAft>
               <a:buNone/>
             </a:pPr>
             <a:r>
-              <a:rPr lang="zh-CN" sz="1050" dirty="0">
+              <a:rPr lang="zh-CN" sz="1150" b="1" dirty="0">
+                <a:solidFill>
+                  <a:srgbClr val="4F46E5"/>
+                </a:solidFill>
+                <a:latin typeface="微软雅黑" panose="020B0503020204020204" pitchFamily="34" charset="-122"/>
+                <a:ea typeface="微软雅黑" panose="020B0503020204020204" pitchFamily="34" charset="-122"/>
+                <a:cs typeface="微软雅黑" panose="020B0503020204020204" pitchFamily="34" charset="-120"/>
+              </a:rPr>
+              <a:t>[2] </a:t>
+            </a:r>
+            <a:r>
+              <a:rPr lang="zh-CN" sz="1150" dirty="0">
                 <a:solidFill>
                   <a:srgbClr val="334155"/>
                 </a:solidFill>
@@ -21165,160 +22638,65 @@
                 <a:ea typeface="微软雅黑" panose="020B0503020204020204" pitchFamily="34" charset="-122"/>
                 <a:cs typeface="微软雅黑" panose="020B0503020204020204" pitchFamily="34" charset="-120"/>
               </a:rPr>
-              <a:t>覆盖 M1–M3 三个里程碑，每次评审后 3 日内完成</a:t>
-            </a:r>
-          </a:p>
-          <a:p>
-            <a:pPr>
-              <a:lnSpc>
-                <a:spcPct val="130000"/>
-              </a:lnSpc>
-              <a:buNone/>
-            </a:pPr>
-            <a:r>
-              <a:rPr lang="zh-CN" sz="1050" dirty="0">
-                <a:solidFill>
-                  <a:srgbClr val="334155"/>
-                </a:solidFill>
-                <a:latin typeface="微软雅黑" panose="020B0503020204020204" pitchFamily="34" charset="-122"/>
-                <a:ea typeface="微软雅黑" panose="020B0503020204020204" pitchFamily="34" charset="-122"/>
-                <a:cs typeface="微软雅黑" panose="020B0503020204020204" pitchFamily="34" charset="-120"/>
-              </a:rPr>
-              <a:t>结果在组内公开，作为任务分配调整依据</a:t>
-            </a:r>
-          </a:p>
-        </p:txBody>
-      </p:sp>
-      <p:sp>
-        <p:nvSpPr>
-          <p:cNvPr id="46" name="Shape 45"/>
-          <p:cNvSpPr/>
-          <p:nvPr/>
-        </p:nvSpPr>
-        <p:spPr>
-          <a:xfrm>
-            <a:off x="8183880" y="3840480"/>
-            <a:ext cx="3429000" cy="1810512"/>
-          </a:xfrm>
-          <a:prstGeom prst="roundRect">
-            <a:avLst>
-              <a:gd name="adj" fmla="val 7070"/>
-            </a:avLst>
-          </a:prstGeom>
-          <a:solidFill>
-            <a:srgbClr val="ECFDF5"/>
-          </a:solidFill>
-          <a:ln w="12700">
-            <a:solidFill>
-              <a:srgbClr val="A7F3D0"/>
-            </a:solidFill>
-            <a:prstDash val="solid"/>
-          </a:ln>
-          <a:effectLst>
-            <a:outerShdw blurRad="127000" dist="38100" dir="5400000" algn="bl" rotWithShape="0">
-              <a:srgbClr val="0F172A">
-                <a:alpha val="6000"/>
-              </a:srgbClr>
-            </a:outerShdw>
-          </a:effectLst>
-        </p:spPr>
-      </p:sp>
-      <p:sp>
-        <p:nvSpPr>
-          <p:cNvPr id="47" name="Text 46"/>
-          <p:cNvSpPr/>
-          <p:nvPr/>
-        </p:nvSpPr>
-        <p:spPr>
-          <a:xfrm>
-            <a:off x="8366760" y="3950208"/>
-            <a:ext cx="3063240" cy="365760"/>
-          </a:xfrm>
-          <a:prstGeom prst="rect">
-            <a:avLst/>
-          </a:prstGeom>
-          <a:noFill/>
-          <a:ln>
-            <a:noFill/>
-          </a:ln>
-        </p:spPr>
-        <p:txBody>
-          <a:bodyPr wrap="square" lIns="0" tIns="0" rIns="0" bIns="0" rtlCol="0" anchor="ctr"/>
-          <a:lstStyle/>
-          <a:p>
-            <a:pPr>
-              <a:buNone/>
-            </a:pPr>
-            <a:r>
-              <a:rPr lang="zh-CN" sz="1400" b="1" dirty="0">
-                <a:solidFill>
-                  <a:srgbClr val="059669"/>
-                </a:solidFill>
-                <a:latin typeface="微软雅黑" panose="020B0503020204020204" pitchFamily="34" charset="-122"/>
-                <a:ea typeface="微软雅黑" panose="020B0503020204020204" pitchFamily="34" charset="-122"/>
-                <a:cs typeface="微软雅黑" panose="020B0503020204020204" pitchFamily="34" charset="-120"/>
-              </a:rPr>
-              <a:t>结论</a:t>
-            </a:r>
-          </a:p>
-        </p:txBody>
-      </p:sp>
-      <p:sp>
-        <p:nvSpPr>
-          <p:cNvPr id="48" name="Text 47"/>
-          <p:cNvSpPr/>
-          <p:nvPr/>
-        </p:nvSpPr>
-        <p:spPr>
-          <a:xfrm>
-            <a:off x="8366760" y="4370832"/>
-            <a:ext cx="3063240" cy="1691640"/>
-          </a:xfrm>
-          <a:prstGeom prst="rect">
-            <a:avLst/>
-          </a:prstGeom>
-          <a:noFill/>
-          <a:ln>
-            <a:noFill/>
-          </a:ln>
-        </p:spPr>
-        <p:txBody>
-          <a:bodyPr wrap="square" lIns="0" tIns="0" rIns="0" bIns="0" rtlCol="0" anchor="t"/>
-          <a:lstStyle/>
-          <a:p>
-            <a:pPr>
+              <a:t>微信开放文档. 小程序开发指南[EB/OL]. https://developers.weixin.qq.com/miniprogram/dev/framework/</a:t>
+            </a:r>
+          </a:p>
+          <a:p>
+            <a:pPr marL="457200" indent="-457200">
               <a:lnSpc>
                 <a:spcPct val="130000"/>
               </a:lnSpc>
               <a:spcAft>
-                <a:spcPts val="600"/>
+                <a:spcPts val="900"/>
               </a:spcAft>
               <a:buNone/>
             </a:pPr>
             <a:r>
-              <a:rPr lang="zh-CN" sz="1050" b="1" dirty="0">
-                <a:solidFill>
-                  <a:srgbClr val="0F172A"/>
-                </a:solidFill>
-                <a:latin typeface="微软雅黑" panose="020B0503020204020204" pitchFamily="34" charset="-122"/>
-                <a:ea typeface="微软雅黑" panose="020B0503020204020204" pitchFamily="34" charset="-122"/>
-                <a:cs typeface="微软雅黑" panose="020B0503020204020204" pitchFamily="34" charset="-120"/>
-              </a:rPr>
-              <a:t>两人加权总分 90.1 / 91.2，均达“优秀”</a:t>
-            </a:r>
-          </a:p>
-          <a:p>
-            <a:pPr>
+              <a:rPr lang="zh-CN" sz="1150" b="1" dirty="0">
+                <a:solidFill>
+                  <a:srgbClr val="4F46E5"/>
+                </a:solidFill>
+                <a:latin typeface="微软雅黑" panose="020B0503020204020204" pitchFamily="34" charset="-122"/>
+                <a:ea typeface="微软雅黑" panose="020B0503020204020204" pitchFamily="34" charset="-122"/>
+                <a:cs typeface="微软雅黑" panose="020B0503020204020204" pitchFamily="34" charset="-120"/>
+              </a:rPr>
+              <a:t>[3] </a:t>
+            </a:r>
+            <a:r>
+              <a:rPr lang="zh-CN" sz="1150" dirty="0">
+                <a:solidFill>
+                  <a:srgbClr val="334155"/>
+                </a:solidFill>
+                <a:latin typeface="微软雅黑" panose="020B0503020204020204" pitchFamily="34" charset="-122"/>
+                <a:ea typeface="微软雅黑" panose="020B0503020204020204" pitchFamily="34" charset="-122"/>
+                <a:cs typeface="微软雅黑" panose="020B0503020204020204" pitchFamily="34" charset="-120"/>
+              </a:rPr>
+              <a:t>微信开放社区. 微信小程序平台运营规范[EB/OL]. https://developers.weixin.qq.com/community/operate</a:t>
+            </a:r>
+          </a:p>
+          <a:p>
+            <a:pPr marL="457200" indent="-457200">
               <a:lnSpc>
                 <a:spcPct val="130000"/>
               </a:lnSpc>
               <a:spcAft>
-                <a:spcPts val="600"/>
+                <a:spcPts val="900"/>
               </a:spcAft>
               <a:buNone/>
             </a:pPr>
             <a:r>
-              <a:rPr lang="zh-CN" sz="1050" dirty="0">
+              <a:rPr lang="zh-CN" sz="1150" b="1" dirty="0">
+                <a:solidFill>
+                  <a:srgbClr val="4F46E5"/>
+                </a:solidFill>
+                <a:latin typeface="微软雅黑" panose="020B0503020204020204" pitchFamily="34" charset="-122"/>
+                <a:ea typeface="微软雅黑" panose="020B0503020204020204" pitchFamily="34" charset="-122"/>
+                <a:cs typeface="微软雅黑" panose="020B0503020204020204" pitchFamily="34" charset="-120"/>
+              </a:rPr>
+              <a:t>[4] </a:t>
+            </a:r>
+            <a:r>
+              <a:rPr lang="zh-CN" sz="1150" dirty="0">
                 <a:solidFill>
                   <a:srgbClr val="334155"/>
                 </a:solidFill>
@@ -21326,18 +22704,32 @@
                 <a:ea typeface="微软雅黑" panose="020B0503020204020204" pitchFamily="34" charset="-122"/>
                 <a:cs typeface="微软雅黑" panose="020B0503020204020204" pitchFamily="34" charset="-120"/>
               </a:rPr>
-              <a:t>四个维度均 ≥ 89 分，无短板项</a:t>
-            </a:r>
-          </a:p>
-          <a:p>
-            <a:pPr>
+              <a:t>全国人民代表大会常务委员会. 中华人民共和国个人信息保护法[Z]. 2021-08-20 通过, 2021-11-01 施行.</a:t>
+            </a:r>
+          </a:p>
+          <a:p>
+            <a:pPr marL="457200" indent="-457200">
               <a:lnSpc>
                 <a:spcPct val="130000"/>
               </a:lnSpc>
-              <a:buNone/>
-            </a:pPr>
-            <a:r>
-              <a:rPr lang="zh-CN" sz="1050" dirty="0">
+              <a:spcAft>
+                <a:spcPts val="900"/>
+              </a:spcAft>
+              <a:buNone/>
+            </a:pPr>
+            <a:r>
+              <a:rPr lang="zh-CN" sz="1150" b="1" dirty="0">
+                <a:solidFill>
+                  <a:srgbClr val="4F46E5"/>
+                </a:solidFill>
+                <a:latin typeface="微软雅黑" panose="020B0503020204020204" pitchFamily="34" charset="-122"/>
+                <a:ea typeface="微软雅黑" panose="020B0503020204020204" pitchFamily="34" charset="-122"/>
+                <a:cs typeface="微软雅黑" panose="020B0503020204020204" pitchFamily="34" charset="-120"/>
+              </a:rPr>
+              <a:t>[5] </a:t>
+            </a:r>
+            <a:r>
+              <a:rPr lang="zh-CN" sz="1150" dirty="0">
                 <a:solidFill>
                   <a:srgbClr val="334155"/>
                 </a:solidFill>
@@ -21345,91 +22737,113 @@
                 <a:ea typeface="微软雅黑" panose="020B0503020204020204" pitchFamily="34" charset="-122"/>
                 <a:cs typeface="微软雅黑" panose="020B0503020204020204" pitchFamily="34" charset="-120"/>
               </a:rPr>
-              <a:t>无需调整任务分配；李雨鑫在协作维度领先 4 分</a:t>
-            </a:r>
-          </a:p>
-        </p:txBody>
-      </p:sp>
-      <p:sp>
-        <p:nvSpPr>
-          <p:cNvPr id="49" name="Shape 48"/>
-          <p:cNvSpPr/>
-          <p:nvPr/>
-        </p:nvSpPr>
-        <p:spPr>
-          <a:xfrm>
-            <a:off x="548640" y="5760720"/>
-            <a:ext cx="11064240" cy="658368"/>
-          </a:xfrm>
-          <a:prstGeom prst="roundRect">
-            <a:avLst>
-              <a:gd name="adj" fmla="val 16666"/>
-            </a:avLst>
-          </a:prstGeom>
-          <a:solidFill>
-            <a:srgbClr val="EEF2FF"/>
-          </a:solidFill>
-          <a:ln w="12700">
-            <a:solidFill>
-              <a:srgbClr val="C7D2FE"/>
-            </a:solidFill>
-            <a:prstDash val="solid"/>
-          </a:ln>
-          <a:effectLst>
-            <a:outerShdw blurRad="127000" dist="38100" dir="5400000" algn="bl" rotWithShape="0">
-              <a:srgbClr val="0F172A">
-                <a:alpha val="6000"/>
-              </a:srgbClr>
-            </a:outerShdw>
-          </a:effectLst>
-        </p:spPr>
-      </p:sp>
-      <p:sp>
-        <p:nvSpPr>
-          <p:cNvPr id="50" name="Text 49"/>
-          <p:cNvSpPr/>
-          <p:nvPr/>
-        </p:nvSpPr>
-        <p:spPr>
-          <a:xfrm>
-            <a:off x="868680" y="5779008"/>
-            <a:ext cx="10424160" cy="621792"/>
-          </a:xfrm>
-          <a:prstGeom prst="rect">
-            <a:avLst/>
-          </a:prstGeom>
-          <a:noFill/>
-          <a:ln>
-            <a:noFill/>
-          </a:ln>
-        </p:spPr>
-        <p:txBody>
-          <a:bodyPr wrap="square" lIns="0" tIns="0" rIns="0" bIns="0" rtlCol="0" anchor="ctr"/>
-          <a:lstStyle/>
-          <a:p>
-            <a:pPr>
+              <a:t>全国人民代表大会常务委员会. 中华人民共和国著作权法(2020 年修正)[Z]. 2020-11-11 通过, 2021-06-01 施行.</a:t>
+            </a:r>
+          </a:p>
+          <a:p>
+            <a:pPr marL="457200" indent="-457200">
               <a:lnSpc>
-                <a:spcPct val="125000"/>
+                <a:spcPct val="130000"/>
               </a:lnSpc>
-              <a:buNone/>
-            </a:pPr>
-            <a:r>
-              <a:rPr lang="zh-CN" sz="1200" b="1" dirty="0">
-                <a:solidFill>
-                  <a:srgbClr val="0F172A"/>
-                </a:solidFill>
-                <a:latin typeface="微软雅黑" panose="020B0503020204020204" pitchFamily="34" charset="-122"/>
-                <a:ea typeface="微软雅黑" panose="020B0503020204020204" pitchFamily="34" charset="-122"/>
-                <a:cs typeface="微软雅黑" panose="020B0503020204020204" pitchFamily="34" charset="-120"/>
-              </a:rPr>
-              <a:t>评价结果已纳入计划书表 9-4 与附录 D，作为 M4 起任务分配与绩效考核的依据</a:t>
-            </a:r>
-          </a:p>
-        </p:txBody>
-      </p:sp>
-      <p:sp>
-        <p:nvSpPr>
-          <p:cNvPr id="51" name="Text 1"/>
+              <a:spcAft>
+                <a:spcPts val="900"/>
+              </a:spcAft>
+              <a:buNone/>
+            </a:pPr>
+            <a:r>
+              <a:rPr lang="zh-CN" sz="1150" b="1" dirty="0">
+                <a:solidFill>
+                  <a:srgbClr val="4F46E5"/>
+                </a:solidFill>
+                <a:latin typeface="微软雅黑" panose="020B0503020204020204" pitchFamily="34" charset="-122"/>
+                <a:ea typeface="微软雅黑" panose="020B0503020204020204" pitchFamily="34" charset="-122"/>
+                <a:cs typeface="微软雅黑" panose="020B0503020204020204" pitchFamily="34" charset="-120"/>
+              </a:rPr>
+              <a:t>[6] </a:t>
+            </a:r>
+            <a:r>
+              <a:rPr lang="zh-CN" sz="1150" dirty="0">
+                <a:solidFill>
+                  <a:srgbClr val="334155"/>
+                </a:solidFill>
+                <a:latin typeface="微软雅黑" panose="020B0503020204020204" pitchFamily="34" charset="-122"/>
+                <a:ea typeface="微软雅黑" panose="020B0503020204020204" pitchFamily="34" charset="-122"/>
+                <a:cs typeface="微软雅黑" panose="020B0503020204020204" pitchFamily="34" charset="-120"/>
+              </a:rPr>
+              <a:t>国务院. 快递暂行条例(国务院令第 697 号)[Z]. 2018-03-27 公布, 2018-05-01 施行.</a:t>
+            </a:r>
+          </a:p>
+          <a:p>
+            <a:pPr marL="457200" indent="-457200">
+              <a:lnSpc>
+                <a:spcPct val="130000"/>
+              </a:lnSpc>
+              <a:spcAft>
+                <a:spcPts val="900"/>
+              </a:spcAft>
+              <a:buNone/>
+            </a:pPr>
+            <a:r>
+              <a:rPr lang="zh-CN" sz="1150" b="1" dirty="0">
+                <a:solidFill>
+                  <a:srgbClr val="4F46E5"/>
+                </a:solidFill>
+                <a:latin typeface="微软雅黑" panose="020B0503020204020204" pitchFamily="34" charset="-122"/>
+                <a:ea typeface="微软雅黑" panose="020B0503020204020204" pitchFamily="34" charset="-122"/>
+                <a:cs typeface="微软雅黑" panose="020B0503020204020204" pitchFamily="34" charset="-120"/>
+              </a:rPr>
+              <a:t>[7] </a:t>
+            </a:r>
+            <a:r>
+              <a:rPr lang="zh-CN" sz="1150" dirty="0">
+                <a:solidFill>
+                  <a:srgbClr val="334155"/>
+                </a:solidFill>
+                <a:latin typeface="微软雅黑" panose="020B0503020204020204" pitchFamily="34" charset="-122"/>
+                <a:ea typeface="微软雅黑" panose="020B0503020204020204" pitchFamily="34" charset="-122"/>
+                <a:cs typeface="微软雅黑" panose="020B0503020204020204" pitchFamily="34" charset="-120"/>
+              </a:rPr>
+              <a:t>教育部. 大中小学劳动教育指导纲要(试行)[Z]. 2020-07-07.</a:t>
+            </a:r>
+          </a:p>
+          <a:p>
+            <a:pPr marL="457200" indent="-457200">
+              <a:lnSpc>
+                <a:spcPct val="130000"/>
+              </a:lnSpc>
+              <a:spcAft>
+                <a:spcPts val="900"/>
+              </a:spcAft>
+              <a:buNone/>
+            </a:pPr>
+            <a:r>
+              <a:rPr lang="zh-CN" sz="1150" b="1" dirty="0">
+                <a:solidFill>
+                  <a:srgbClr val="4F46E5"/>
+                </a:solidFill>
+                <a:latin typeface="微软雅黑" panose="020B0503020204020204" pitchFamily="34" charset="-122"/>
+                <a:ea typeface="微软雅黑" panose="020B0503020204020204" pitchFamily="34" charset="-122"/>
+                <a:cs typeface="微软雅黑" panose="020B0503020204020204" pitchFamily="34" charset="-120"/>
+              </a:rPr>
+              <a:t>[8] </a:t>
+            </a:r>
+            <a:r>
+              <a:rPr lang="zh-CN" sz="1150" dirty="0">
+                <a:solidFill>
+                  <a:srgbClr val="334155"/>
+                </a:solidFill>
+                <a:latin typeface="微软雅黑" panose="020B0503020204020204" pitchFamily="34" charset="-122"/>
+                <a:ea typeface="微软雅黑" panose="020B0503020204020204" pitchFamily="34" charset="-122"/>
+                <a:cs typeface="微软雅黑" panose="020B0503020204020204" pitchFamily="34" charset="-120"/>
+              </a:rPr>
+              <a:t>中国互联网络信息中心. 第 55 次《中国互联网络发展状况统计报告》[R/OL]. 2025-01-17. https://www.cnnic.cn/n4/2025/0117/c88-11229.html</a:t>
+            </a:r>
+          </a:p>
+        </p:txBody>
+      </p:sp>
+      <p:sp>
+        <p:nvSpPr>
+          <p:cNvPr id="7" name="Text 1"/>
           <p:cNvSpPr/>
           <p:nvPr/>
         </p:nvSpPr>
@@ -21469,7 +22883,7 @@
       </p:sp>
       <p:sp>
         <p:nvSpPr>
-          <p:cNvPr id="52" name="Text 2"/>
+          <p:cNvPr id="8" name="Text 2"/>
           <p:cNvSpPr/>
           <p:nvPr/>
         </p:nvSpPr>
@@ -21502,7 +22916,7 @@
                 <a:ea typeface="微软雅黑" panose="020B0503020204020204" pitchFamily="34" charset="-122"/>
                 <a:cs typeface="微软雅黑" panose="020B0503020204020204" pitchFamily="34" charset="-120"/>
               </a:rPr>
-              <a:t>26</a:t>
+              <a:t>29</a:t>
             </a:r>
           </a:p>
         </p:txBody>
@@ -21852,6 +23266,10 @@
             </a:outerShdw>
           </a:effectLst>
         </p:spPr>
+        <p:txBody>
+          <a:bodyPr/>
+          <a:p/>
+        </p:txBody>
       </p:sp>
       <p:sp>
         <p:nvSpPr>
@@ -21871,6 +23289,10 @@
             <a:srgbClr val="EEF2FF"/>
           </a:solidFill>
         </p:spPr>
+        <p:txBody>
+          <a:bodyPr/>
+          <a:p/>
+        </p:txBody>
       </p:sp>
       <p:sp>
         <p:nvSpPr>
@@ -21970,6 +23392,10 @@
             <a:prstDash val="solid"/>
           </a:ln>
         </p:spPr>
+        <p:txBody>
+          <a:bodyPr/>
+          <a:p/>
+        </p:txBody>
       </p:sp>
       <p:sp>
         <p:nvSpPr>
@@ -22045,6 +23471,10 @@
             </a:outerShdw>
           </a:effectLst>
         </p:spPr>
+        <p:txBody>
+          <a:bodyPr/>
+          <a:p/>
+        </p:txBody>
       </p:sp>
       <p:sp>
         <p:nvSpPr>
@@ -22064,6 +23494,10 @@
             <a:srgbClr val="EEF2FF"/>
           </a:solidFill>
         </p:spPr>
+        <p:txBody>
+          <a:bodyPr/>
+          <a:p/>
+        </p:txBody>
       </p:sp>
       <p:sp>
         <p:nvSpPr>
@@ -22163,6 +23597,10 @@
             <a:prstDash val="solid"/>
           </a:ln>
         </p:spPr>
+        <p:txBody>
+          <a:bodyPr/>
+          <a:p/>
+        </p:txBody>
       </p:sp>
       <p:sp>
         <p:nvSpPr>
@@ -22294,210 +23732,183 @@
 </file>
 
 <file path=ppt/slides/slide30.xml><?xml version="1.0" encoding="utf-8"?>
-<p:sld xmlns:a="http://schemas.openxmlformats.org/drawingml/2006/main" xmlns:p="http://schemas.openxmlformats.org/presentationml/2006/main" xmlns:r="http://schemas.openxmlformats.org/officeDocument/2006/relationships">
+<p:sld xmlns:a="http://schemas.openxmlformats.org/drawingml/2006/main" xmlns:r="http://schemas.openxmlformats.org/officeDocument/2006/relationships" xmlns:p="http://schemas.openxmlformats.org/presentationml/2006/main">
   <p:cSld>
-    <p:bg>
-      <p:bgPr>
-        <a:solidFill>
-          <a:srgbClr val="F8FAFC"/>
-        </a:solidFill>
-        <a:effectLst/>
-      </p:bgPr>
-    </p:bg>
     <p:spTree>
       <p:nvGrpSpPr>
         <p:cNvPr id="1" name=""/>
         <p:cNvGrpSpPr/>
         <p:nvPr/>
       </p:nvGrpSpPr>
-      <p:grpSpPr/>
-      <p:sp>
-        <p:nvSpPr>
-          <p:cNvPr id="2" name="Text 1"/>
-          <p:cNvSpPr/>
-          <p:nvPr/>
-        </p:nvSpPr>
-        <p:spPr>
-          <a:xfrm>
-            <a:off x="548640" y="320040"/>
-            <a:ext cx="11064240" cy="685800"/>
-          </a:xfrm>
-          <a:prstGeom prst="rect">
-            <a:avLst/>
-          </a:prstGeom>
-          <a:noFill/>
-          <a:ln>
-            <a:noFill/>
-          </a:ln>
-        </p:spPr>
-        <p:txBody>
-          <a:bodyPr wrap="square" lIns="0" tIns="0" rIns="0" bIns="0" rtlCol="0" anchor="ctr"/>
-          <a:lstStyle/>
-          <a:p>
-            <a:pPr>
-              <a:buNone/>
-            </a:pPr>
-            <a:r>
-              <a:rPr lang="zh-CN" sz="3200" b="1" dirty="0">
-                <a:solidFill>
-                  <a:srgbClr val="0F172A"/>
-                </a:solidFill>
-                <a:latin typeface="微软雅黑" panose="020B0503020204020204" pitchFamily="34" charset="-122"/>
-                <a:ea typeface="微软雅黑" panose="020B0503020204020204" pitchFamily="34" charset="-122"/>
-                <a:cs typeface="微软雅黑" panose="020B0503020204020204" pitchFamily="34" charset="-120"/>
-              </a:rPr>
-              <a:t>团队会议纪要</a:t>
-            </a:r>
-          </a:p>
-        </p:txBody>
-      </p:sp>
-      <p:sp>
-        <p:nvSpPr>
-          <p:cNvPr id="3" name="Shape 2"/>
-          <p:cNvSpPr/>
-          <p:nvPr/>
-        </p:nvSpPr>
-        <p:spPr>
-          <a:xfrm>
-            <a:off x="548640" y="1097280"/>
-            <a:ext cx="11064240" cy="0"/>
-          </a:xfrm>
-          <a:prstGeom prst="line">
-            <a:avLst/>
-          </a:prstGeom>
-          <a:noFill/>
-          <a:ln w="12700">
-            <a:solidFill>
-              <a:srgbClr val="E2E8F0"/>
-            </a:solidFill>
-            <a:prstDash val="solid"/>
-          </a:ln>
-        </p:spPr>
-      </p:sp>
-      <p:sp>
-        <p:nvSpPr>
-          <p:cNvPr id="4" name="Text 3"/>
-          <p:cNvSpPr/>
-          <p:nvPr/>
-        </p:nvSpPr>
-        <p:spPr>
-          <a:xfrm>
-            <a:off x="548640" y="1188720"/>
-            <a:ext cx="11064240" cy="310896"/>
-          </a:xfrm>
-          <a:prstGeom prst="rect">
-            <a:avLst/>
-          </a:prstGeom>
-          <a:noFill/>
-          <a:ln>
-            <a:noFill/>
-          </a:ln>
-        </p:spPr>
-        <p:txBody>
-          <a:bodyPr wrap="square" lIns="0" tIns="0" rIns="0" bIns="0" rtlCol="0" anchor="ctr"/>
-          <a:lstStyle/>
-          <a:p>
-            <a:pPr>
-              <a:buNone/>
-            </a:pPr>
-            <a:r>
-              <a:rPr lang="zh-CN" sz="1300" dirty="0">
-                <a:solidFill>
-                  <a:srgbClr val="64748B"/>
-                </a:solidFill>
-                <a:latin typeface="微软雅黑" panose="020B0503020204020204" pitchFamily="34" charset="-122"/>
-                <a:ea typeface="微软雅黑" panose="020B0503020204020204" pitchFamily="34" charset="-122"/>
-                <a:cs typeface="微软雅黑" panose="020B0503020204020204" pitchFamily="34" charset="-120"/>
-              </a:rPr>
-              <a:t>截至项目计划评审阶段，共在寝室召开 2 次项目例会，均形成书面纪要并归档至 Git 仓库 /process。</a:t>
-            </a:r>
-          </a:p>
-        </p:txBody>
-      </p:sp>
-      <p:sp>
-        <p:nvSpPr>
-          <p:cNvPr id="5" name="Shape 4"/>
-          <p:cNvSpPr/>
-          <p:nvPr/>
-        </p:nvSpPr>
-        <p:spPr>
-          <a:xfrm>
-            <a:off x="548640" y="1572768"/>
-            <a:ext cx="11064240" cy="3364992"/>
+      <p:grpSpPr>
+        <a:xfrm>
+          <a:off x="0" y="0"/>
+          <a:ext cx="0" cy="0"/>
+          <a:chOff x="0" y="0"/>
+          <a:chExt cx="0" cy="0"/>
+        </a:xfrm>
+      </p:grpSpPr>
+      <p:sp>
+        <p:nvSpPr>
+          <p:cNvPr id="2" name="Shape 0"/>
+          <p:cNvSpPr/>
+          <p:nvPr/>
+        </p:nvSpPr>
+        <p:spPr>
+          <a:xfrm>
+            <a:off x="0" y="0"/>
+            <a:ext cx="12188952" cy="6858000"/>
+          </a:xfrm>
+          <a:prstGeom prst="rect">
+            <a:avLst/>
+          </a:prstGeom>
+          <a:solidFill>
+            <a:srgbClr val="0F172A"/>
+          </a:solidFill>
+        </p:spPr>
+        <p:txBody>
+          <a:bodyPr/>
+          <a:p/>
+        </p:txBody>
+      </p:sp>
+      <p:pic>
+        <p:nvPicPr>
+          <p:cNvPr id="3" name="Image 0" descr="preencoded.png"/>
+          <p:cNvPicPr>
+            <a:picLocks noChangeAspect="1"/>
+          </p:cNvPicPr>
+          <p:nvPr/>
+        </p:nvPicPr>
+        <p:blipFill>
+          <a:blip r:embed="rId1"/>
+          <a:stretch>
+            <a:fillRect/>
+          </a:stretch>
+        </p:blipFill>
+        <p:spPr>
+          <a:xfrm>
+            <a:off x="0" y="0"/>
+            <a:ext cx="12188952" cy="6858000"/>
+          </a:xfrm>
+          <a:prstGeom prst="rect">
+            <a:avLst/>
+          </a:prstGeom>
+        </p:spPr>
+      </p:pic>
+      <p:pic>
+        <p:nvPicPr>
+          <p:cNvPr id="4" name="Image 1" descr="preencoded.png"/>
+          <p:cNvPicPr>
+            <a:picLocks noChangeAspect="1"/>
+          </p:cNvPicPr>
+          <p:nvPr/>
+        </p:nvPicPr>
+        <p:blipFill>
+          <a:blip r:embed="rId2"/>
+          <a:stretch>
+            <a:fillRect/>
+          </a:stretch>
+        </p:blipFill>
+        <p:spPr>
+          <a:xfrm>
+            <a:off x="0" y="0"/>
+            <a:ext cx="12188952" cy="6858000"/>
+          </a:xfrm>
+          <a:prstGeom prst="rect">
+            <a:avLst/>
+          </a:prstGeom>
+        </p:spPr>
+      </p:pic>
+      <p:sp>
+        <p:nvSpPr>
+          <p:cNvPr id="5" name="Text 1"/>
+          <p:cNvSpPr/>
+          <p:nvPr/>
+        </p:nvSpPr>
+        <p:spPr>
+          <a:xfrm>
+            <a:off x="1371600" y="2011680"/>
+            <a:ext cx="9418320" cy="914400"/>
+          </a:xfrm>
+          <a:prstGeom prst="rect">
+            <a:avLst/>
+          </a:prstGeom>
+          <a:noFill/>
+        </p:spPr>
+        <p:txBody>
+          <a:bodyPr wrap="square" lIns="0" tIns="0" rIns="0" bIns="0" rtlCol="0" anchor="ctr"/>
+          <a:lstStyle/>
+          <a:p>
+            <a:pPr marL="0" indent="0" algn="ctr">
+              <a:buNone/>
+            </a:pPr>
+            <a:r>
+              <a:rPr lang="en-US" sz="4800" b="1" dirty="0">
+                <a:solidFill>
+                  <a:srgbClr val="FFFFFF"/>
+                </a:solidFill>
+                <a:latin typeface="微软雅黑" panose="020B0503020204020204" pitchFamily="34" charset="-122"/>
+                <a:ea typeface="微软雅黑" panose="020B0503020204020204" pitchFamily="34" charset="-122"/>
+                <a:cs typeface="微软雅黑" panose="020B0503020204020204" pitchFamily="34" charset="-120"/>
+              </a:rPr>
+              <a:t>打造校园轻量级互助平台</a:t>
+            </a:r>
+            <a:endParaRPr lang="en-US" sz="4800" dirty="0"/>
+          </a:p>
+        </p:txBody>
+      </p:sp>
+      <p:sp>
+        <p:nvSpPr>
+          <p:cNvPr id="6" name="Shape 2"/>
+          <p:cNvSpPr/>
+          <p:nvPr/>
+        </p:nvSpPr>
+        <p:spPr>
+          <a:xfrm>
+            <a:off x="2286000" y="3200400"/>
+            <a:ext cx="7589520" cy="640080"/>
           </a:xfrm>
           <a:prstGeom prst="roundRect">
             <a:avLst>
-              <a:gd name="adj" fmla="val 2717"/>
+              <a:gd name="adj" fmla="val 50000"/>
             </a:avLst>
           </a:prstGeom>
           <a:solidFill>
-            <a:srgbClr val="FFFFFF"/>
+            <a:srgbClr val="FFFFFF">
+              <a:alpha val="88000"/>
+            </a:srgbClr>
           </a:solidFill>
-          <a:ln w="12700">
-            <a:solidFill>
-              <a:srgbClr val="E2E8F0"/>
-            </a:solidFill>
-            <a:prstDash val="solid"/>
-          </a:ln>
-          <a:effectLst>
-            <a:outerShdw blurRad="127000" dist="38100" dir="5400000" algn="bl" rotWithShape="0">
-              <a:srgbClr val="0F172A">
-                <a:alpha val="6000"/>
-              </a:srgbClr>
-            </a:outerShdw>
-          </a:effectLst>
-        </p:spPr>
-      </p:sp>
-      <p:sp>
-        <p:nvSpPr>
-          <p:cNvPr id="6" name="HeadBg 5"/>
-          <p:cNvSpPr/>
-          <p:nvPr/>
-        </p:nvSpPr>
-        <p:spPr>
-          <a:xfrm>
-            <a:off x="548640" y="1572768"/>
-            <a:ext cx="11064240" cy="384048"/>
-          </a:xfrm>
-          <a:prstGeom prst="rect">
-            <a:avLst/>
-          </a:prstGeom>
-          <a:solidFill>
-            <a:srgbClr val="4F46E5"/>
-          </a:solidFill>
-          <a:ln>
-            <a:noFill/>
-          </a:ln>
-        </p:spPr>
-      </p:sp>
-      <p:sp>
-        <p:nvSpPr>
-          <p:cNvPr id="7" name="Text 6"/>
-          <p:cNvSpPr/>
-          <p:nvPr/>
-        </p:nvSpPr>
-        <p:spPr>
-          <a:xfrm>
-            <a:off x="676656" y="1591056"/>
-            <a:ext cx="868680" cy="347472"/>
-          </a:xfrm>
-          <a:prstGeom prst="rect">
-            <a:avLst/>
-          </a:prstGeom>
-          <a:noFill/>
-          <a:ln>
-            <a:noFill/>
-          </a:ln>
-        </p:spPr>
-        <p:txBody>
-          <a:bodyPr wrap="square" lIns="0" tIns="0" rIns="0" bIns="0" rtlCol="0" anchor="ctr"/>
-          <a:lstStyle/>
-          <a:p>
-            <a:pPr>
-              <a:buNone/>
-            </a:pPr>
-            <a:r>
-              <a:rPr lang="zh-CN" sz="1150" b="1" dirty="0">
+        </p:spPr>
+        <p:txBody>
+          <a:bodyPr/>
+          <a:p/>
+        </p:txBody>
+      </p:sp>
+      <p:sp>
+        <p:nvSpPr>
+          <p:cNvPr id="7" name="Text 3"/>
+          <p:cNvSpPr/>
+          <p:nvPr/>
+        </p:nvSpPr>
+        <p:spPr>
+          <a:xfrm>
+            <a:off x="2286000" y="3200400"/>
+            <a:ext cx="7589520" cy="640080"/>
+          </a:xfrm>
+          <a:prstGeom prst="rect">
+            <a:avLst/>
+          </a:prstGeom>
+          <a:noFill/>
+        </p:spPr>
+        <p:txBody>
+          <a:bodyPr wrap="square" lIns="0" tIns="0" rIns="0" bIns="0" rtlCol="0" anchor="ctr"/>
+          <a:lstStyle/>
+          <a:p>
+            <a:pPr marL="0" indent="0" algn="ctr">
+              <a:buNone/>
+            </a:pPr>
+            <a:r>
+              <a:rPr lang="en-US" sz="1600" dirty="0">
                 <a:solidFill>
                   <a:srgbClr val="FFFFFF"/>
                 </a:solidFill>
@@ -22505,1040 +23916,49 @@
                 <a:ea typeface="微软雅黑" panose="020B0503020204020204" pitchFamily="34" charset="-122"/>
                 <a:cs typeface="微软雅黑" panose="020B0503020204020204" pitchFamily="34" charset="-120"/>
               </a:rPr>
-              <a:t>次序</a:t>
-            </a:r>
-          </a:p>
-        </p:txBody>
-      </p:sp>
-      <p:sp>
-        <p:nvSpPr>
-          <p:cNvPr id="8" name="Text 7"/>
-          <p:cNvSpPr/>
-          <p:nvPr/>
-        </p:nvSpPr>
-        <p:spPr>
-          <a:xfrm>
-            <a:off x="1600200" y="1591056"/>
-            <a:ext cx="1417320" cy="347472"/>
-          </a:xfrm>
-          <a:prstGeom prst="rect">
-            <a:avLst/>
-          </a:prstGeom>
-          <a:noFill/>
-          <a:ln>
-            <a:noFill/>
-          </a:ln>
-        </p:spPr>
-        <p:txBody>
-          <a:bodyPr wrap="square" lIns="0" tIns="0" rIns="0" bIns="0" rtlCol="0" anchor="ctr"/>
-          <a:lstStyle/>
-          <a:p>
-            <a:pPr>
-              <a:buNone/>
-            </a:pPr>
-            <a:r>
-              <a:rPr lang="zh-CN" sz="1150" b="1" dirty="0">
-                <a:solidFill>
-                  <a:srgbClr val="FFFFFF"/>
-                </a:solidFill>
-                <a:latin typeface="微软雅黑" panose="020B0503020204020204" pitchFamily="34" charset="-122"/>
-                <a:ea typeface="微软雅黑" panose="020B0503020204020204" pitchFamily="34" charset="-122"/>
-                <a:cs typeface="微软雅黑" panose="020B0503020204020204" pitchFamily="34" charset="-120"/>
-              </a:rPr>
-              <a:t>时间</a:t>
-            </a:r>
-          </a:p>
-        </p:txBody>
-      </p:sp>
-      <p:sp>
-        <p:nvSpPr>
-          <p:cNvPr id="9" name="Text 8"/>
-          <p:cNvSpPr/>
-          <p:nvPr/>
-        </p:nvSpPr>
-        <p:spPr>
-          <a:xfrm>
-            <a:off x="3063240" y="1591056"/>
-            <a:ext cx="1920240" cy="347472"/>
-          </a:xfrm>
-          <a:prstGeom prst="rect">
-            <a:avLst/>
-          </a:prstGeom>
-          <a:noFill/>
-          <a:ln>
-            <a:noFill/>
-          </a:ln>
-        </p:spPr>
-        <p:txBody>
-          <a:bodyPr wrap="square" lIns="0" tIns="0" rIns="0" bIns="0" rtlCol="0" anchor="ctr"/>
-          <a:lstStyle/>
-          <a:p>
-            <a:pPr>
-              <a:buNone/>
-            </a:pPr>
-            <a:r>
-              <a:rPr lang="zh-CN" sz="1150" b="1" dirty="0">
-                <a:solidFill>
-                  <a:srgbClr val="FFFFFF"/>
-                </a:solidFill>
-                <a:latin typeface="微软雅黑" panose="020B0503020204020204" pitchFamily="34" charset="-122"/>
-                <a:ea typeface="微软雅黑" panose="020B0503020204020204" pitchFamily="34" charset="-122"/>
-                <a:cs typeface="微软雅黑" panose="020B0503020204020204" pitchFamily="34" charset="-120"/>
-              </a:rPr>
-              <a:t>地点</a:t>
-            </a:r>
-          </a:p>
-        </p:txBody>
-      </p:sp>
-      <p:sp>
-        <p:nvSpPr>
-          <p:cNvPr id="10" name="Text 9"/>
-          <p:cNvSpPr/>
-          <p:nvPr/>
-        </p:nvSpPr>
-        <p:spPr>
-          <a:xfrm>
-            <a:off x="5029200" y="1591056"/>
-            <a:ext cx="2834640" cy="347472"/>
-          </a:xfrm>
-          <a:prstGeom prst="rect">
-            <a:avLst/>
-          </a:prstGeom>
-          <a:noFill/>
-          <a:ln>
-            <a:noFill/>
-          </a:ln>
-        </p:spPr>
-        <p:txBody>
-          <a:bodyPr wrap="square" lIns="0" tIns="0" rIns="0" bIns="0" rtlCol="0" anchor="ctr"/>
-          <a:lstStyle/>
-          <a:p>
-            <a:pPr>
-              <a:buNone/>
-            </a:pPr>
-            <a:r>
-              <a:rPr lang="zh-CN" sz="1150" b="1" dirty="0">
-                <a:solidFill>
-                  <a:srgbClr val="FFFFFF"/>
-                </a:solidFill>
-                <a:latin typeface="微软雅黑" panose="020B0503020204020204" pitchFamily="34" charset="-122"/>
-                <a:ea typeface="微软雅黑" panose="020B0503020204020204" pitchFamily="34" charset="-122"/>
-                <a:cs typeface="微软雅黑" panose="020B0503020204020204" pitchFamily="34" charset="-120"/>
-              </a:rPr>
-              <a:t>主要议题</a:t>
-            </a:r>
-          </a:p>
-        </p:txBody>
-      </p:sp>
-      <p:sp>
-        <p:nvSpPr>
-          <p:cNvPr id="11" name="Text 10"/>
-          <p:cNvSpPr/>
-          <p:nvPr/>
-        </p:nvSpPr>
-        <p:spPr>
-          <a:xfrm>
-            <a:off x="7909560" y="1591056"/>
-            <a:ext cx="3566160" cy="347472"/>
-          </a:xfrm>
-          <a:prstGeom prst="rect">
-            <a:avLst/>
-          </a:prstGeom>
-          <a:noFill/>
-          <a:ln>
-            <a:noFill/>
-          </a:ln>
-        </p:spPr>
-        <p:txBody>
-          <a:bodyPr wrap="square" lIns="0" tIns="0" rIns="0" bIns="0" rtlCol="0" anchor="ctr"/>
-          <a:lstStyle/>
-          <a:p>
-            <a:pPr>
-              <a:buNone/>
-            </a:pPr>
-            <a:r>
-              <a:rPr lang="zh-CN" sz="1150" b="1" dirty="0">
-                <a:solidFill>
-                  <a:srgbClr val="FFFFFF"/>
-                </a:solidFill>
-                <a:latin typeface="微软雅黑" panose="020B0503020204020204" pitchFamily="34" charset="-122"/>
-                <a:ea typeface="微软雅黑" panose="020B0503020204020204" pitchFamily="34" charset="-122"/>
-                <a:cs typeface="微软雅黑" panose="020B0503020204020204" pitchFamily="34" charset="-120"/>
-              </a:rPr>
-              <a:t>形成的决议</a:t>
-            </a:r>
-          </a:p>
-        </p:txBody>
-      </p:sp>
-      <p:sp>
-        <p:nvSpPr>
-          <p:cNvPr id="12" name="Text 11"/>
-          <p:cNvSpPr/>
-          <p:nvPr/>
-        </p:nvSpPr>
-        <p:spPr>
-          <a:xfrm>
-            <a:off x="676656" y="1956816"/>
-            <a:ext cx="868680" cy="1481328"/>
-          </a:xfrm>
-          <a:prstGeom prst="rect">
-            <a:avLst/>
-          </a:prstGeom>
-          <a:noFill/>
-          <a:ln>
-            <a:noFill/>
-          </a:ln>
-        </p:spPr>
-        <p:txBody>
-          <a:bodyPr wrap="square" lIns="0" tIns="0" rIns="0" bIns="0" rtlCol="0" anchor="ctr"/>
-          <a:lstStyle/>
-          <a:p>
-            <a:pPr algn="ctr">
-              <a:buNone/>
-            </a:pPr>
-            <a:r>
-              <a:rPr lang="zh-CN" sz="1300" b="1" dirty="0">
-                <a:solidFill>
-                  <a:srgbClr val="4F46E5"/>
-                </a:solidFill>
-                <a:latin typeface="微软雅黑" panose="020B0503020204020204" pitchFamily="34" charset="-122"/>
-                <a:ea typeface="微软雅黑" panose="020B0503020204020204" pitchFamily="34" charset="-122"/>
-                <a:cs typeface="微软雅黑" panose="020B0503020204020204" pitchFamily="34" charset="-120"/>
-              </a:rPr>
-              <a:t>第 1 次</a:t>
-            </a:r>
-          </a:p>
-        </p:txBody>
-      </p:sp>
-      <p:sp>
-        <p:nvSpPr>
-          <p:cNvPr id="13" name="Text 12"/>
-          <p:cNvSpPr/>
-          <p:nvPr/>
-        </p:nvSpPr>
-        <p:spPr>
-          <a:xfrm>
-            <a:off x="1600200" y="1956816"/>
-            <a:ext cx="1417320" cy="1481328"/>
-          </a:xfrm>
-          <a:prstGeom prst="rect">
-            <a:avLst/>
-          </a:prstGeom>
-          <a:noFill/>
-          <a:ln>
-            <a:noFill/>
-          </a:ln>
-        </p:spPr>
-        <p:txBody>
-          <a:bodyPr wrap="square" lIns="0" tIns="0" rIns="0" bIns="0" rtlCol="0" anchor="ctr"/>
-          <a:lstStyle/>
-          <a:p>
-            <a:pPr>
-              <a:lnSpc>
-                <a:spcPct val="120000"/>
-              </a:lnSpc>
-              <a:buNone/>
-            </a:pPr>
-            <a:r>
-              <a:rPr lang="zh-CN" sz="1000" dirty="0">
-                <a:solidFill>
-                  <a:srgbClr val="334155"/>
-                </a:solidFill>
-                <a:latin typeface="微软雅黑" panose="020B0503020204020204" pitchFamily="34" charset="-122"/>
-                <a:ea typeface="微软雅黑" panose="020B0503020204020204" pitchFamily="34" charset="-122"/>
-                <a:cs typeface="微软雅黑" panose="020B0503020204020204" pitchFamily="34" charset="-120"/>
-              </a:rPr>
-              <a:t>第 3 教学周
-9/30（周三）20:00–21:00</a:t>
-            </a:r>
-          </a:p>
-        </p:txBody>
-      </p:sp>
-      <p:sp>
-        <p:nvSpPr>
-          <p:cNvPr id="14" name="Text 13"/>
-          <p:cNvSpPr/>
-          <p:nvPr/>
-        </p:nvSpPr>
-        <p:spPr>
-          <a:xfrm>
-            <a:off x="3063240" y="1956816"/>
-            <a:ext cx="1920240" cy="1481328"/>
-          </a:xfrm>
-          <a:prstGeom prst="rect">
-            <a:avLst/>
-          </a:prstGeom>
-          <a:noFill/>
-          <a:ln>
-            <a:noFill/>
-          </a:ln>
-        </p:spPr>
-        <p:txBody>
-          <a:bodyPr wrap="square" lIns="0" tIns="0" rIns="0" bIns="0" rtlCol="0" anchor="ctr"/>
-          <a:lstStyle/>
-          <a:p>
-            <a:pPr>
-              <a:lnSpc>
-                <a:spcPct val="120000"/>
-              </a:lnSpc>
-              <a:buNone/>
-            </a:pPr>
-            <a:r>
-              <a:rPr lang="zh-CN" sz="1000" dirty="0">
-                <a:solidFill>
-                  <a:srgbClr val="334155"/>
-                </a:solidFill>
-                <a:latin typeface="微软雅黑" panose="020B0503020204020204" pitchFamily="34" charset="-122"/>
-                <a:ea typeface="微软雅黑" panose="020B0503020204020204" pitchFamily="34" charset="-122"/>
-                <a:cs typeface="微软雅黑" panose="020B0503020204020204" pitchFamily="34" charset="-120"/>
-              </a:rPr>
-              <a:t>寝室
-（罗嘉昊宿舍）</a:t>
-            </a:r>
-          </a:p>
-        </p:txBody>
-      </p:sp>
-      <p:sp>
-        <p:nvSpPr>
-          <p:cNvPr id="15" name="Text 14"/>
-          <p:cNvSpPr/>
-          <p:nvPr/>
-        </p:nvSpPr>
-        <p:spPr>
-          <a:xfrm>
-            <a:off x="5029200" y="1956816"/>
-            <a:ext cx="2834640" cy="1481328"/>
-          </a:xfrm>
-          <a:prstGeom prst="rect">
-            <a:avLst/>
-          </a:prstGeom>
-          <a:noFill/>
-          <a:ln>
-            <a:noFill/>
-          </a:ln>
-        </p:spPr>
-        <p:txBody>
-          <a:bodyPr wrap="square" lIns="0" tIns="0" rIns="0" bIns="0" rtlCol="0" anchor="ctr"/>
-          <a:lstStyle/>
-          <a:p>
-            <a:pPr>
-              <a:lnSpc>
-                <a:spcPct val="120000"/>
-              </a:lnSpc>
-              <a:buNone/>
-            </a:pPr>
-            <a:r>
-              <a:rPr lang="zh-CN" sz="1000" dirty="0">
-                <a:solidFill>
-                  <a:srgbClr val="334155"/>
-                </a:solidFill>
-                <a:latin typeface="微软雅黑" panose="020B0503020204020204" pitchFamily="34" charset="-122"/>
-                <a:ea typeface="微软雅黑" panose="020B0503020204020204" pitchFamily="34" charset="-122"/>
-                <a:cs typeface="微软雅黑" panose="020B0503020204020204" pitchFamily="34" charset="-120"/>
-              </a:rPr>
-              <a:t>① 项目计划书内部评审
-② 课程进度对齐
-③ 调研数据小结</a:t>
-            </a:r>
-          </a:p>
-        </p:txBody>
-      </p:sp>
-      <p:sp>
-        <p:nvSpPr>
-          <p:cNvPr id="16" name="Text 15"/>
-          <p:cNvSpPr/>
-          <p:nvPr/>
-        </p:nvSpPr>
-        <p:spPr>
-          <a:xfrm>
-            <a:off x="7909560" y="1956816"/>
-            <a:ext cx="3566160" cy="1481328"/>
-          </a:xfrm>
-          <a:prstGeom prst="rect">
-            <a:avLst/>
-          </a:prstGeom>
-          <a:noFill/>
-          <a:ln>
-            <a:noFill/>
-          </a:ln>
-        </p:spPr>
-        <p:txBody>
-          <a:bodyPr wrap="square" lIns="0" tIns="0" rIns="0" bIns="0" rtlCol="0" anchor="ctr"/>
-          <a:lstStyle/>
-          <a:p>
-            <a:pPr>
-              <a:lnSpc>
-                <a:spcPct val="120000"/>
-              </a:lnSpc>
-              <a:buNone/>
-            </a:pPr>
-            <a:r>
-              <a:rPr lang="zh-CN" sz="1000" dirty="0">
-                <a:solidFill>
-                  <a:srgbClr val="334155"/>
-                </a:solidFill>
-                <a:latin typeface="微软雅黑" panose="020B0503020204020204" pitchFamily="34" charset="-122"/>
-                <a:ea typeface="微软雅黑" panose="020B0503020204020204" pitchFamily="34" charset="-122"/>
-                <a:cs typeface="微软雅黑" panose="020B0503020204020204" pitchFamily="34" charset="-120"/>
-              </a:rPr>
-              <a:t>① 补齐三级 WBS、任务级工期与资源负载，9/30 提交
-② 排期以课程进度表为唯一基准
-③ 调研数据移交罗嘉昊作为可行性报告输入</a:t>
-            </a:r>
-          </a:p>
-        </p:txBody>
-      </p:sp>
-      <p:sp>
-        <p:nvSpPr>
-          <p:cNvPr id="17" name="Shape 16"/>
-          <p:cNvSpPr/>
-          <p:nvPr/>
-        </p:nvSpPr>
-        <p:spPr>
-          <a:xfrm>
-            <a:off x="548640" y="3438144"/>
-            <a:ext cx="11064240" cy="0"/>
-          </a:xfrm>
-          <a:prstGeom prst="line">
-            <a:avLst/>
-          </a:prstGeom>
-          <a:noFill/>
-          <a:ln w="12700">
-            <a:solidFill>
-              <a:srgbClr val="E8EDF5"/>
-            </a:solidFill>
-            <a:prstDash val="solid"/>
-          </a:ln>
-        </p:spPr>
-      </p:sp>
-      <p:sp>
-        <p:nvSpPr>
-          <p:cNvPr id="18" name="RowBg 17"/>
-          <p:cNvSpPr/>
-          <p:nvPr/>
-        </p:nvSpPr>
-        <p:spPr>
-          <a:xfrm>
-            <a:off x="548640" y="3438144"/>
-            <a:ext cx="11064240" cy="1481328"/>
-          </a:xfrm>
-          <a:prstGeom prst="rect">
-            <a:avLst/>
-          </a:prstGeom>
-          <a:solidFill>
-            <a:srgbClr val="F1F5F9"/>
-          </a:solidFill>
-          <a:ln>
-            <a:noFill/>
-          </a:ln>
-        </p:spPr>
-      </p:sp>
-      <p:sp>
-        <p:nvSpPr>
-          <p:cNvPr id="19" name="Text 18"/>
-          <p:cNvSpPr/>
-          <p:nvPr/>
-        </p:nvSpPr>
-        <p:spPr>
-          <a:xfrm>
-            <a:off x="676656" y="3438144"/>
-            <a:ext cx="868680" cy="1481328"/>
-          </a:xfrm>
-          <a:prstGeom prst="rect">
-            <a:avLst/>
-          </a:prstGeom>
-          <a:noFill/>
-          <a:ln>
-            <a:noFill/>
-          </a:ln>
-        </p:spPr>
-        <p:txBody>
-          <a:bodyPr wrap="square" lIns="0" tIns="0" rIns="0" bIns="0" rtlCol="0" anchor="ctr"/>
-          <a:lstStyle/>
-          <a:p>
-            <a:pPr algn="ctr">
-              <a:buNone/>
-            </a:pPr>
-            <a:r>
-              <a:rPr lang="zh-CN" sz="1300" b="1" dirty="0">
-                <a:solidFill>
-                  <a:srgbClr val="4F46E5"/>
-                </a:solidFill>
-                <a:latin typeface="微软雅黑" panose="020B0503020204020204" pitchFamily="34" charset="-122"/>
-                <a:ea typeface="微软雅黑" panose="020B0503020204020204" pitchFamily="34" charset="-122"/>
-                <a:cs typeface="微软雅黑" panose="020B0503020204020204" pitchFamily="34" charset="-120"/>
-              </a:rPr>
-              <a:t>第 2 次</a:t>
-            </a:r>
-          </a:p>
-        </p:txBody>
-      </p:sp>
-      <p:sp>
-        <p:nvSpPr>
-          <p:cNvPr id="20" name="Text 19"/>
-          <p:cNvSpPr/>
-          <p:nvPr/>
-        </p:nvSpPr>
-        <p:spPr>
-          <a:xfrm>
-            <a:off x="1600200" y="3438144"/>
-            <a:ext cx="1417320" cy="1481328"/>
-          </a:xfrm>
-          <a:prstGeom prst="rect">
-            <a:avLst/>
-          </a:prstGeom>
-          <a:noFill/>
-          <a:ln>
-            <a:noFill/>
-          </a:ln>
-        </p:spPr>
-        <p:txBody>
-          <a:bodyPr wrap="square" lIns="0" tIns="0" rIns="0" bIns="0" rtlCol="0" anchor="ctr"/>
-          <a:lstStyle/>
-          <a:p>
-            <a:pPr>
-              <a:lnSpc>
-                <a:spcPct val="120000"/>
-              </a:lnSpc>
-              <a:buNone/>
-            </a:pPr>
-            <a:r>
-              <a:rPr lang="zh-CN" sz="1000" dirty="0">
-                <a:solidFill>
-                  <a:srgbClr val="334155"/>
-                </a:solidFill>
-                <a:latin typeface="微软雅黑" panose="020B0503020204020204" pitchFamily="34" charset="-122"/>
-                <a:ea typeface="微软雅黑" panose="020B0503020204020204" pitchFamily="34" charset="-122"/>
-                <a:cs typeface="微软雅黑" panose="020B0503020204020204" pitchFamily="34" charset="-120"/>
-              </a:rPr>
-              <a:t>第 4 教学周
-10/14（周三）20:00–21:10</a:t>
-            </a:r>
-          </a:p>
-        </p:txBody>
-      </p:sp>
-      <p:sp>
-        <p:nvSpPr>
-          <p:cNvPr id="21" name="Text 20"/>
-          <p:cNvSpPr/>
-          <p:nvPr/>
-        </p:nvSpPr>
-        <p:spPr>
-          <a:xfrm>
-            <a:off x="3063240" y="3438144"/>
-            <a:ext cx="1920240" cy="1481328"/>
-          </a:xfrm>
-          <a:prstGeom prst="rect">
-            <a:avLst/>
-          </a:prstGeom>
-          <a:noFill/>
-          <a:ln>
-            <a:noFill/>
-          </a:ln>
-        </p:spPr>
-        <p:txBody>
-          <a:bodyPr wrap="square" lIns="0" tIns="0" rIns="0" bIns="0" rtlCol="0" anchor="ctr"/>
-          <a:lstStyle/>
-          <a:p>
-            <a:pPr>
-              <a:lnSpc>
-                <a:spcPct val="120000"/>
-              </a:lnSpc>
-              <a:buNone/>
-            </a:pPr>
-            <a:r>
-              <a:rPr lang="zh-CN" sz="1000" dirty="0">
-                <a:solidFill>
-                  <a:srgbClr val="334155"/>
-                </a:solidFill>
-                <a:latin typeface="微软雅黑" panose="020B0503020204020204" pitchFamily="34" charset="-122"/>
-                <a:ea typeface="微软雅黑" panose="020B0503020204020204" pitchFamily="34" charset="-122"/>
-                <a:cs typeface="微软雅黑" panose="020B0503020204020204" pitchFamily="34" charset="-120"/>
-              </a:rPr>
-              <a:t>寝室
-（李雨鑫宿舍）</a:t>
-            </a:r>
-          </a:p>
-        </p:txBody>
-      </p:sp>
-      <p:sp>
-        <p:nvSpPr>
-          <p:cNvPr id="22" name="Text 21"/>
-          <p:cNvSpPr/>
-          <p:nvPr/>
-        </p:nvSpPr>
-        <p:spPr>
-          <a:xfrm>
-            <a:off x="5029200" y="3438144"/>
-            <a:ext cx="2834640" cy="1481328"/>
-          </a:xfrm>
-          <a:prstGeom prst="rect">
-            <a:avLst/>
-          </a:prstGeom>
-          <a:noFill/>
-          <a:ln>
-            <a:noFill/>
-          </a:ln>
-        </p:spPr>
-        <p:txBody>
-          <a:bodyPr wrap="square" lIns="0" tIns="0" rIns="0" bIns="0" rtlCol="0" anchor="ctr"/>
-          <a:lstStyle/>
-          <a:p>
-            <a:pPr>
-              <a:lnSpc>
-                <a:spcPct val="120000"/>
-              </a:lnSpc>
-              <a:buNone/>
-            </a:pPr>
-            <a:r>
-              <a:rPr lang="zh-CN" sz="1000" dirty="0">
-                <a:solidFill>
-                  <a:srgbClr val="334155"/>
-                </a:solidFill>
-                <a:latin typeface="微软雅黑" panose="020B0503020204020204" pitchFamily="34" charset="-122"/>
-                <a:ea typeface="微软雅黑" panose="020B0503020204020204" pitchFamily="34" charset="-122"/>
-                <a:cs typeface="微软雅黑" panose="020B0503020204020204" pitchFamily="34" charset="-120"/>
-              </a:rPr>
-              <a:t>① 落实 10/14 项目计划评审意见
-② 资源过载问题
-③ 可行性研究启动</a:t>
-            </a:r>
-          </a:p>
-        </p:txBody>
-      </p:sp>
-      <p:sp>
-        <p:nvSpPr>
-          <p:cNvPr id="23" name="Text 22"/>
-          <p:cNvSpPr/>
-          <p:nvPr/>
-        </p:nvSpPr>
-        <p:spPr>
-          <a:xfrm>
-            <a:off x="7909560" y="3438144"/>
-            <a:ext cx="3566160" cy="1481328"/>
-          </a:xfrm>
-          <a:prstGeom prst="rect">
-            <a:avLst/>
-          </a:prstGeom>
-          <a:noFill/>
-          <a:ln>
-            <a:noFill/>
-          </a:ln>
-        </p:spPr>
-        <p:txBody>
-          <a:bodyPr wrap="square" lIns="0" tIns="0" rIns="0" bIns="0" rtlCol="0" anchor="ctr"/>
-          <a:lstStyle/>
-          <a:p>
-            <a:pPr>
-              <a:lnSpc>
-                <a:spcPct val="120000"/>
-              </a:lnSpc>
-              <a:buNone/>
-            </a:pPr>
-            <a:r>
-              <a:rPr lang="zh-CN" sz="1000" dirty="0">
-                <a:solidFill>
-                  <a:srgbClr val="334155"/>
-                </a:solidFill>
-                <a:latin typeface="微软雅黑" panose="020B0503020204020204" pitchFamily="34" charset="-122"/>
-                <a:ea typeface="微软雅黑" panose="020B0503020204020204" pitchFamily="34" charset="-122"/>
-                <a:cs typeface="微软雅黑" panose="020B0503020204020204" pitchFamily="34" charset="-120"/>
-              </a:rPr>
-              <a:t>① 计划书升版 V3.0，补齐甘特图与负载分析
-② 编码提前至 W9；峰值周由两人共同承担
-③ 可行性报告 10/21 提交</a:t>
-            </a:r>
-          </a:p>
-        </p:txBody>
-      </p:sp>
-      <p:sp>
-        <p:nvSpPr>
-          <p:cNvPr id="24" name="Shape 23"/>
-          <p:cNvSpPr/>
-          <p:nvPr/>
-        </p:nvSpPr>
-        <p:spPr>
-          <a:xfrm>
-            <a:off x="548640" y="4919472"/>
-            <a:ext cx="11064240" cy="0"/>
-          </a:xfrm>
-          <a:prstGeom prst="line">
-            <a:avLst/>
-          </a:prstGeom>
-          <a:noFill/>
-          <a:ln w="12700">
-            <a:solidFill>
-              <a:srgbClr val="E8EDF5"/>
-            </a:solidFill>
-            <a:prstDash val="solid"/>
-          </a:ln>
-        </p:spPr>
-      </p:sp>
-      <p:sp>
-        <p:nvSpPr>
-          <p:cNvPr id="25" name="Shape 24"/>
-          <p:cNvSpPr/>
-          <p:nvPr/>
-        </p:nvSpPr>
-        <p:spPr>
-          <a:xfrm>
-            <a:off x="548640" y="4828032"/>
-            <a:ext cx="3538728" cy="1389888"/>
-          </a:xfrm>
-          <a:prstGeom prst="roundRect">
-            <a:avLst>
-              <a:gd name="adj" fmla="val 9210"/>
-            </a:avLst>
-          </a:prstGeom>
-          <a:solidFill>
-            <a:srgbClr val="EEF2FF"/>
-          </a:solidFill>
-          <a:ln w="12700">
-            <a:solidFill>
-              <a:srgbClr val="C7D2FE"/>
-            </a:solidFill>
-            <a:prstDash val="solid"/>
-          </a:ln>
-          <a:effectLst>
-            <a:outerShdw blurRad="127000" dist="38100" dir="5400000" algn="bl" rotWithShape="0">
-              <a:srgbClr val="0F172A">
-                <a:alpha val="6000"/>
-              </a:srgbClr>
-            </a:outerShdw>
-          </a:effectLst>
-        </p:spPr>
-      </p:sp>
-      <p:sp>
-        <p:nvSpPr>
-          <p:cNvPr id="26" name="Text 25"/>
-          <p:cNvSpPr/>
-          <p:nvPr/>
-        </p:nvSpPr>
-        <p:spPr>
-          <a:xfrm>
-            <a:off x="777240" y="4919472"/>
-            <a:ext cx="3081528" cy="1207008"/>
-          </a:xfrm>
-          <a:prstGeom prst="rect">
-            <a:avLst/>
-          </a:prstGeom>
-          <a:noFill/>
-          <a:ln>
-            <a:noFill/>
-          </a:ln>
-        </p:spPr>
-        <p:txBody>
-          <a:bodyPr wrap="square" lIns="0" tIns="0" rIns="0" bIns="0" rtlCol="0" anchor="t"/>
-          <a:lstStyle/>
-          <a:p>
-            <a:pPr>
-              <a:spcAft>
-                <a:spcPts val="400"/>
-              </a:spcAft>
-              <a:buNone/>
-            </a:pPr>
-            <a:r>
-              <a:rPr lang="zh-CN" sz="1250" b="1" dirty="0">
-                <a:solidFill>
-                  <a:srgbClr val="4F46E5"/>
-                </a:solidFill>
-                <a:latin typeface="微软雅黑" panose="020B0503020204020204" pitchFamily="34" charset="-122"/>
-                <a:ea typeface="微软雅黑" panose="020B0503020204020204" pitchFamily="34" charset="-122"/>
-                <a:cs typeface="微软雅黑" panose="020B0503020204020204" pitchFamily="34" charset="-120"/>
-              </a:rPr>
-              <a:t>纪要四要素</a:t>
-            </a:r>
-          </a:p>
-          <a:p>
-            <a:pPr>
-              <a:lnSpc>
-                <a:spcPct val="125000"/>
-              </a:lnSpc>
-              <a:buNone/>
-            </a:pPr>
-            <a:r>
-              <a:rPr lang="zh-CN" sz="1000" dirty="0">
-                <a:solidFill>
-                  <a:srgbClr val="334155"/>
-                </a:solidFill>
-                <a:latin typeface="微软雅黑" panose="020B0503020204020204" pitchFamily="34" charset="-122"/>
-                <a:ea typeface="微软雅黑" panose="020B0503020204020204" pitchFamily="34" charset="-122"/>
-                <a:cs typeface="微软雅黑" panose="020B0503020204020204" pitchFamily="34" charset="-120"/>
-              </a:rPr>
-              <a:t>会议基本信息 · 议题讨论要点 · 形成的决议 · 待办事项（含责任人与期限）</a:t>
-            </a:r>
-          </a:p>
-        </p:txBody>
-      </p:sp>
-      <p:sp>
-        <p:nvSpPr>
-          <p:cNvPr id="27" name="Shape 26"/>
-          <p:cNvSpPr/>
-          <p:nvPr/>
-        </p:nvSpPr>
-        <p:spPr>
-          <a:xfrm>
-            <a:off x="4325112" y="4828032"/>
-            <a:ext cx="3538728" cy="1389888"/>
-          </a:xfrm>
-          <a:prstGeom prst="roundRect">
-            <a:avLst>
-              <a:gd name="adj" fmla="val 9210"/>
-            </a:avLst>
-          </a:prstGeom>
-          <a:solidFill>
-            <a:srgbClr val="E0F2FE"/>
-          </a:solidFill>
-          <a:ln w="12700">
-            <a:solidFill>
-              <a:srgbClr val="BAE6FD"/>
-            </a:solidFill>
-            <a:prstDash val="solid"/>
-          </a:ln>
-          <a:effectLst>
-            <a:outerShdw blurRad="127000" dist="38100" dir="5400000" algn="bl" rotWithShape="0">
-              <a:srgbClr val="0F172A">
-                <a:alpha val="6000"/>
-              </a:srgbClr>
-            </a:outerShdw>
-          </a:effectLst>
-        </p:spPr>
-      </p:sp>
-      <p:sp>
-        <p:nvSpPr>
-          <p:cNvPr id="28" name="Text 27"/>
-          <p:cNvSpPr/>
-          <p:nvPr/>
-        </p:nvSpPr>
-        <p:spPr>
-          <a:xfrm>
-            <a:off x="4553712" y="4919472"/>
-            <a:ext cx="3081528" cy="1207008"/>
-          </a:xfrm>
-          <a:prstGeom prst="rect">
-            <a:avLst/>
-          </a:prstGeom>
-          <a:noFill/>
-          <a:ln>
-            <a:noFill/>
-          </a:ln>
-        </p:spPr>
-        <p:txBody>
-          <a:bodyPr wrap="square" lIns="0" tIns="0" rIns="0" bIns="0" rtlCol="0" anchor="t"/>
-          <a:lstStyle/>
-          <a:p>
-            <a:pPr>
-              <a:spcAft>
-                <a:spcPts val="400"/>
-              </a:spcAft>
-              <a:buNone/>
-            </a:pPr>
-            <a:r>
-              <a:rPr lang="zh-CN" sz="1250" b="1" dirty="0">
-                <a:solidFill>
-                  <a:srgbClr val="0EA5E9"/>
-                </a:solidFill>
-                <a:latin typeface="微软雅黑" panose="020B0503020204020204" pitchFamily="34" charset="-122"/>
-                <a:ea typeface="微软雅黑" panose="020B0503020204020204" pitchFamily="34" charset="-122"/>
-                <a:cs typeface="微软雅黑" panose="020B0503020204020204" pitchFamily="34" charset="-120"/>
-              </a:rPr>
-              <a:t>归档要求</a:t>
-            </a:r>
-          </a:p>
-          <a:p>
-            <a:pPr>
-              <a:lnSpc>
-                <a:spcPct val="125000"/>
-              </a:lnSpc>
-              <a:buNone/>
-            </a:pPr>
-            <a:r>
-              <a:rPr lang="zh-CN" sz="1000" dirty="0">
-                <a:solidFill>
-                  <a:srgbClr val="334155"/>
-                </a:solidFill>
-                <a:latin typeface="微软雅黑" panose="020B0503020204020204" pitchFamily="34" charset="-122"/>
-                <a:ea typeface="微软雅黑" panose="020B0503020204020204" pitchFamily="34" charset="-122"/>
-                <a:cs typeface="微软雅黑" panose="020B0503020204020204" pitchFamily="34" charset="-120"/>
-              </a:rPr>
-              <a:t>会后 24 小时内完成，经组长审核后归档至 Git 仓库 /process 目录</a:t>
-            </a:r>
-          </a:p>
-        </p:txBody>
-      </p:sp>
-      <p:sp>
-        <p:nvSpPr>
-          <p:cNvPr id="29" name="Shape 28"/>
-          <p:cNvSpPr/>
-          <p:nvPr/>
-        </p:nvSpPr>
-        <p:spPr>
-          <a:xfrm>
-            <a:off x="8101584" y="4828032"/>
-            <a:ext cx="3511296" cy="1389888"/>
-          </a:xfrm>
-          <a:prstGeom prst="roundRect">
-            <a:avLst>
-              <a:gd name="adj" fmla="val 9210"/>
-            </a:avLst>
-          </a:prstGeom>
-          <a:solidFill>
-            <a:srgbClr val="ECFDF5"/>
-          </a:solidFill>
-          <a:ln w="12700">
-            <a:solidFill>
-              <a:srgbClr val="A7F3D0"/>
-            </a:solidFill>
-            <a:prstDash val="solid"/>
-          </a:ln>
-          <a:effectLst>
-            <a:outerShdw blurRad="127000" dist="38100" dir="5400000" algn="bl" rotWithShape="0">
-              <a:srgbClr val="0F172A">
-                <a:alpha val="6000"/>
-              </a:srgbClr>
-            </a:outerShdw>
-          </a:effectLst>
-        </p:spPr>
-      </p:sp>
-      <p:sp>
-        <p:nvSpPr>
-          <p:cNvPr id="30" name="Text 29"/>
-          <p:cNvSpPr/>
-          <p:nvPr/>
-        </p:nvSpPr>
-        <p:spPr>
-          <a:xfrm>
-            <a:off x="8330184" y="4919472"/>
-            <a:ext cx="3054096" cy="1207008"/>
-          </a:xfrm>
-          <a:prstGeom prst="rect">
-            <a:avLst/>
-          </a:prstGeom>
-          <a:noFill/>
-          <a:ln>
-            <a:noFill/>
-          </a:ln>
-        </p:spPr>
-        <p:txBody>
-          <a:bodyPr wrap="square" lIns="0" tIns="0" rIns="0" bIns="0" rtlCol="0" anchor="t"/>
-          <a:lstStyle/>
-          <a:p>
-            <a:pPr>
-              <a:spcAft>
-                <a:spcPts val="400"/>
-              </a:spcAft>
-              <a:buNone/>
-            </a:pPr>
-            <a:r>
-              <a:rPr lang="zh-CN" sz="1250" b="1" dirty="0">
-                <a:solidFill>
-                  <a:srgbClr val="059669"/>
-                </a:solidFill>
-                <a:latin typeface="微软雅黑" panose="020B0503020204020204" pitchFamily="34" charset="-122"/>
-                <a:ea typeface="微软雅黑" panose="020B0503020204020204" pitchFamily="34" charset="-122"/>
-                <a:cs typeface="微软雅黑" panose="020B0503020204020204" pitchFamily="34" charset="-120"/>
-              </a:rPr>
-              <a:t>闭环管理</a:t>
-            </a:r>
-          </a:p>
-          <a:p>
-            <a:pPr>
-              <a:lnSpc>
-                <a:spcPct val="125000"/>
-              </a:lnSpc>
-              <a:buNone/>
-            </a:pPr>
-            <a:r>
-              <a:rPr lang="zh-CN" sz="1000" dirty="0">
-                <a:solidFill>
-                  <a:srgbClr val="334155"/>
-                </a:solidFill>
-                <a:latin typeface="微软雅黑" panose="020B0503020204020204" pitchFamily="34" charset="-122"/>
-                <a:ea typeface="微软雅黑" panose="020B0503020204020204" pitchFamily="34" charset="-122"/>
-                <a:cs typeface="微软雅黑" panose="020B0503020204020204" pitchFamily="34" charset="-120"/>
-              </a:rPr>
-              <a:t>下次例会开始时逐项核对上次待办完成情况，未完成项说明原因并顺延</a:t>
-            </a:r>
-          </a:p>
-        </p:txBody>
-      </p:sp>
-      <p:sp>
-        <p:nvSpPr>
-          <p:cNvPr id="31" name="Text 1"/>
-          <p:cNvSpPr/>
-          <p:nvPr/>
-        </p:nvSpPr>
-        <p:spPr>
-          <a:xfrm>
-            <a:off x="548640" y="6510528"/>
-            <a:ext cx="5486400" cy="256032"/>
-          </a:xfrm>
-          <a:prstGeom prst="rect">
-            <a:avLst/>
-          </a:prstGeom>
-          <a:noFill/>
-          <a:ln>
-            <a:noFill/>
-          </a:ln>
-        </p:spPr>
-        <p:txBody>
-          <a:bodyPr wrap="square" lIns="0" tIns="0" rIns="0" bIns="0" rtlCol="0" anchor="ctr"/>
-          <a:lstStyle/>
-          <a:p>
-            <a:pPr>
-              <a:buNone/>
-            </a:pPr>
-            <a:r>
-              <a:rPr lang="zh-CN" sz="1000" dirty="0">
-                <a:solidFill>
-                  <a:srgbClr val="94A3B8"/>
-                </a:solidFill>
-                <a:latin typeface="微软雅黑" panose="020B0503020204020204" pitchFamily="34" charset="-122"/>
-                <a:ea typeface="微软雅黑" panose="020B0503020204020204" pitchFamily="34" charset="-122"/>
-                <a:cs typeface="微软雅黑" panose="020B0503020204020204" pitchFamily="34" charset="-120"/>
-              </a:rPr>
-              <a:t>校园互助平台 · 项目方案</a:t>
-            </a:r>
-          </a:p>
-        </p:txBody>
-      </p:sp>
-      <p:sp>
-        <p:nvSpPr>
-          <p:cNvPr id="32" name="Text 2"/>
-          <p:cNvSpPr/>
-          <p:nvPr/>
-        </p:nvSpPr>
-        <p:spPr>
-          <a:xfrm>
-            <a:off x="6126480" y="6510528"/>
-            <a:ext cx="5486400" cy="256032"/>
-          </a:xfrm>
-          <a:prstGeom prst="rect">
-            <a:avLst/>
-          </a:prstGeom>
-          <a:noFill/>
-          <a:ln>
-            <a:noFill/>
-          </a:ln>
-        </p:spPr>
-        <p:txBody>
-          <a:bodyPr wrap="square" lIns="0" tIns="0" rIns="0" bIns="0" rtlCol="0" anchor="ctr"/>
-          <a:lstStyle/>
-          <a:p>
-            <a:pPr algn="r">
-              <a:buNone/>
-            </a:pPr>
-            <a:r>
-              <a:rPr lang="zh-CN" sz="1000" dirty="0">
-                <a:solidFill>
-                  <a:srgbClr val="94A3B8"/>
-                </a:solidFill>
-                <a:latin typeface="微软雅黑" panose="020B0503020204020204" pitchFamily="34" charset="-122"/>
-                <a:ea typeface="微软雅黑" panose="020B0503020204020204" pitchFamily="34" charset="-122"/>
-                <a:cs typeface="微软雅黑" panose="020B0503020204020204" pitchFamily="34" charset="-120"/>
-              </a:rPr>
-              <a:t>27</a:t>
-            </a:r>
+              <a:t>微信小程序 · 任务集市 · 信誉体系 · 校园专属</a:t>
+            </a:r>
+            <a:endParaRPr lang="en-US" sz="1600" dirty="0"/>
+          </a:p>
+        </p:txBody>
+      </p:sp>
+      <p:sp>
+        <p:nvSpPr>
+          <p:cNvPr id="8" name="Text 4"/>
+          <p:cNvSpPr/>
+          <p:nvPr/>
+        </p:nvSpPr>
+        <p:spPr>
+          <a:xfrm>
+            <a:off x="1828800" y="4572000"/>
+            <a:ext cx="8503920" cy="457200"/>
+          </a:xfrm>
+          <a:prstGeom prst="rect">
+            <a:avLst/>
+          </a:prstGeom>
+          <a:noFill/>
+        </p:spPr>
+        <p:txBody>
+          <a:bodyPr wrap="square" lIns="0" tIns="0" rIns="0" bIns="0" rtlCol="0" anchor="ctr"/>
+          <a:lstStyle/>
+          <a:p>
+            <a:pPr marL="0" indent="0" algn="ctr">
+              <a:buNone/>
+            </a:pPr>
+            <a:r>
+              <a:rPr lang="en-US" sz="1800" dirty="0">
+                <a:solidFill>
+                  <a:srgbClr val="FFFFFF">
+                    <a:alpha val="80000"/>
+                  </a:srgbClr>
+                </a:solidFill>
+                <a:latin typeface="微软雅黑" panose="020B0503020204020204" pitchFamily="34" charset="-122"/>
+                <a:ea typeface="微软雅黑" panose="020B0503020204020204" pitchFamily="34" charset="-122"/>
+                <a:cs typeface="微软雅黑" panose="020B0503020204020204" pitchFamily="34" charset="-120"/>
+              </a:rPr>
+              <a:t>让每一次互助都简单、可信、有温度</a:t>
+            </a:r>
+            <a:endParaRPr lang="en-US" sz="1800" dirty="0"/>
           </a:p>
         </p:txBody>
       </p:sp>
@@ -23630,6 +24050,10 @@
             <a:prstDash val="solid"/>
           </a:ln>
         </p:spPr>
+        <p:txBody>
+          <a:bodyPr/>
+          <a:p/>
+        </p:txBody>
       </p:sp>
       <p:sp>
         <p:nvSpPr>
@@ -23704,6 +24128,10 @@
             </a:outerShdw>
           </a:effectLst>
         </p:spPr>
+        <p:txBody>
+          <a:bodyPr/>
+          <a:p/>
+        </p:txBody>
       </p:sp>
       <p:sp>
         <p:nvSpPr>
@@ -23767,6 +24195,10 @@
             <a:prstDash val="solid"/>
           </a:ln>
         </p:spPr>
+        <p:txBody>
+          <a:bodyPr/>
+          <a:p/>
+        </p:txBody>
       </p:sp>
       <p:sp>
         <p:nvSpPr>
@@ -23891,6 +24323,10 @@
             </a:outerShdw>
           </a:effectLst>
         </p:spPr>
+        <p:txBody>
+          <a:bodyPr/>
+          <a:p/>
+        </p:txBody>
       </p:sp>
       <p:sp>
         <p:nvSpPr>
@@ -23954,6 +24390,10 @@
             <a:prstDash val="solid"/>
           </a:ln>
         </p:spPr>
+        <p:txBody>
+          <a:bodyPr/>
+          <a:p/>
+        </p:txBody>
       </p:sp>
       <p:sp>
         <p:nvSpPr>
@@ -24078,6 +24518,10 @@
             </a:outerShdw>
           </a:effectLst>
         </p:spPr>
+        <p:txBody>
+          <a:bodyPr/>
+          <a:p/>
+        </p:txBody>
       </p:sp>
       <p:sp>
         <p:nvSpPr>
@@ -24141,6 +24585,10 @@
             <a:prstDash val="solid"/>
           </a:ln>
         </p:spPr>
+        <p:txBody>
+          <a:bodyPr/>
+          <a:p/>
+        </p:txBody>
       </p:sp>
       <p:sp>
         <p:nvSpPr>
@@ -24265,6 +24713,10 @@
             </a:outerShdw>
           </a:effectLst>
         </p:spPr>
+        <p:txBody>
+          <a:bodyPr/>
+          <a:p/>
+        </p:txBody>
       </p:sp>
       <p:sp>
         <p:nvSpPr>
@@ -24477,6 +24929,10 @@
             <a:prstDash val="solid"/>
           </a:ln>
         </p:spPr>
+        <p:txBody>
+          <a:bodyPr/>
+          <a:p/>
+        </p:txBody>
       </p:sp>
       <p:sp>
         <p:nvSpPr>
@@ -24575,6 +25031,10 @@
             </a:outerShdw>
           </a:effectLst>
         </p:spPr>
+        <p:txBody>
+          <a:bodyPr/>
+          <a:p/>
+        </p:txBody>
       </p:sp>
       <p:sp>
         <p:nvSpPr>
@@ -24792,6 +25252,10 @@
             <a:prstDash val="solid"/>
           </a:ln>
         </p:spPr>
+        <p:txBody>
+          <a:bodyPr/>
+          <a:p/>
+        </p:txBody>
       </p:sp>
       <p:sp>
         <p:nvSpPr>
@@ -24830,6 +25294,10 @@
             </a:outerShdw>
           </a:effectLst>
         </p:spPr>
+        <p:txBody>
+          <a:bodyPr/>
+          <a:p/>
+        </p:txBody>
       </p:sp>
       <p:sp>
         <p:nvSpPr>
@@ -24853,6 +25321,10 @@
             <a:srgbClr val="EEF2FF"/>
           </a:solidFill>
         </p:spPr>
+        <p:txBody>
+          <a:bodyPr/>
+          <a:p/>
+        </p:txBody>
       </p:sp>
       <p:sp>
         <p:nvSpPr>
@@ -24964,6 +25436,10 @@
             <a:prstDash val="solid"/>
           </a:ln>
         </p:spPr>
+        <p:txBody>
+          <a:bodyPr/>
+          <a:p/>
+        </p:txBody>
       </p:sp>
       <p:sp>
         <p:nvSpPr>
@@ -25047,6 +25523,10 @@
             </a:outerShdw>
           </a:effectLst>
         </p:spPr>
+        <p:txBody>
+          <a:bodyPr/>
+          <a:p/>
+        </p:txBody>
       </p:sp>
       <p:sp>
         <p:nvSpPr>
@@ -25070,6 +25550,10 @@
             <a:srgbClr val="EEF2FF"/>
           </a:solidFill>
         </p:spPr>
+        <p:txBody>
+          <a:bodyPr/>
+          <a:p/>
+        </p:txBody>
       </p:sp>
       <p:sp>
         <p:nvSpPr>
@@ -25181,6 +25665,10 @@
             <a:prstDash val="solid"/>
           </a:ln>
         </p:spPr>
+        <p:txBody>
+          <a:bodyPr/>
+          <a:p/>
+        </p:txBody>
       </p:sp>
       <p:sp>
         <p:nvSpPr>
@@ -25264,6 +25752,10 @@
             </a:outerShdw>
           </a:effectLst>
         </p:spPr>
+        <p:txBody>
+          <a:bodyPr/>
+          <a:p/>
+        </p:txBody>
       </p:sp>
       <p:sp>
         <p:nvSpPr>
@@ -25287,6 +25779,10 @@
             <a:srgbClr val="EEF2FF"/>
           </a:solidFill>
         </p:spPr>
+        <p:txBody>
+          <a:bodyPr/>
+          <a:p/>
+        </p:txBody>
       </p:sp>
       <p:sp>
         <p:nvSpPr>
@@ -25398,6 +25894,10 @@
             <a:prstDash val="solid"/>
           </a:ln>
         </p:spPr>
+        <p:txBody>
+          <a:bodyPr/>
+          <a:p/>
+        </p:txBody>
       </p:sp>
       <p:sp>
         <p:nvSpPr>
@@ -25617,6 +26117,10 @@
             <a:prstDash val="solid"/>
           </a:ln>
         </p:spPr>
+        <p:txBody>
+          <a:bodyPr/>
+          <a:p/>
+        </p:txBody>
       </p:sp>
       <p:sp>
         <p:nvSpPr>
@@ -25651,6 +26155,10 @@
             </a:outerShdw>
           </a:effectLst>
         </p:spPr>
+        <p:txBody>
+          <a:bodyPr/>
+          <a:p/>
+        </p:txBody>
       </p:sp>
       <p:sp>
         <p:nvSpPr>
@@ -25712,6 +26220,10 @@
             <a:prstDash val="solid"/>
           </a:ln>
         </p:spPr>
+        <p:txBody>
+          <a:bodyPr/>
+          <a:p/>
+        </p:txBody>
       </p:sp>
       <p:sp>
         <p:nvSpPr>
@@ -25907,6 +26419,10 @@
             </a:outerShdw>
           </a:effectLst>
         </p:spPr>
+        <p:txBody>
+          <a:bodyPr/>
+          <a:p/>
+        </p:txBody>
       </p:sp>
       <p:sp>
         <p:nvSpPr>
@@ -25968,6 +26484,10 @@
             <a:prstDash val="solid"/>
           </a:ln>
         </p:spPr>
+        <p:txBody>
+          <a:bodyPr/>
+          <a:p/>
+        </p:txBody>
       </p:sp>
       <p:sp>
         <p:nvSpPr>
@@ -26298,6 +26818,10 @@
             <a:prstDash val="solid"/>
           </a:ln>
         </p:spPr>
+        <p:txBody>
+          <a:bodyPr/>
+          <a:p/>
+        </p:txBody>
       </p:sp>
       <p:sp>
         <p:nvSpPr>
@@ -26396,6 +26920,10 @@
             </a:outerShdw>
           </a:effectLst>
         </p:spPr>
+        <p:txBody>
+          <a:bodyPr/>
+          <a:p/>
+        </p:txBody>
       </p:sp>
       <p:sp>
         <p:nvSpPr>
@@ -26484,6 +27012,10 @@
             </a:outerShdw>
           </a:effectLst>
         </p:spPr>
+        <p:txBody>
+          <a:bodyPr/>
+          <a:p/>
+        </p:txBody>
       </p:sp>
       <p:sp>
         <p:nvSpPr>
@@ -26707,6 +27239,10 @@
             <a:prstDash val="solid"/>
           </a:ln>
         </p:spPr>
+        <p:txBody>
+          <a:bodyPr/>
+          <a:p/>
+        </p:txBody>
       </p:sp>
       <p:sp>
         <p:nvSpPr>
@@ -26805,6 +27341,10 @@
             </a:outerShdw>
           </a:effectLst>
         </p:spPr>
+        <p:txBody>
+          <a:bodyPr/>
+          <a:p/>
+        </p:txBody>
       </p:sp>
       <p:sp>
         <p:nvSpPr>
@@ -26901,6 +27441,10 @@
             </a:outerShdw>
           </a:effectLst>
         </p:spPr>
+        <p:txBody>
+          <a:bodyPr/>
+          <a:p/>
+        </p:txBody>
       </p:sp>
       <p:sp>
         <p:nvSpPr>
@@ -26997,6 +27541,10 @@
             </a:outerShdw>
           </a:effectLst>
         </p:spPr>
+        <p:txBody>
+          <a:bodyPr/>
+          <a:p/>
+        </p:txBody>
       </p:sp>
       <p:sp>
         <p:nvSpPr>

--- a/assets/SE2026-G22-校园互助平台-项目方案PPT.pptx
+++ b/assets/SE2026-G22-校园互助平台-项目方案PPT.pptx
@@ -17693,30 +17693,6 @@
           </a:p>
         </p:txBody>
       </p:sp>
-      <p:pic>
-        <p:nvPicPr>
-          <p:cNvPr id="5" name="Picture 4" descr="gantt-projectlibre.png"/>
-          <p:cNvPicPr>
-            <a:picLocks noChangeAspect="1"/>
-          </p:cNvPicPr>
-          <p:nvPr/>
-        </p:nvPicPr>
-        <p:blipFill>
-          <a:blip r:embed="rId4"/>
-          <a:stretch>
-            <a:fillRect/>
-          </a:stretch>
-        </p:blipFill>
-        <p:spPr>
-          <a:xfrm>
-            <a:off x="457200" y="1664208"/>
-            <a:ext cx="6939408" cy="4434840"/>
-          </a:xfrm>
-          <a:prstGeom prst="rect">
-            <a:avLst/>
-          </a:prstGeom>
-        </p:spPr>
-      </p:pic>
       <p:sp>
         <p:nvSpPr>
           <p:cNvPr id="12" name="Shape 4"/>
@@ -17940,7 +17916,7 @@
                 <a:ea typeface="微软雅黑" panose="020B0503020204020204" pitchFamily="34" charset="-122"/>
                 <a:cs typeface="微软雅黑" panose="020B0503020204020204" pitchFamily="34" charset="-120"/>
               </a:rPr>
-              <a:t>9 个工作包 + 38 项任务 + 14 个里程碑</a:t>
+              <a:t>9 个工作包 + 44 项任务 + 14 个里程碑</a:t>
             </a:r>
           </a:p>
           <a:p>
@@ -18112,7 +18088,7 @@
                 <a:ea typeface="微软雅黑" panose="020B0503020204020204" pitchFamily="34" charset="-122"/>
                 <a:cs typeface="微软雅黑" panose="020B0503020204020204" pitchFamily="34" charset="-120"/>
               </a:rPr>
-              <a:t>※ 完整可读版本见随附「甘特图-ProjectLibre风格.png」（3045×1791）与 MSPDI 工程文件</a:t>
+              <a:t>※ 完整可读版本见随附「甘特图-ProjectLibre风格.png」（3045×2108）与 MSPDI 工程文件</a:t>
             </a:r>
           </a:p>
         </p:txBody>
@@ -18197,6 +18173,30 @@
           </a:p>
         </p:txBody>
       </p:sp>
+      <p:pic>
+        <p:nvPicPr>
+          <p:cNvPr id="13" name="Picture 12" descr="gantt-projectlibre.png"/>
+          <p:cNvPicPr>
+            <a:picLocks noChangeAspect="1"/>
+          </p:cNvPicPr>
+          <p:nvPr/>
+        </p:nvPicPr>
+        <p:blipFill>
+          <a:blip r:embed="rId5"/>
+          <a:stretch>
+            <a:fillRect/>
+          </a:stretch>
+        </p:blipFill>
+        <p:spPr>
+          <a:xfrm>
+            <a:off x="457200" y="1645920"/>
+            <a:ext cx="6472156" cy="4480560"/>
+          </a:xfrm>
+          <a:prstGeom prst="rect">
+            <a:avLst/>
+          </a:prstGeom>
+        </p:spPr>
+      </p:pic>
     </p:spTree>
   </p:cSld>
   <p:clrMapOvr>

--- a/assets/SE2026-G22-校园互助平台-项目方案PPT.pptx
+++ b/assets/SE2026-G22-校园互助平台-项目方案PPT.pptx
@@ -18182,7 +18182,7 @@
           <p:nvPr/>
         </p:nvPicPr>
         <p:blipFill>
-          <a:blip r:embed="rId5"/>
+          <a:blip r:embed="rId6"/>
           <a:stretch>
             <a:fillRect/>
           </a:stretch>

--- a/assets/SE2026-G22-校园互助平台-项目方案PPT.pptx
+++ b/assets/SE2026-G22-校园互助平台-项目方案PPT.pptx
@@ -18182,7 +18182,7 @@
           <p:nvPr/>
         </p:nvPicPr>
         <p:blipFill>
-          <a:blip r:embed="rId6"/>
+          <a:blip r:embed="rId7"/>
           <a:stretch>
             <a:fillRect/>
           </a:stretch>

--- a/assets/SE2026-G22-校园互助平台-项目方案PPT.pptx
+++ b/assets/SE2026-G22-校园互助平台-项目方案PPT.pptx
@@ -2194,7 +2194,7 @@
           <a:p/>
           <a:p>
             <a:r>
-              <a:t>这一页把 15 项阶段交付物逐项落到人。左边是十个阶段各自的交付物和责任人，可以看到每个阶段的交付物都有明确的主责人，不存在无人负责的情况。右边是贡献汇总：总工作量 62 人天，我承担 34.10 人天占 55.0%，李雨鑫承担 27.90 人天占 45.0%，分配基本均衡。下面一行是关键：两人都覆盖了 W1 到 W16 全部十六个教学周，没有空档周；评审 PPT、代码清单、总评审 PPT 这六项汇报型交付物由我们共同承担。</a:t>
+              <a:t>这一页把 15 项阶段交付物逐项落到人。左边是十个阶段各自的交付物和责任人，可以看到每个阶段的交付物都有明确的主责人，不存在无人负责的情况。右边是贡献汇总：总工作量 496 人时，我承担 272.80 人时占 55.0%，李雨鑫承担 223.20 人时占 45.0%，分配基本均衡。下面一行是关键：两人都覆盖了 W1 到 W16 全部十六个教学周，没有空档周；评审 PPT、代码清单、总评审 PPT 这六项汇报型交付物由我们共同承担。</a:t>
             </a:r>
           </a:p>
           <a:p/>
@@ -17110,7 +17110,7 @@
                 <a:ea typeface="微软雅黑" panose="020B0503020204020204" pitchFamily="34" charset="-122"/>
                 <a:cs typeface="微软雅黑" panose="020B0503020204020204" pitchFamily="34" charset="-120"/>
               </a:rPr>
-              <a:t>34.10 人天 · 55.0%</a:t>
+              <a:t>272.80 人时 · 55.0%</a:t>
             </a:r>
           </a:p>
         </p:txBody>
@@ -17311,7 +17311,7 @@
                 <a:ea typeface="微软雅黑" panose="020B0503020204020204" pitchFamily="34" charset="-122"/>
                 <a:cs typeface="微软雅黑" panose="020B0503020204020204" pitchFamily="34" charset="-120"/>
               </a:rPr>
-              <a:t>27.90 人天 · 45.0%</a:t>
+              <a:t>223.20 人时 · 45.0%</a:t>
             </a:r>
           </a:p>
         </p:txBody>
@@ -18182,7 +18182,7 @@
           <p:nvPr/>
         </p:nvPicPr>
         <p:blipFill>
-          <a:blip r:embed="rId7"/>
+          <a:blip r:embed="rId8"/>
           <a:stretch>
             <a:fillRect/>
           </a:stretch>

--- a/assets/SE2026-G22-校园互助平台-项目方案PPT.pptx
+++ b/assets/SE2026-G22-校园互助平台-项目方案PPT.pptx
@@ -21152,7 +21152,7 @@
                 <a:ea typeface="微软雅黑" panose="020B0503020204020204" pitchFamily="34" charset="-122"/>
                 <a:cs typeface="微软雅黑" panose="020B0503020204020204" pitchFamily="34" charset="-120"/>
               </a:rPr>
-              <a:t>① 计划书升版 V3.0，补齐甘特图与负载分析
+              <a:t>① 计划书升版 V1.2，补齐甘特图与负载分析
 ② 编码提前至 2026/11/16–2026/11/20；峰值周由两人共同承担
 ③ 可行性报告 10/21 提交</a:t>
             </a:r>
